--- a/slides/Parking_Intelligence_Deck.pptx
+++ b/slides/Parking_Intelligence_Deck.pptx
@@ -116,6 +116,910 @@
     </a:lvl9pPr>
   </p:defaultTextStyle>
 </p:presentation>
+</file>
+
+<file path=ppt/charts/chart1.xml><?xml version="1.0" encoding="utf-8"?>
+<c:chartSpace xmlns:c="http://schemas.openxmlformats.org/drawingml/2006/chart" xmlns:a="http://schemas.openxmlformats.org/drawingml/2006/main" xmlns:r="http://schemas.openxmlformats.org/officeDocument/2006/relationships">
+  <c:date1904 val="0"/>
+  <c:chart>
+    <c:title>
+      <c:tx>
+        <c:rich>
+          <a:bodyPr/>
+          <a:lstStyle/>
+          <a:p>
+            <a:pPr>
+              <a:defRPr sz="1300"/>
+            </a:pPr>
+            <a:r>
+              <a:t>PR-AUC by prediction horizon</a:t>
+            </a:r>
+          </a:p>
+        </c:rich>
+      </c:tx>
+      <c:layout/>
+      <c:overlay val="0"/>
+    </c:title>
+    <c:autoTitleDeleted val="0"/>
+    <c:plotArea>
+      <c:barChart>
+        <c:barDir val="col"/>
+        <c:grouping val="clustered"/>
+        <c:ser>
+          <c:idx val="0"/>
+          <c:order val="0"/>
+          <c:tx>
+            <c:strRef>
+              <c:f>Sheet1!$B$1</c:f>
+              <c:strCache>
+                <c:ptCount val="1"/>
+                <c:pt idx="0">
+                  <c:v>PR-AUC</c:v>
+                </c:pt>
+              </c:strCache>
+            </c:strRef>
+          </c:tx>
+          <c:spPr>
+            <a:solidFill>
+              <a:srgbClr val="4F46E5"/>
+            </a:solidFill>
+          </c:spPr>
+          <c:cat>
+            <c:strRef>
+              <c:f>Sheet1!$A$2:$A$5</c:f>
+              <c:strCache>
+                <c:ptCount val="4"/>
+                <c:pt idx="0">
+                  <c:v>15 min</c:v>
+                </c:pt>
+                <c:pt idx="1">
+                  <c:v>30 min</c:v>
+                </c:pt>
+                <c:pt idx="2">
+                  <c:v>60 min</c:v>
+                </c:pt>
+                <c:pt idx="3">
+                  <c:v>90 min</c:v>
+                </c:pt>
+              </c:strCache>
+            </c:strRef>
+          </c:cat>
+          <c:val>
+            <c:numRef>
+              <c:f>Sheet1!$B$2:$B$5</c:f>
+              <c:numCache>
+                <c:formatCode>General</c:formatCode>
+                <c:ptCount val="4"/>
+                <c:pt idx="0">
+                  <c:v>0.7834</c:v>
+                </c:pt>
+                <c:pt idx="1">
+                  <c:v>0.8337</c:v>
+                </c:pt>
+                <c:pt idx="2">
+                  <c:v>0.8767</c:v>
+                </c:pt>
+                <c:pt idx="3">
+                  <c:v>0.8929</c:v>
+                </c:pt>
+              </c:numCache>
+            </c:numRef>
+          </c:val>
+        </c:ser>
+        <c:dLbls>
+          <c:numFmt formatCode="0.00" sourceLinked="0"/>
+          <c:txPr>
+            <a:bodyPr/>
+            <a:lstStyle/>
+            <a:p>
+              <a:pPr>
+                <a:defRPr sz="1100" b="1"/>
+              </a:pPr>
+            </a:p>
+          </c:txPr>
+          <c:showLegendKey val="0"/>
+          <c:showVal val="1"/>
+          <c:showCatName val="0"/>
+          <c:showSerName val="0"/>
+          <c:showPercent val="0"/>
+          <c:showBubbleSize val="0"/>
+          <c:showLeaderLines val="1"/>
+        </c:dLbls>
+        <c:axId val="-2068027336"/>
+        <c:axId val="-2113994440"/>
+      </c:barChart>
+      <c:catAx>
+        <c:axId val="-2068027336"/>
+        <c:scaling>
+          <c:orientation val="minMax"/>
+        </c:scaling>
+        <c:delete val="0"/>
+        <c:axPos val="b"/>
+        <c:majorTickMark val="out"/>
+        <c:minorTickMark val="none"/>
+        <c:tickLblPos val="nextTo"/>
+        <c:txPr>
+          <a:bodyPr/>
+          <a:lstStyle/>
+          <a:p>
+            <a:pPr>
+              <a:defRPr sz="1050"/>
+            </a:pPr>
+          </a:p>
+        </c:txPr>
+        <c:crossAx val="-2113994440"/>
+        <c:crosses val="autoZero"/>
+        <c:auto val="1"/>
+        <c:lblAlgn val="ctr"/>
+        <c:lblOffset val="100"/>
+        <c:noMultiLvlLbl val="0"/>
+      </c:catAx>
+      <c:valAx>
+        <c:axId val="-2113994440"/>
+        <c:scaling/>
+        <c:delete val="0"/>
+        <c:axPos val="l"/>
+        <c:majorTickMark val="out"/>
+        <c:minorTickMark val="none"/>
+        <c:tickLblPos val="nextTo"/>
+        <c:txPr>
+          <a:bodyPr/>
+          <a:lstStyle/>
+          <a:p>
+            <a:pPr>
+              <a:defRPr sz="1000"/>
+            </a:pPr>
+          </a:p>
+        </c:txPr>
+        <c:crossAx val="-2068027336"/>
+        <c:crosses val="autoZero"/>
+      </c:valAx>
+    </c:plotArea>
+    <c:dispBlanksAs val="gap"/>
+  </c:chart>
+  <c:txPr>
+    <a:bodyPr/>
+    <a:lstStyle/>
+    <a:p>
+      <a:pPr>
+        <a:defRPr sz="1800"/>
+      </a:pPr>
+      <a:endParaRPr lang="en-US"/>
+    </a:p>
+  </c:txPr>
+  <c:externalData r:id="rId1">
+    <c:autoUpdate val="0"/>
+  </c:externalData>
+</c:chartSpace>
+</file>
+
+<file path=ppt/charts/chart2.xml><?xml version="1.0" encoding="utf-8"?>
+<c:chartSpace xmlns:c="http://schemas.openxmlformats.org/drawingml/2006/chart" xmlns:a="http://schemas.openxmlformats.org/drawingml/2006/main" xmlns:r="http://schemas.openxmlformats.org/officeDocument/2006/relationships">
+  <c:chart>
+    <c:title>
+      <c:tx>
+        <c:rich>
+          <a:bodyPr/>
+          <a:lstStyle/>
+          <a:p>
+            <a:pPr>
+              <a:defRPr sz="1300"/>
+            </a:pPr>
+            <a:r>
+              <a:t>Current fitted weights (ADR-023)</a:t>
+            </a:r>
+          </a:p>
+        </c:rich>
+      </c:tx>
+      <c:layout/>
+      <c:overlay val="0"/>
+    </c:title>
+    <c:autoTitleDeleted val="0"/>
+    <c:plotArea>
+      <c:pieChart>
+        <c:varyColors val="1"/>
+        <c:ser>
+          <c:idx val="0"/>
+          <c:order val="0"/>
+          <c:tx>
+            <c:strRef>
+              <c:f>Sheet1!$B$1</c:f>
+              <c:strCache>
+                <c:ptCount val="1"/>
+                <c:pt idx="0">
+                  <c:v>Series 1</c:v>
+                </c:pt>
+              </c:strCache>
+            </c:strRef>
+          </c:tx>
+          <c:dPt>
+            <c:idx val="0"/>
+            <c:spPr>
+              <a:solidFill>
+                <a:srgbClr val="4F46E5"/>
+              </a:solidFill>
+            </c:spPr>
+          </c:dPt>
+          <c:dPt>
+            <c:idx val="1"/>
+            <c:spPr>
+              <a:solidFill>
+                <a:srgbClr val="22C55E"/>
+              </a:solidFill>
+            </c:spPr>
+          </c:dPt>
+          <c:dPt>
+            <c:idx val="2"/>
+            <c:spPr>
+              <a:solidFill>
+                <a:srgbClr val="F59E0B"/>
+              </a:solidFill>
+            </c:spPr>
+          </c:dPt>
+          <c:dPt>
+            <c:idx val="3"/>
+            <c:spPr>
+              <a:solidFill>
+                <a:srgbClr val="EF4444"/>
+              </a:solidFill>
+            </c:spPr>
+          </c:dPt>
+          <c:cat>
+            <c:strRef>
+              <c:f>Sheet1!$A$2:$A$5</c:f>
+              <c:strCache>
+                <c:ptCount val="4"/>
+                <c:pt idx="0">
+                  <c:v>Hotspot prob.</c:v>
+                </c:pt>
+                <c:pt idx="1">
+                  <c:v>Predicted count</c:v>
+                </c:pt>
+                <c:pt idx="2">
+                  <c:v>Persistence</c:v>
+                </c:pt>
+                <c:pt idx="3">
+                  <c:v>Recent intensity</c:v>
+                </c:pt>
+              </c:strCache>
+            </c:strRef>
+          </c:cat>
+          <c:val>
+            <c:numRef>
+              <c:f>Sheet1!$B$2:$B$5</c:f>
+              <c:numCache>
+                <c:formatCode>General</c:formatCode>
+                <c:ptCount val="4"/>
+                <c:pt idx="0">
+                  <c:v>0.02</c:v>
+                </c:pt>
+                <c:pt idx="1">
+                  <c:v>0.701</c:v>
+                </c:pt>
+                <c:pt idx="2">
+                  <c:v>0.147</c:v>
+                </c:pt>
+                <c:pt idx="3">
+                  <c:v>0.131</c:v>
+                </c:pt>
+              </c:numCache>
+            </c:numRef>
+          </c:val>
+        </c:ser>
+        <c:dLbls>
+          <c:numFmt formatCode="0.0%" sourceLinked="0"/>
+          <c:txPr>
+            <a:bodyPr/>
+            <a:lstStyle/>
+            <a:p>
+              <a:pPr>
+                <a:defRPr sz="1100" b="1">
+                  <a:solidFill>
+                    <a:srgbClr val="FFFFFF"/>
+                  </a:solidFill>
+                </a:defRPr>
+              </a:pPr>
+            </a:p>
+          </c:txPr>
+          <c:showLegendKey val="0"/>
+          <c:showVal val="1"/>
+          <c:showCatName val="0"/>
+          <c:showSerName val="0"/>
+          <c:showPercent val="1"/>
+          <c:showBubbleSize val="0"/>
+          <c:showLeaderLines val="1"/>
+        </c:dLbls>
+      </c:pieChart>
+    </c:plotArea>
+    <c:legend>
+      <c:legendPos/>
+      <c:overlay val="0"/>
+      <c:txPr>
+        <a:bodyPr/>
+        <a:lstStyle/>
+        <a:p>
+          <a:pPr>
+            <a:defRPr sz="1100"/>
+          </a:pPr>
+        </a:p>
+      </c:txPr>
+    </c:legend>
+    <c:dispBlanksAs val="gap"/>
+  </c:chart>
+  <c:txPr>
+    <a:bodyPr/>
+    <a:lstStyle/>
+    <a:p>
+      <a:pPr>
+        <a:defRPr sz="1800"/>
+      </a:pPr>
+      <a:endParaRPr lang="en-US"/>
+    </a:p>
+  </c:txPr>
+  <c:externalData r:id="rId1">
+    <c:autoUpdate val="0"/>
+  </c:externalData>
+</c:chartSpace>
+</file>
+
+<file path=ppt/charts/chart3.xml><?xml version="1.0" encoding="utf-8"?>
+<c:chartSpace xmlns:c="http://schemas.openxmlformats.org/drawingml/2006/chart" xmlns:a="http://schemas.openxmlformats.org/drawingml/2006/main" xmlns:r="http://schemas.openxmlformats.org/officeDocument/2006/relationships">
+  <c:date1904 val="0"/>
+  <c:chart>
+    <c:title>
+      <c:tx>
+        <c:rich>
+          <a:bodyPr/>
+          <a:lstStyle/>
+          <a:p>
+            <a:pPr>
+              <a:defRPr sz="1300"/>
+            </a:pPr>
+            <a:r>
+              <a:t>Spatial holdout drop — two rounds of fixes</a:t>
+            </a:r>
+          </a:p>
+        </c:rich>
+      </c:tx>
+      <c:layout/>
+      <c:overlay val="0"/>
+    </c:title>
+    <c:autoTitleDeleted val="0"/>
+    <c:plotArea>
+      <c:barChart>
+        <c:barDir val="col"/>
+        <c:grouping val="clustered"/>
+        <c:ser>
+          <c:idx val="0"/>
+          <c:order val="0"/>
+          <c:tx>
+            <c:strRef>
+              <c:f>Sheet1!$B$1</c:f>
+              <c:strCache>
+                <c:ptCount val="1"/>
+                <c:pt idx="0">
+                  <c:v>PR-AUC drop %</c:v>
+                </c:pt>
+              </c:strCache>
+            </c:strRef>
+          </c:tx>
+          <c:spPr>
+            <a:solidFill>
+              <a:srgbClr val="4F46E5"/>
+            </a:solidFill>
+          </c:spPr>
+          <c:dPt>
+            <c:idx val="0"/>
+            <c:spPr>
+              <a:solidFill>
+                <a:srgbClr val="B45309"/>
+              </a:solidFill>
+            </c:spPr>
+          </c:dPt>
+          <c:dPt>
+            <c:idx val="1"/>
+            <c:spPr>
+              <a:solidFill>
+                <a:srgbClr val="4F46E5"/>
+              </a:solidFill>
+            </c:spPr>
+          </c:dPt>
+          <c:dPt>
+            <c:idx val="2"/>
+            <c:spPr>
+              <a:solidFill>
+                <a:srgbClr val="15803D"/>
+              </a:solidFill>
+            </c:spPr>
+          </c:dPt>
+          <c:cat>
+            <c:strRef>
+              <c:f>Sheet1!$A$2:$A$4</c:f>
+              <c:strCache>
+                <c:ptCount val="3"/>
+                <c:pt idx="0">
+                  <c:v>Original
+(frozen)</c:v>
+                </c:pt>
+                <c:pt idx="1">
+                  <c:v>ADR-022
+(neighbor feats)</c:v>
+                </c:pt>
+                <c:pt idx="2">
+                  <c:v>ADR-025
+(regularization)</c:v>
+                </c:pt>
+              </c:strCache>
+            </c:strRef>
+          </c:cat>
+          <c:val>
+            <c:numRef>
+              <c:f>Sheet1!$B$2:$B$4</c:f>
+              <c:numCache>
+                <c:formatCode>General</c:formatCode>
+                <c:ptCount val="3"/>
+                <c:pt idx="0">
+                  <c:v>7.88</c:v>
+                </c:pt>
+                <c:pt idx="1">
+                  <c:v>6.32</c:v>
+                </c:pt>
+                <c:pt idx="2">
+                  <c:v>5.66</c:v>
+                </c:pt>
+              </c:numCache>
+            </c:numRef>
+          </c:val>
+        </c:ser>
+        <c:dLbls>
+          <c:numFmt formatCode="0.00&quot;%&quot;" sourceLinked="0"/>
+          <c:txPr>
+            <a:bodyPr/>
+            <a:lstStyle/>
+            <a:p>
+              <a:pPr>
+                <a:defRPr sz="1100" b="1"/>
+              </a:pPr>
+            </a:p>
+          </c:txPr>
+          <c:showLegendKey val="0"/>
+          <c:showVal val="1"/>
+          <c:showCatName val="0"/>
+          <c:showSerName val="0"/>
+          <c:showPercent val="0"/>
+          <c:showBubbleSize val="0"/>
+          <c:showLeaderLines val="1"/>
+        </c:dLbls>
+        <c:axId val="-2068027336"/>
+        <c:axId val="-2113994440"/>
+      </c:barChart>
+      <c:catAx>
+        <c:axId val="-2068027336"/>
+        <c:scaling>
+          <c:orientation val="minMax"/>
+        </c:scaling>
+        <c:delete val="0"/>
+        <c:axPos val="b"/>
+        <c:majorTickMark val="out"/>
+        <c:minorTickMark val="none"/>
+        <c:tickLblPos val="nextTo"/>
+        <c:txPr>
+          <a:bodyPr/>
+          <a:lstStyle/>
+          <a:p>
+            <a:pPr>
+              <a:defRPr sz="1050"/>
+            </a:pPr>
+          </a:p>
+        </c:txPr>
+        <c:crossAx val="-2113994440"/>
+        <c:crosses val="autoZero"/>
+        <c:auto val="1"/>
+        <c:lblAlgn val="ctr"/>
+        <c:lblOffset val="100"/>
+        <c:noMultiLvlLbl val="0"/>
+      </c:catAx>
+      <c:valAx>
+        <c:axId val="-2113994440"/>
+        <c:scaling/>
+        <c:delete val="0"/>
+        <c:axPos val="l"/>
+        <c:majorTickMark val="out"/>
+        <c:minorTickMark val="none"/>
+        <c:tickLblPos val="nextTo"/>
+        <c:txPr>
+          <a:bodyPr/>
+          <a:lstStyle/>
+          <a:p>
+            <a:pPr>
+              <a:defRPr sz="1000"/>
+            </a:pPr>
+          </a:p>
+        </c:txPr>
+        <c:crossAx val="-2068027336"/>
+        <c:crosses val="autoZero"/>
+      </c:valAx>
+    </c:plotArea>
+    <c:dispBlanksAs val="gap"/>
+  </c:chart>
+  <c:txPr>
+    <a:bodyPr/>
+    <a:lstStyle/>
+    <a:p>
+      <a:pPr>
+        <a:defRPr sz="1800"/>
+      </a:pPr>
+      <a:endParaRPr lang="en-US"/>
+    </a:p>
+  </c:txPr>
+  <c:externalData r:id="rId1">
+    <c:autoUpdate val="0"/>
+  </c:externalData>
+</c:chartSpace>
+</file>
+
+<file path=ppt/charts/chart4.xml><?xml version="1.0" encoding="utf-8"?>
+<c:chartSpace xmlns:c="http://schemas.openxmlformats.org/drawingml/2006/chart" xmlns:a="http://schemas.openxmlformats.org/drawingml/2006/main" xmlns:r="http://schemas.openxmlformats.org/officeDocument/2006/relationships">
+  <c:date1904 val="0"/>
+  <c:chart>
+    <c:title>
+      <c:tx>
+        <c:rich>
+          <a:bodyPr/>
+          <a:lstStyle/>
+          <a:p>
+            <a:pPr>
+              <a:defRPr sz="1300"/>
+            </a:pPr>
+            <a:r>
+              <a:t>Drop % vs. tree depth</a:t>
+            </a:r>
+          </a:p>
+        </c:rich>
+      </c:tx>
+      <c:layout/>
+      <c:overlay val="0"/>
+    </c:title>
+    <c:autoTitleDeleted val="0"/>
+    <c:plotArea>
+      <c:barChart>
+        <c:barDir val="col"/>
+        <c:grouping val="clustered"/>
+        <c:ser>
+          <c:idx val="0"/>
+          <c:order val="0"/>
+          <c:tx>
+            <c:strRef>
+              <c:f>Sheet1!$B$1</c:f>
+              <c:strCache>
+                <c:ptCount val="1"/>
+                <c:pt idx="0">
+                  <c:v>PR-AUC drop %</c:v>
+                </c:pt>
+              </c:strCache>
+            </c:strRef>
+          </c:tx>
+          <c:spPr>
+            <a:solidFill>
+              <a:srgbClr val="4F46E5"/>
+            </a:solidFill>
+          </c:spPr>
+          <c:dPt>
+            <c:idx val="0"/>
+            <c:spPr>
+              <a:solidFill>
+                <a:srgbClr val="B45309"/>
+              </a:solidFill>
+            </c:spPr>
+          </c:dPt>
+          <c:dPt>
+            <c:idx val="1"/>
+            <c:spPr>
+              <a:solidFill>
+                <a:srgbClr val="15803D"/>
+              </a:solidFill>
+            </c:spPr>
+          </c:dPt>
+          <c:dPt>
+            <c:idx val="2"/>
+            <c:spPr>
+              <a:solidFill>
+                <a:srgbClr val="4F46E5"/>
+              </a:solidFill>
+            </c:spPr>
+          </c:dPt>
+          <c:dPt>
+            <c:idx val="3"/>
+            <c:spPr>
+              <a:solidFill>
+                <a:srgbClr val="4F46E5"/>
+              </a:solidFill>
+            </c:spPr>
+          </c:dPt>
+          <c:cat>
+            <c:strRef>
+              <c:f>Sheet1!$A$2:$A$5</c:f>
+              <c:strCache>
+                <c:ptCount val="4"/>
+                <c:pt idx="0">
+                  <c:v>depth=6
+(baseline)</c:v>
+                </c:pt>
+                <c:pt idx="1">
+                  <c:v>depth=3
+(adopted)</c:v>
+                </c:pt>
+                <c:pt idx="2">
+                  <c:v>depth=2</c:v>
+                </c:pt>
+                <c:pt idx="3">
+                  <c:v>depth=1</c:v>
+                </c:pt>
+              </c:strCache>
+            </c:strRef>
+          </c:cat>
+          <c:val>
+            <c:numRef>
+              <c:f>Sheet1!$B$2:$B$5</c:f>
+              <c:numCache>
+                <c:formatCode>General</c:formatCode>
+                <c:ptCount val="4"/>
+                <c:pt idx="0">
+                  <c:v>6.32</c:v>
+                </c:pt>
+                <c:pt idx="1">
+                  <c:v>5.66</c:v>
+                </c:pt>
+                <c:pt idx="2">
+                  <c:v>5.54</c:v>
+                </c:pt>
+                <c:pt idx="3">
+                  <c:v>5.27</c:v>
+                </c:pt>
+              </c:numCache>
+            </c:numRef>
+          </c:val>
+        </c:ser>
+        <c:dLbls>
+          <c:numFmt formatCode="0.00&quot;%&quot;" sourceLinked="0"/>
+          <c:txPr>
+            <a:bodyPr/>
+            <a:lstStyle/>
+            <a:p>
+              <a:pPr>
+                <a:defRPr sz="1100" b="1"/>
+              </a:pPr>
+            </a:p>
+          </c:txPr>
+          <c:showLegendKey val="0"/>
+          <c:showVal val="1"/>
+          <c:showCatName val="0"/>
+          <c:showSerName val="0"/>
+          <c:showPercent val="0"/>
+          <c:showBubbleSize val="0"/>
+          <c:showLeaderLines val="1"/>
+        </c:dLbls>
+        <c:axId val="-2068027336"/>
+        <c:axId val="-2113994440"/>
+      </c:barChart>
+      <c:catAx>
+        <c:axId val="-2068027336"/>
+        <c:scaling>
+          <c:orientation val="minMax"/>
+        </c:scaling>
+        <c:delete val="0"/>
+        <c:axPos val="b"/>
+        <c:majorTickMark val="out"/>
+        <c:minorTickMark val="none"/>
+        <c:tickLblPos val="nextTo"/>
+        <c:txPr>
+          <a:bodyPr/>
+          <a:lstStyle/>
+          <a:p>
+            <a:pPr>
+              <a:defRPr sz="1050"/>
+            </a:pPr>
+          </a:p>
+        </c:txPr>
+        <c:crossAx val="-2113994440"/>
+        <c:crosses val="autoZero"/>
+        <c:auto val="1"/>
+        <c:lblAlgn val="ctr"/>
+        <c:lblOffset val="100"/>
+        <c:noMultiLvlLbl val="0"/>
+      </c:catAx>
+      <c:valAx>
+        <c:axId val="-2113994440"/>
+        <c:scaling/>
+        <c:delete val="0"/>
+        <c:axPos val="l"/>
+        <c:majorTickMark val="out"/>
+        <c:minorTickMark val="none"/>
+        <c:tickLblPos val="nextTo"/>
+        <c:txPr>
+          <a:bodyPr/>
+          <a:lstStyle/>
+          <a:p>
+            <a:pPr>
+              <a:defRPr sz="1000"/>
+            </a:pPr>
+          </a:p>
+        </c:txPr>
+        <c:crossAx val="-2068027336"/>
+        <c:crosses val="autoZero"/>
+      </c:valAx>
+    </c:plotArea>
+    <c:dispBlanksAs val="gap"/>
+  </c:chart>
+  <c:txPr>
+    <a:bodyPr/>
+    <a:lstStyle/>
+    <a:p>
+      <a:pPr>
+        <a:defRPr sz="1800"/>
+      </a:pPr>
+      <a:endParaRPr lang="en-US"/>
+    </a:p>
+  </c:txPr>
+  <c:externalData r:id="rId1">
+    <c:autoUpdate val="0"/>
+  </c:externalData>
+</c:chartSpace>
+</file>
+
+<file path=ppt/charts/chart5.xml><?xml version="1.0" encoding="utf-8"?>
+<c:chartSpace xmlns:c="http://schemas.openxmlformats.org/drawingml/2006/chart" xmlns:a="http://schemas.openxmlformats.org/drawingml/2006/main" xmlns:r="http://schemas.openxmlformats.org/officeDocument/2006/relationships">
+  <c:chart>
+    <c:title>
+      <c:tx>
+        <c:rich>
+          <a:bodyPr/>
+          <a:lstStyle/>
+          <a:p>
+            <a:pPr>
+              <a:defRPr sz="1300"/>
+            </a:pPr>
+            <a:r>
+              <a:t>Live risk-band distribution (2,534 cells)</a:t>
+            </a:r>
+          </a:p>
+        </c:rich>
+      </c:tx>
+      <c:layout/>
+      <c:overlay val="0"/>
+    </c:title>
+    <c:autoTitleDeleted val="0"/>
+    <c:plotArea>
+      <c:pieChart>
+        <c:varyColors val="1"/>
+        <c:ser>
+          <c:idx val="0"/>
+          <c:order val="0"/>
+          <c:tx>
+            <c:strRef>
+              <c:f>Sheet1!$B$1</c:f>
+              <c:strCache>
+                <c:ptCount val="1"/>
+                <c:pt idx="0">
+                  <c:v>Series 1</c:v>
+                </c:pt>
+              </c:strCache>
+            </c:strRef>
+          </c:tx>
+          <c:dPt>
+            <c:idx val="0"/>
+            <c:spPr>
+              <a:solidFill>
+                <a:srgbClr val="4F46E5"/>
+              </a:solidFill>
+            </c:spPr>
+          </c:dPt>
+          <c:dPt>
+            <c:idx val="1"/>
+            <c:spPr>
+              <a:solidFill>
+                <a:srgbClr val="22C55E"/>
+              </a:solidFill>
+            </c:spPr>
+          </c:dPt>
+          <c:dPt>
+            <c:idx val="2"/>
+            <c:spPr>
+              <a:solidFill>
+                <a:srgbClr val="F59E0B"/>
+              </a:solidFill>
+            </c:spPr>
+          </c:dPt>
+          <c:cat>
+            <c:strRef>
+              <c:f>Sheet1!$A$2:$A$4</c:f>
+              <c:strCache>
+                <c:ptCount val="3"/>
+                <c:pt idx="0">
+                  <c:v>LOW</c:v>
+                </c:pt>
+                <c:pt idx="1">
+                  <c:v>MEDIUM</c:v>
+                </c:pt>
+                <c:pt idx="2">
+                  <c:v>HIGH</c:v>
+                </c:pt>
+              </c:strCache>
+            </c:strRef>
+          </c:cat>
+          <c:val>
+            <c:numRef>
+              <c:f>Sheet1!$B$2:$B$4</c:f>
+              <c:numCache>
+                <c:formatCode>General</c:formatCode>
+                <c:ptCount val="3"/>
+                <c:pt idx="0">
+                  <c:v>94.2</c:v>
+                </c:pt>
+                <c:pt idx="1">
+                  <c:v>5.5</c:v>
+                </c:pt>
+                <c:pt idx="2">
+                  <c:v>0.3</c:v>
+                </c:pt>
+              </c:numCache>
+            </c:numRef>
+          </c:val>
+        </c:ser>
+        <c:dLbls>
+          <c:numFmt formatCode="0.0%" sourceLinked="0"/>
+          <c:txPr>
+            <a:bodyPr/>
+            <a:lstStyle/>
+            <a:p>
+              <a:pPr>
+                <a:defRPr sz="1100" b="1">
+                  <a:solidFill>
+                    <a:srgbClr val="FFFFFF"/>
+                  </a:solidFill>
+                </a:defRPr>
+              </a:pPr>
+            </a:p>
+          </c:txPr>
+          <c:showLegendKey val="0"/>
+          <c:showVal val="1"/>
+          <c:showCatName val="0"/>
+          <c:showSerName val="0"/>
+          <c:showPercent val="1"/>
+          <c:showBubbleSize val="0"/>
+          <c:showLeaderLines val="1"/>
+        </c:dLbls>
+      </c:pieChart>
+    </c:plotArea>
+    <c:legend>
+      <c:legendPos/>
+      <c:overlay val="0"/>
+      <c:txPr>
+        <a:bodyPr/>
+        <a:lstStyle/>
+        <a:p>
+          <a:pPr>
+            <a:defRPr sz="1100"/>
+          </a:pPr>
+        </a:p>
+      </c:txPr>
+    </c:legend>
+    <c:dispBlanksAs val="gap"/>
+  </c:chart>
+  <c:txPr>
+    <a:bodyPr/>
+    <a:lstStyle/>
+    <a:p>
+      <a:pPr>
+        <a:defRPr sz="1800"/>
+      </a:pPr>
+      <a:endParaRPr lang="en-US"/>
+    </a:p>
+  </c:txPr>
+  <c:externalData r:id="rId1">
+    <c:autoUpdate val="0"/>
+  </c:externalData>
+</c:chartSpace>
 </file>
 
 <file path=ppt/slideLayouts/slideLayout1.xml><?xml version="1.0" encoding="utf-8"?>
@@ -3170,7 +4074,6 @@
                 <a:solidFill>
                   <a:srgbClr val="FFFFFF"/>
                 </a:solidFill>
-                <a:latin typeface="Calibri"/>
               </a:rPr>
               <a:t>Parking Intelligence — Decision Support Platform</a:t>
             </a:r>
@@ -3205,7 +4108,6 @@
                 <a:solidFill>
                   <a:srgbClr val="C7D2FE"/>
                 </a:solidFill>
-                <a:latin typeface="Calibri"/>
               </a:rPr>
               <a:t>AI-Driven Illegal-Parking Hotspot Detection &amp; Traffic-Impact Quantification</a:t>
             </a:r>
@@ -3240,7 +4142,6 @@
                 <a:solidFill>
                   <a:srgbClr val="94A3B8"/>
                 </a:solidFill>
-                <a:latin typeface="Calibri"/>
               </a:rPr>
               <a:t>Bengaluru Traffic Police · 298,450 real violation records · Zero external data</a:t>
             </a:r>
@@ -3275,7 +4176,6 @@
                 <a:solidFill>
                   <a:srgbClr val="64748B"/>
                 </a:solidFill>
-                <a:latin typeface="Calibri"/>
               </a:rPr>
               <a:t>Internal-data-only (ADR-001) · No Maps/external APIs used, per competition rules</a:t>
             </a:r>
@@ -3371,7 +4271,6 @@
                 <a:solidFill>
                   <a:srgbClr val="FFFFFF"/>
                 </a:solidFill>
-                <a:latin typeface="Calibri"/>
               </a:rPr>
               <a:t>API Surface &amp; Deployment</a:t>
             </a:r>
@@ -3406,7 +4305,6 @@
                 <a:solidFill>
                   <a:srgbClr val="C7D2FE"/>
                 </a:solidFill>
-                <a:latin typeface="Calibri"/>
               </a:rPr>
               <a:t>FastAPI backend, Next.js frontend</a:t>
             </a:r>
@@ -3456,276 +4354,548 @@
           </a:p>
         </p:txBody>
       </p:sp>
-      <p:sp>
-        <p:nvSpPr>
-          <p:cNvPr id="6" name="TextBox 5"/>
-          <p:cNvSpPr txBox="1"/>
-          <p:nvPr/>
-        </p:nvSpPr>
-        <p:spPr>
-          <a:xfrm>
-            <a:off x="548640" y="1188720"/>
-            <a:ext cx="5486400" cy="365760"/>
-          </a:xfrm>
-          <a:prstGeom prst="rect">
-            <a:avLst/>
-          </a:prstGeom>
-          <a:noFill/>
-        </p:spPr>
-        <p:txBody>
-          <a:bodyPr wrap="square">
-            <a:spAutoFit/>
-          </a:bodyPr>
-          <a:lstStyle/>
-          <a:p>
-            <a:pPr algn="l"/>
-            <a:r>
-              <a:rPr sz="1600" b="1">
-                <a:solidFill>
-                  <a:srgbClr val="0F172A"/>
-                </a:solidFill>
-                <a:latin typeface="Calibri"/>
-              </a:rPr>
-              <a:t>Public API</a:t>
-            </a:r>
-          </a:p>
-        </p:txBody>
-      </p:sp>
-      <p:sp>
-        <p:nvSpPr>
-          <p:cNvPr id="7" name="TextBox 6"/>
-          <p:cNvSpPr txBox="1"/>
-          <p:nvPr/>
-        </p:nvSpPr>
-        <p:spPr>
-          <a:xfrm>
-            <a:off x="548640" y="1600200"/>
-            <a:ext cx="5486400" cy="2377440"/>
-          </a:xfrm>
-          <a:prstGeom prst="rect">
-            <a:avLst/>
-          </a:prstGeom>
-          <a:noFill/>
-        </p:spPr>
-        <p:txBody>
-          <a:bodyPr wrap="square">
-            <a:spAutoFit/>
-          </a:bodyPr>
-          <a:lstStyle/>
-          <a:p>
-            <a:pPr>
-              <a:lnSpc>
-                <a:spcPct val="115000"/>
-              </a:lnSpc>
-              <a:spcAft>
-                <a:spcPts val="600"/>
-              </a:spcAft>
-              <a:defRPr sz="1300">
-                <a:solidFill>
-                  <a:srgbClr val="334155"/>
-                </a:solidFill>
-              </a:defRPr>
-            </a:pPr>
-            <a:r>
-              <a:t>• GET /health — schema validity, row count</a:t>
-            </a:r>
-          </a:p>
-          <a:p>
-            <a:pPr>
-              <a:lnSpc>
-                <a:spcPct val="115000"/>
-              </a:lnSpc>
-              <a:spcAft>
-                <a:spcPts val="600"/>
-              </a:spcAft>
-              <a:defRPr sz="1300">
-                <a:solidFill>
-                  <a:srgbClr val="334155"/>
-                </a:solidFill>
-              </a:defRPr>
-            </a:pPr>
-            <a:r>
-              <a:t>• GET /forecast — per-cell or per-coordinate prediction (probability, predicted count, risk score/band, top contributing factors, confidence, cold-start flag)</a:t>
-            </a:r>
-          </a:p>
-          <a:p>
-            <a:pPr>
-              <a:lnSpc>
-                <a:spcPct val="115000"/>
-              </a:lnSpc>
-              <a:spcAft>
-                <a:spcPts val="600"/>
-              </a:spcAft>
-              <a:defRPr sz="1300">
-                <a:solidFill>
-                  <a:srgbClr val="334155"/>
-                </a:solidFill>
-              </a:defRPr>
-            </a:pPr>
-            <a:r>
-              <a:t>• GET /alerts — ranked list of GREEN/YELLOW/ORANGE/RED alerts across all cells</a:t>
-            </a:r>
-          </a:p>
-          <a:p>
-            <a:pPr>
-              <a:lnSpc>
-                <a:spcPct val="115000"/>
-              </a:lnSpc>
-              <a:spcAft>
-                <a:spcPts val="600"/>
-              </a:spcAft>
-              <a:defRPr sz="1300">
-                <a:solidFill>
-                  <a:srgbClr val="334155"/>
-                </a:solidFill>
-              </a:defRPr>
-            </a:pPr>
-            <a:r>
-              <a:t>• GET /metrics — model comparison, spatial robustness, live risk distribution, temporal distribution — all real numbers, nothing recomputed client-side</a:t>
-            </a:r>
-          </a:p>
-          <a:p>
-            <a:pPr>
-              <a:lnSpc>
-                <a:spcPct val="115000"/>
-              </a:lnSpc>
-              <a:spcAft>
-                <a:spcPts val="600"/>
-              </a:spcAft>
-              <a:defRPr sz="1300">
-                <a:solidFill>
-                  <a:srgbClr val="334155"/>
-                </a:solidFill>
-              </a:defRPr>
-            </a:pPr>
-            <a:r>
-              <a:t>• GET /replay/{scenario} — real historical event sequence replay for demos</a:t>
-            </a:r>
-          </a:p>
-        </p:txBody>
-      </p:sp>
-      <p:sp>
-        <p:nvSpPr>
-          <p:cNvPr id="8" name="TextBox 7"/>
-          <p:cNvSpPr txBox="1"/>
-          <p:nvPr/>
-        </p:nvSpPr>
-        <p:spPr>
-          <a:xfrm>
-            <a:off x="548640" y="4160520"/>
-            <a:ext cx="5486400" cy="365760"/>
-          </a:xfrm>
-          <a:prstGeom prst="rect">
-            <a:avLst/>
-          </a:prstGeom>
-          <a:noFill/>
-        </p:spPr>
-        <p:txBody>
-          <a:bodyPr wrap="square">
-            <a:spAutoFit/>
-          </a:bodyPr>
-          <a:lstStyle/>
-          <a:p>
-            <a:pPr algn="l"/>
-            <a:r>
-              <a:rPr sz="1600" b="1">
-                <a:solidFill>
-                  <a:srgbClr val="0F172A"/>
-                </a:solidFill>
-                <a:latin typeface="Calibri"/>
-              </a:rPr>
-              <a:t>Admin API (X-Admin-Token guarded)</a:t>
-            </a:r>
-          </a:p>
-        </p:txBody>
-      </p:sp>
-      <p:sp>
-        <p:nvSpPr>
-          <p:cNvPr id="9" name="TextBox 8"/>
-          <p:cNvSpPr txBox="1"/>
-          <p:nvPr/>
-        </p:nvSpPr>
-        <p:spPr>
-          <a:xfrm>
-            <a:off x="548640" y="4572000"/>
-            <a:ext cx="5486400" cy="1737360"/>
-          </a:xfrm>
-          <a:prstGeom prst="rect">
-            <a:avLst/>
-          </a:prstGeom>
-          <a:noFill/>
-        </p:spPr>
-        <p:txBody>
-          <a:bodyPr wrap="square">
-            <a:spAutoFit/>
-          </a:bodyPr>
-          <a:lstStyle/>
-          <a:p>
-            <a:pPr>
-              <a:lnSpc>
-                <a:spcPct val="115000"/>
-              </a:lnSpc>
-              <a:spcAft>
-                <a:spcPts val="600"/>
-              </a:spcAft>
-              <a:defRPr sz="1300">
-                <a:solidFill>
-                  <a:srgbClr val="334155"/>
-                </a:solidFill>
-              </a:defRPr>
-            </a:pPr>
-            <a:r>
-              <a:t>• POST /admin/staging/upload, GET /admin/staging, GET /admin/staging/{id}</a:t>
-            </a:r>
-          </a:p>
-          <a:p>
-            <a:pPr>
-              <a:lnSpc>
-                <a:spcPct val="115000"/>
-              </a:lnSpc>
-              <a:spcAft>
-                <a:spcPts val="600"/>
-              </a:spcAft>
-              <a:defRPr sz="1300">
-                <a:solidFill>
-                  <a:srgbClr val="334155"/>
-                </a:solidFill>
-              </a:defRPr>
-            </a:pPr>
-            <a:r>
-              <a:t>• POST /admin/staging/{id}/approve | /reject</a:t>
-            </a:r>
-          </a:p>
-          <a:p>
-            <a:pPr>
-              <a:lnSpc>
-                <a:spcPct val="115000"/>
-              </a:lnSpc>
-              <a:spcAft>
-                <a:spcPts val="600"/>
-              </a:spcAft>
-              <a:defRPr sz="1300">
-                <a:solidFill>
-                  <a:srgbClr val="334155"/>
-                </a:solidFill>
-              </a:defRPr>
-            </a:pPr>
-            <a:r>
-              <a:t>• POST /admin/retrain, GET /admin/retrain/{job_id}</a:t>
-            </a:r>
-          </a:p>
-        </p:txBody>
-      </p:sp>
-      <p:sp>
-        <p:nvSpPr>
-          <p:cNvPr id="10" name="Rectangle 9"/>
+      <p:graphicFrame>
+        <p:nvGraphicFramePr>
+          <p:cNvPr id="6" name="Table 5"/>
+          <p:cNvGraphicFramePr>
+            <a:graphicFrameLocks noGrp="1"/>
+          </p:cNvGraphicFramePr>
+          <p:nvPr/>
+        </p:nvGraphicFramePr>
+        <p:xfrm>
+          <a:off x="457200" y="1143000"/>
+          <a:ext cx="5760720" cy="2377440"/>
+        </p:xfrm>
+        <a:graphic>
+          <a:graphicData uri="http://schemas.openxmlformats.org/drawingml/2006/table">
+            <a:tbl>
+              <a:tblPr firstRow="1" bandRow="1">
+                <a:tableStyleId>{5C22544A-7EE6-4342-B048-85BDC9FD1C3A}</a:tableStyleId>
+              </a:tblPr>
+              <a:tblGrid>
+                <a:gridCol w="2194560"/>
+                <a:gridCol w="3566160"/>
+              </a:tblGrid>
+              <a:tr h="396240">
+                <a:tc>
+                  <a:txBody>
+                    <a:bodyPr/>
+                    <a:lstStyle/>
+                    <a:p>
+                      <a:pPr>
+                        <a:defRPr sz="1200" b="1">
+                          <a:solidFill>
+                            <a:srgbClr val="FFFFFF"/>
+                          </a:solidFill>
+                        </a:defRPr>
+                      </a:pPr>
+                      <a:r>
+                        <a:t>Public endpoint</a:t>
+                      </a:r>
+                    </a:p>
+                  </a:txBody>
+                  <a:tcPr marT="25400" marB="25400">
+                    <a:solidFill>
+                      <a:srgbClr val="0F172A"/>
+                    </a:solidFill>
+                  </a:tcPr>
+                </a:tc>
+                <a:tc>
+                  <a:txBody>
+                    <a:bodyPr/>
+                    <a:lstStyle/>
+                    <a:p>
+                      <a:pPr>
+                        <a:defRPr sz="1200" b="1">
+                          <a:solidFill>
+                            <a:srgbClr val="FFFFFF"/>
+                          </a:solidFill>
+                        </a:defRPr>
+                      </a:pPr>
+                      <a:r>
+                        <a:t>Purpose</a:t>
+                      </a:r>
+                    </a:p>
+                  </a:txBody>
+                  <a:tcPr marT="25400" marB="25400">
+                    <a:solidFill>
+                      <a:srgbClr val="0F172A"/>
+                    </a:solidFill>
+                  </a:tcPr>
+                </a:tc>
+              </a:tr>
+              <a:tr h="396240">
+                <a:tc>
+                  <a:txBody>
+                    <a:bodyPr/>
+                    <a:lstStyle/>
+                    <a:p>
+                      <a:pPr>
+                        <a:defRPr sz="1200" b="0">
+                          <a:solidFill>
+                            <a:srgbClr val="334155"/>
+                          </a:solidFill>
+                        </a:defRPr>
+                      </a:pPr>
+                      <a:r>
+                        <a:t>GET /health</a:t>
+                      </a:r>
+                    </a:p>
+                  </a:txBody>
+                  <a:tcPr marT="25400" marB="25400">
+                    <a:solidFill>
+                      <a:srgbClr val="FFFFFF"/>
+                    </a:solidFill>
+                  </a:tcPr>
+                </a:tc>
+                <a:tc>
+                  <a:txBody>
+                    <a:bodyPr/>
+                    <a:lstStyle/>
+                    <a:p>
+                      <a:pPr>
+                        <a:defRPr sz="1200" b="0">
+                          <a:solidFill>
+                            <a:srgbClr val="334155"/>
+                          </a:solidFill>
+                        </a:defRPr>
+                      </a:pPr>
+                      <a:r>
+                        <a:t>Schema validity, row count</a:t>
+                      </a:r>
+                    </a:p>
+                  </a:txBody>
+                  <a:tcPr marT="25400" marB="25400">
+                    <a:solidFill>
+                      <a:srgbClr val="FFFFFF"/>
+                    </a:solidFill>
+                  </a:tcPr>
+                </a:tc>
+              </a:tr>
+              <a:tr h="396240">
+                <a:tc>
+                  <a:txBody>
+                    <a:bodyPr/>
+                    <a:lstStyle/>
+                    <a:p>
+                      <a:pPr>
+                        <a:defRPr sz="1200" b="0">
+                          <a:solidFill>
+                            <a:srgbClr val="334155"/>
+                          </a:solidFill>
+                        </a:defRPr>
+                      </a:pPr>
+                      <a:r>
+                        <a:t>GET /forecast</a:t>
+                      </a:r>
+                    </a:p>
+                  </a:txBody>
+                  <a:tcPr marT="25400" marB="25400">
+                    <a:solidFill>
+                      <a:srgbClr val="F4F6FB"/>
+                    </a:solidFill>
+                  </a:tcPr>
+                </a:tc>
+                <a:tc>
+                  <a:txBody>
+                    <a:bodyPr/>
+                    <a:lstStyle/>
+                    <a:p>
+                      <a:pPr>
+                        <a:defRPr sz="1200" b="0">
+                          <a:solidFill>
+                            <a:srgbClr val="334155"/>
+                          </a:solidFill>
+                        </a:defRPr>
+                      </a:pPr>
+                      <a:r>
+                        <a:t>Per-cell/coordinate prediction + risk band</a:t>
+                      </a:r>
+                    </a:p>
+                  </a:txBody>
+                  <a:tcPr marT="25400" marB="25400">
+                    <a:solidFill>
+                      <a:srgbClr val="F4F6FB"/>
+                    </a:solidFill>
+                  </a:tcPr>
+                </a:tc>
+              </a:tr>
+              <a:tr h="396240">
+                <a:tc>
+                  <a:txBody>
+                    <a:bodyPr/>
+                    <a:lstStyle/>
+                    <a:p>
+                      <a:pPr>
+                        <a:defRPr sz="1200" b="0">
+                          <a:solidFill>
+                            <a:srgbClr val="334155"/>
+                          </a:solidFill>
+                        </a:defRPr>
+                      </a:pPr>
+                      <a:r>
+                        <a:t>GET /alerts</a:t>
+                      </a:r>
+                    </a:p>
+                  </a:txBody>
+                  <a:tcPr marT="25400" marB="25400">
+                    <a:solidFill>
+                      <a:srgbClr val="FFFFFF"/>
+                    </a:solidFill>
+                  </a:tcPr>
+                </a:tc>
+                <a:tc>
+                  <a:txBody>
+                    <a:bodyPr/>
+                    <a:lstStyle/>
+                    <a:p>
+                      <a:pPr>
+                        <a:defRPr sz="1200" b="0">
+                          <a:solidFill>
+                            <a:srgbClr val="334155"/>
+                          </a:solidFill>
+                        </a:defRPr>
+                      </a:pPr>
+                      <a:r>
+                        <a:t>Ranked GREEN/YELLOW/ORANGE/RED alerts</a:t>
+                      </a:r>
+                    </a:p>
+                  </a:txBody>
+                  <a:tcPr marT="25400" marB="25400">
+                    <a:solidFill>
+                      <a:srgbClr val="FFFFFF"/>
+                    </a:solidFill>
+                  </a:tcPr>
+                </a:tc>
+              </a:tr>
+              <a:tr h="396240">
+                <a:tc>
+                  <a:txBody>
+                    <a:bodyPr/>
+                    <a:lstStyle/>
+                    <a:p>
+                      <a:pPr>
+                        <a:defRPr sz="1200" b="0">
+                          <a:solidFill>
+                            <a:srgbClr val="334155"/>
+                          </a:solidFill>
+                        </a:defRPr>
+                      </a:pPr>
+                      <a:r>
+                        <a:t>GET /metrics</a:t>
+                      </a:r>
+                    </a:p>
+                  </a:txBody>
+                  <a:tcPr marT="25400" marB="25400">
+                    <a:solidFill>
+                      <a:srgbClr val="F4F6FB"/>
+                    </a:solidFill>
+                  </a:tcPr>
+                </a:tc>
+                <a:tc>
+                  <a:txBody>
+                    <a:bodyPr/>
+                    <a:lstStyle/>
+                    <a:p>
+                      <a:pPr>
+                        <a:defRPr sz="1200" b="0">
+                          <a:solidFill>
+                            <a:srgbClr val="334155"/>
+                          </a:solidFill>
+                        </a:defRPr>
+                      </a:pPr>
+                      <a:r>
+                        <a:t>Model + spatial + risk-distribution stats</a:t>
+                      </a:r>
+                    </a:p>
+                  </a:txBody>
+                  <a:tcPr marT="25400" marB="25400">
+                    <a:solidFill>
+                      <a:srgbClr val="F4F6FB"/>
+                    </a:solidFill>
+                  </a:tcPr>
+                </a:tc>
+              </a:tr>
+              <a:tr h="396240">
+                <a:tc>
+                  <a:txBody>
+                    <a:bodyPr/>
+                    <a:lstStyle/>
+                    <a:p>
+                      <a:pPr>
+                        <a:defRPr sz="1200" b="0">
+                          <a:solidFill>
+                            <a:srgbClr val="334155"/>
+                          </a:solidFill>
+                        </a:defRPr>
+                      </a:pPr>
+                      <a:r>
+                        <a:t>GET /replay/{scenario}</a:t>
+                      </a:r>
+                    </a:p>
+                  </a:txBody>
+                  <a:tcPr marT="25400" marB="25400">
+                    <a:solidFill>
+                      <a:srgbClr val="FFFFFF"/>
+                    </a:solidFill>
+                  </a:tcPr>
+                </a:tc>
+                <a:tc>
+                  <a:txBody>
+                    <a:bodyPr/>
+                    <a:lstStyle/>
+                    <a:p>
+                      <a:pPr>
+                        <a:defRPr sz="1200" b="0">
+                          <a:solidFill>
+                            <a:srgbClr val="334155"/>
+                          </a:solidFill>
+                        </a:defRPr>
+                      </a:pPr>
+                      <a:r>
+                        <a:t>Real historical event replay for demos</a:t>
+                      </a:r>
+                    </a:p>
+                  </a:txBody>
+                  <a:tcPr marT="25400" marB="25400">
+                    <a:solidFill>
+                      <a:srgbClr val="FFFFFF"/>
+                    </a:solidFill>
+                  </a:tcPr>
+                </a:tc>
+              </a:tr>
+            </a:tbl>
+          </a:graphicData>
+        </a:graphic>
+      </p:graphicFrame>
+      <p:graphicFrame>
+        <p:nvGraphicFramePr>
+          <p:cNvPr id="7" name="Table 6"/>
+          <p:cNvGraphicFramePr>
+            <a:graphicFrameLocks noGrp="1"/>
+          </p:cNvGraphicFramePr>
+          <p:nvPr/>
+        </p:nvGraphicFramePr>
+        <p:xfrm>
+          <a:off x="457200" y="3749039"/>
+          <a:ext cx="5760720" cy="1737360"/>
+        </p:xfrm>
+        <a:graphic>
+          <a:graphicData uri="http://schemas.openxmlformats.org/drawingml/2006/table">
+            <a:tbl>
+              <a:tblPr firstRow="1" bandRow="1">
+                <a:tableStyleId>{5C22544A-7EE6-4342-B048-85BDC9FD1C3A}</a:tableStyleId>
+              </a:tblPr>
+              <a:tblGrid>
+                <a:gridCol w="3200400"/>
+                <a:gridCol w="2560320"/>
+              </a:tblGrid>
+              <a:tr h="434340">
+                <a:tc>
+                  <a:txBody>
+                    <a:bodyPr/>
+                    <a:lstStyle/>
+                    <a:p>
+                      <a:pPr>
+                        <a:defRPr sz="1100" b="1">
+                          <a:solidFill>
+                            <a:srgbClr val="FFFFFF"/>
+                          </a:solidFill>
+                        </a:defRPr>
+                      </a:pPr>
+                      <a:r>
+                        <a:t>Admin endpoint (token-guarded)</a:t>
+                      </a:r>
+                    </a:p>
+                  </a:txBody>
+                  <a:tcPr marT="25400" marB="25400">
+                    <a:solidFill>
+                      <a:srgbClr val="0F172A"/>
+                    </a:solidFill>
+                  </a:tcPr>
+                </a:tc>
+                <a:tc>
+                  <a:txBody>
+                    <a:bodyPr/>
+                    <a:lstStyle/>
+                    <a:p>
+                      <a:pPr>
+                        <a:defRPr sz="1100" b="1">
+                          <a:solidFill>
+                            <a:srgbClr val="FFFFFF"/>
+                          </a:solidFill>
+                        </a:defRPr>
+                      </a:pPr>
+                      <a:r>
+                        <a:t>Purpose</a:t>
+                      </a:r>
+                    </a:p>
+                  </a:txBody>
+                  <a:tcPr marT="25400" marB="25400">
+                    <a:solidFill>
+                      <a:srgbClr val="0F172A"/>
+                    </a:solidFill>
+                  </a:tcPr>
+                </a:tc>
+              </a:tr>
+              <a:tr h="434340">
+                <a:tc>
+                  <a:txBody>
+                    <a:bodyPr/>
+                    <a:lstStyle/>
+                    <a:p>
+                      <a:pPr>
+                        <a:defRPr sz="1100" b="0">
+                          <a:solidFill>
+                            <a:srgbClr val="334155"/>
+                          </a:solidFill>
+                        </a:defRPr>
+                      </a:pPr>
+                      <a:r>
+                        <a:t>POST /admin/staging/upload</a:t>
+                      </a:r>
+                    </a:p>
+                  </a:txBody>
+                  <a:tcPr marT="25400" marB="25400">
+                    <a:solidFill>
+                      <a:srgbClr val="FFFFFF"/>
+                    </a:solidFill>
+                  </a:tcPr>
+                </a:tc>
+                <a:tc>
+                  <a:txBody>
+                    <a:bodyPr/>
+                    <a:lstStyle/>
+                    <a:p>
+                      <a:pPr>
+                        <a:defRPr sz="1100" b="0">
+                          <a:solidFill>
+                            <a:srgbClr val="334155"/>
+                          </a:solidFill>
+                        </a:defRPr>
+                      </a:pPr>
+                      <a:r>
+                        <a:t>Stage a new CSV as PENDING</a:t>
+                      </a:r>
+                    </a:p>
+                  </a:txBody>
+                  <a:tcPr marT="25400" marB="25400">
+                    <a:solidFill>
+                      <a:srgbClr val="FFFFFF"/>
+                    </a:solidFill>
+                  </a:tcPr>
+                </a:tc>
+              </a:tr>
+              <a:tr h="434340">
+                <a:tc>
+                  <a:txBody>
+                    <a:bodyPr/>
+                    <a:lstStyle/>
+                    <a:p>
+                      <a:pPr>
+                        <a:defRPr sz="1100" b="0">
+                          <a:solidFill>
+                            <a:srgbClr val="334155"/>
+                          </a:solidFill>
+                        </a:defRPr>
+                      </a:pPr>
+                      <a:r>
+                        <a:t>POST /admin/staging/{id}/approve|reject</a:t>
+                      </a:r>
+                    </a:p>
+                  </a:txBody>
+                  <a:tcPr marT="25400" marB="25400">
+                    <a:solidFill>
+                      <a:srgbClr val="F4F6FB"/>
+                    </a:solidFill>
+                  </a:tcPr>
+                </a:tc>
+                <a:tc>
+                  <a:txBody>
+                    <a:bodyPr/>
+                    <a:lstStyle/>
+                    <a:p>
+                      <a:pPr>
+                        <a:defRPr sz="1100" b="0">
+                          <a:solidFill>
+                            <a:srgbClr val="334155"/>
+                          </a:solidFill>
+                        </a:defRPr>
+                      </a:pPr>
+                      <a:r>
+                        <a:t>Review decision</a:t>
+                      </a:r>
+                    </a:p>
+                  </a:txBody>
+                  <a:tcPr marT="25400" marB="25400">
+                    <a:solidFill>
+                      <a:srgbClr val="F4F6FB"/>
+                    </a:solidFill>
+                  </a:tcPr>
+                </a:tc>
+              </a:tr>
+              <a:tr h="434340">
+                <a:tc>
+                  <a:txBody>
+                    <a:bodyPr/>
+                    <a:lstStyle/>
+                    <a:p>
+                      <a:pPr>
+                        <a:defRPr sz="1100" b="0">
+                          <a:solidFill>
+                            <a:srgbClr val="334155"/>
+                          </a:solidFill>
+                        </a:defRPr>
+                      </a:pPr>
+                      <a:r>
+                        <a:t>POST /admin/retrain</a:t>
+                      </a:r>
+                    </a:p>
+                  </a:txBody>
+                  <a:tcPr marT="25400" marB="25400">
+                    <a:solidFill>
+                      <a:srgbClr val="FFFFFF"/>
+                    </a:solidFill>
+                  </a:tcPr>
+                </a:tc>
+                <a:tc>
+                  <a:txBody>
+                    <a:bodyPr/>
+                    <a:lstStyle/>
+                    <a:p>
+                      <a:pPr>
+                        <a:defRPr sz="1100" b="0">
+                          <a:solidFill>
+                            <a:srgbClr val="334155"/>
+                          </a:solidFill>
+                        </a:defRPr>
+                      </a:pPr>
+                      <a:r>
+                        <a:t>Trigger background retraining job</a:t>
+                      </a:r>
+                    </a:p>
+                  </a:txBody>
+                  <a:tcPr marT="25400" marB="25400">
+                    <a:solidFill>
+                      <a:srgbClr val="FFFFFF"/>
+                    </a:solidFill>
+                  </a:tcPr>
+                </a:tc>
+              </a:tr>
+            </a:tbl>
+          </a:graphicData>
+        </a:graphic>
+      </p:graphicFrame>
+      <p:sp>
+        <p:nvSpPr>
+          <p:cNvPr id="8" name="Rectangle 7"/>
           <p:cNvSpPr/>
           <p:nvPr/>
         </p:nvSpPr>
         <p:spPr>
           <a:xfrm>
-            <a:off x="6309360" y="1188720"/>
-            <a:ext cx="5349240" cy="5120640"/>
+            <a:off x="6492240" y="1143000"/>
+            <a:ext cx="5166360" cy="5212080"/>
           </a:xfrm>
           <a:prstGeom prst="rect">
             <a:avLst/>
@@ -3761,14 +4931,14 @@
       </p:sp>
       <p:sp>
         <p:nvSpPr>
-          <p:cNvPr id="11" name="TextBox 10"/>
+          <p:cNvPr id="9" name="TextBox 8"/>
           <p:cNvSpPr txBox="1"/>
           <p:nvPr/>
         </p:nvSpPr>
         <p:spPr>
           <a:xfrm>
-            <a:off x="6492240" y="1325880"/>
-            <a:ext cx="5029200" cy="365760"/>
+            <a:off x="6675120" y="1280160"/>
+            <a:ext cx="4846320" cy="365760"/>
           </a:xfrm>
           <a:prstGeom prst="rect">
             <a:avLst/>
@@ -3783,11 +4953,10 @@
           <a:p>
             <a:pPr algn="l"/>
             <a:r>
-              <a:rPr sz="1600" b="1">
+              <a:rPr sz="1500" b="1">
                 <a:solidFill>
                   <a:srgbClr val="0F172A"/>
                 </a:solidFill>
-                <a:latin typeface="Calibri"/>
               </a:rPr>
               <a:t>Deployment chain</a:t>
             </a:r>
@@ -3796,14 +4965,14 @@
       </p:sp>
       <p:sp>
         <p:nvSpPr>
-          <p:cNvPr id="12" name="TextBox 11"/>
+          <p:cNvPr id="10" name="TextBox 9"/>
           <p:cNvSpPr txBox="1"/>
           <p:nvPr/>
         </p:nvSpPr>
         <p:spPr>
           <a:xfrm>
-            <a:off x="6492240" y="1783080"/>
-            <a:ext cx="5029200" cy="4389120"/>
+            <a:off x="6675120" y="1737360"/>
+            <a:ext cx="4846320" cy="4389120"/>
           </a:xfrm>
           <a:prstGeom prst="rect">
             <a:avLst/>
@@ -3821,16 +4990,20 @@
                 <a:spcPct val="115000"/>
               </a:lnSpc>
               <a:spcAft>
-                <a:spcPts val="600"/>
+                <a:spcPts val="500"/>
               </a:spcAft>
-              <a:defRPr sz="1350">
+              <a:defRPr sz="1300">
                 <a:solidFill>
                   <a:srgbClr val="334155"/>
                 </a:solidFill>
               </a:defRPr>
             </a:pPr>
             <a:r>
-              <a:t>• Backend: FastAPI + CatBoost/LightGBM/XGBoost → Docker image → Docker Hub (kshitizs98/parking-intelligence-api) → Hugging Face Space (Docker SDK)</a:t>
+              <a:t>• Backend: Docker image → Docker Hub →</a:t>
+            </a:r>
+            <a:br/>
+            <a:r>
+              <a:t>Hugging Face Space (Docker SDK)</a:t>
             </a:r>
           </a:p>
           <a:p>
@@ -3839,16 +5012,20 @@
                 <a:spcPct val="115000"/>
               </a:lnSpc>
               <a:spcAft>
-                <a:spcPts val="600"/>
+                <a:spcPts val="500"/>
               </a:spcAft>
-              <a:defRPr sz="1350">
+              <a:defRPr sz="1300">
                 <a:solidFill>
                   <a:srgbClr val="334155"/>
                 </a:solidFill>
               </a:defRPr>
             </a:pPr>
             <a:r>
-              <a:t>• Frontend: Next.js 14 (App Router) + Tailwind + Leaflet + Recharts → Vercel, auto-deploys on push to main</a:t>
+              <a:t>• Frontend: Next.js 14 + Tailwind + Leaflet</a:t>
+            </a:r>
+            <a:br/>
+            <a:r>
+              <a:t>+ Recharts → Vercel (auto-deploy on push)</a:t>
             </a:r>
           </a:p>
           <a:p>
@@ -3857,16 +5034,16 @@
                 <a:spcPct val="115000"/>
               </a:lnSpc>
               <a:spcAft>
-                <a:spcPts val="600"/>
+                <a:spcPts val="500"/>
               </a:spcAft>
-              <a:defRPr sz="1350">
+              <a:defRPr sz="1300">
                 <a:solidFill>
                   <a:srgbClr val="334155"/>
                 </a:solidFill>
               </a:defRPr>
             </a:pPr>
             <a:r>
-              <a:t>• CORS tightened to real origins (was previously open *)</a:t>
+              <a:t>• CORS tightened to real origins (was *)</a:t>
             </a:r>
           </a:p>
           <a:p>
@@ -3875,16 +5052,20 @@
                 <a:spcPct val="115000"/>
               </a:lnSpc>
               <a:spcAft>
-                <a:spcPts val="600"/>
+                <a:spcPts val="500"/>
               </a:spcAft>
-              <a:defRPr sz="1350">
+              <a:defRPr sz="1300">
                 <a:solidFill>
                   <a:srgbClr val="334155"/>
                 </a:solidFill>
               </a:defRPr>
             </a:pPr>
             <a:r>
-              <a:t>• NEXT_PUBLIC_API_BASE_URL env var on Vercel points the frontend at the live HF Space API</a:t>
+              <a:t>• NEXT_PUBLIC_API_BASE_URL env var points</a:t>
+            </a:r>
+            <a:br/>
+            <a:r>
+              <a:t>the frontend at the live HF Space</a:t>
             </a:r>
           </a:p>
           <a:p>
@@ -3893,16 +5074,20 @@
                 <a:spcPct val="115000"/>
               </a:lnSpc>
               <a:spcAft>
-                <a:spcPts val="600"/>
+                <a:spcPts val="500"/>
               </a:spcAft>
-              <a:defRPr sz="1350">
+              <a:defRPr sz="1300">
                 <a:solidFill>
                   <a:srgbClr val="334155"/>
                 </a:solidFill>
               </a:defRPr>
             </a:pPr>
             <a:r>
-              <a:t>• BackgroundTasks (no Celery/APScheduler) used for async retrain jobs — kept deliberately simple for the project's scale</a:t>
+              <a:t>• Async retrain via FastAPI BackgroundTasks</a:t>
+            </a:r>
+            <a:br/>
+            <a:r>
+              <a:t>(no Celery/APScheduler — kept simple)</a:t>
             </a:r>
           </a:p>
         </p:txBody>
@@ -3996,7 +5181,6 @@
                 <a:solidFill>
                   <a:srgbClr val="FFFFFF"/>
                 </a:solidFill>
-                <a:latin typeface="Calibri"/>
               </a:rPr>
               <a:t>Known Limitations — Disclosed, Not Hidden</a:t>
             </a:r>
@@ -4031,7 +5215,6 @@
                 <a:solidFill>
                   <a:srgbClr val="C7D2FE"/>
                 </a:solidFill>
-                <a:latin typeface="Calibri"/>
               </a:rPr>
               <a:t>Honesty over a fabricated PASS</a:t>
             </a:r>
@@ -4081,155 +5264,416 @@
           </a:p>
         </p:txBody>
       </p:sp>
-      <p:sp>
-        <p:nvSpPr>
-          <p:cNvPr id="6" name="TextBox 5"/>
-          <p:cNvSpPr txBox="1"/>
-          <p:nvPr/>
-        </p:nvSpPr>
-        <p:spPr>
-          <a:xfrm>
-            <a:off x="548640" y="1188720"/>
-            <a:ext cx="11064240" cy="5120640"/>
-          </a:xfrm>
-          <a:prstGeom prst="rect">
-            <a:avLst/>
-          </a:prstGeom>
-          <a:noFill/>
-        </p:spPr>
-        <p:txBody>
-          <a:bodyPr wrap="square">
-            <a:spAutoFit/>
-          </a:bodyPr>
-          <a:lstStyle/>
-          <a:p>
-            <a:pPr>
-              <a:lnSpc>
-                <a:spcPct val="115000"/>
-              </a:lnSpc>
-              <a:spcAft>
-                <a:spcPts val="600"/>
-              </a:spcAft>
-              <a:defRPr sz="1550">
-                <a:solidFill>
-                  <a:srgbClr val="334155"/>
-                </a:solidFill>
-              </a:defRPr>
-            </a:pPr>
-            <a:r>
-              <a:t>• Spatial holdout still FAIL by the project's own 5% bar — 5.66% PR-AUC drop on brand-new H3 cells, improved from 7.88% across two rounds of fixes, but not eliminated; this is reported as a real, measured limitation, not rounded up to a PASS</a:t>
-            </a:r>
-          </a:p>
-          <a:p>
-            <a:pPr>
-              <a:lnSpc>
-                <a:spcPct val="115000"/>
-              </a:lnSpc>
-              <a:spcAft>
-                <a:spcPts val="600"/>
-              </a:spcAft>
-              <a:defRPr sz="1550">
-                <a:solidFill>
-                  <a:srgbClr val="334155"/>
-                </a:solidFill>
-              </a:defRPr>
-            </a:pPr>
-            <a:r>
-              <a:t>• Risk score weights are a data-driven PROXY fit (against target_count_60m, the closest available outcome signal), not a measured causal weight — there is no ground-truth congestion/enforcement-outcome data anywhere in the provided dataset</a:t>
-            </a:r>
-          </a:p>
-          <a:p>
-            <a:pPr>
-              <a:lnSpc>
-                <a:spcPct val="115000"/>
-              </a:lnSpc>
-              <a:spcAft>
-                <a:spcPts val="600"/>
-              </a:spcAft>
-              <a:defRPr sz="1550">
-                <a:solidFill>
-                  <a:srgbClr val="334155"/>
-                </a:solidFill>
-              </a:defRPr>
-            </a:pPr>
-            <a:r>
-              <a:t>• closed_datetime and action_taken_timestamp are 100% missing in this extract — enforcement resolution time and delay cannot be computed</a:t>
-            </a:r>
-          </a:p>
-          <a:p>
-            <a:pPr>
-              <a:lnSpc>
-                <a:spcPct val="115000"/>
-              </a:lnSpc>
-              <a:spcAft>
-                <a:spcPts val="600"/>
-              </a:spcAft>
-              <a:defRPr sz="1550">
-                <a:solidFill>
-                  <a:srgbClr val="334155"/>
-                </a:solidFill>
-              </a:defRPr>
-            </a:pPr>
-            <a:r>
-              <a:t>• Single 5-month data window (Nov 2023 – Apr 2024) — seasonal patterns outside this window are untested</a:t>
-            </a:r>
-          </a:p>
-          <a:p>
-            <a:pPr>
-              <a:lnSpc>
-                <a:spcPct val="115000"/>
-              </a:lnSpc>
-              <a:spcAft>
-                <a:spcPts val="600"/>
-              </a:spcAft>
-              <a:defRPr sz="1550">
-                <a:solidFill>
-                  <a:srgbClr val="334155"/>
-                </a:solidFill>
-              </a:defRPr>
-            </a:pPr>
-            <a:r>
-              <a:t>• No live streaming — dashboard serves the latest historical snapshot per cell, not a real-time feed; a Kafka layer is the natural next step</a:t>
-            </a:r>
-          </a:p>
-          <a:p>
-            <a:pPr>
-              <a:lnSpc>
-                <a:spcPct val="115000"/>
-              </a:lnSpc>
-              <a:spcAft>
-                <a:spcPts val="600"/>
-              </a:spcAft>
-              <a:defRPr sz="1550">
-                <a:solidFill>
-                  <a:srgbClr val="334155"/>
-                </a:solidFill>
-              </a:defRPr>
-            </a:pPr>
-            <a:r>
-              <a:t>• Retraining doesn't survive ephemeral redeploys on free-tier hosts without a persistent volume — works correctly within a running process's lifetime</a:t>
-            </a:r>
-          </a:p>
-          <a:p>
-            <a:pPr>
-              <a:lnSpc>
-                <a:spcPct val="115000"/>
-              </a:lnSpc>
-              <a:spcAft>
-                <a:spcPts val="600"/>
-              </a:spcAft>
-              <a:defRPr sz="1550">
-                <a:solidFill>
-                  <a:srgbClr val="334155"/>
-                </a:solidFill>
-              </a:defRPr>
-            </a:pPr>
-            <a:r>
-              <a:t>• Cold-start geography: brand-new H3 cells outside the 2,534 observed return a conservative default with an explicit flag, never a fabricated prediction</a:t>
-            </a:r>
-          </a:p>
-        </p:txBody>
-      </p:sp>
+      <p:graphicFrame>
+        <p:nvGraphicFramePr>
+          <p:cNvPr id="6" name="Table 5"/>
+          <p:cNvGraphicFramePr>
+            <a:graphicFrameLocks noGrp="1"/>
+          </p:cNvGraphicFramePr>
+          <p:nvPr/>
+        </p:nvGraphicFramePr>
+        <p:xfrm>
+          <a:off x="457200" y="1188720"/>
+          <a:ext cx="11155680" cy="5120640"/>
+        </p:xfrm>
+        <a:graphic>
+          <a:graphicData uri="http://schemas.openxmlformats.org/drawingml/2006/table">
+            <a:tbl>
+              <a:tblPr firstRow="1" bandRow="1">
+                <a:tableStyleId>{5C22544A-7EE6-4342-B048-85BDC9FD1C3A}</a:tableStyleId>
+              </a:tblPr>
+              <a:tblGrid>
+                <a:gridCol w="2377440"/>
+                <a:gridCol w="8778240"/>
+              </a:tblGrid>
+              <a:tr h="640080">
+                <a:tc>
+                  <a:txBody>
+                    <a:bodyPr/>
+                    <a:lstStyle/>
+                    <a:p>
+                      <a:pPr>
+                        <a:defRPr sz="1350" b="1">
+                          <a:solidFill>
+                            <a:srgbClr val="FFFFFF"/>
+                          </a:solidFill>
+                        </a:defRPr>
+                      </a:pPr>
+                      <a:r>
+                        <a:t>Limitation</a:t>
+                      </a:r>
+                    </a:p>
+                  </a:txBody>
+                  <a:tcPr marT="25400" marB="25400">
+                    <a:solidFill>
+                      <a:srgbClr val="0F172A"/>
+                    </a:solidFill>
+                  </a:tcPr>
+                </a:tc>
+                <a:tc>
+                  <a:txBody>
+                    <a:bodyPr/>
+                    <a:lstStyle/>
+                    <a:p>
+                      <a:pPr>
+                        <a:defRPr sz="1350" b="1">
+                          <a:solidFill>
+                            <a:srgbClr val="FFFFFF"/>
+                          </a:solidFill>
+                        </a:defRPr>
+                      </a:pPr>
+                      <a:r>
+                        <a:t>Status</a:t>
+                      </a:r>
+                    </a:p>
+                  </a:txBody>
+                  <a:tcPr marT="25400" marB="25400">
+                    <a:solidFill>
+                      <a:srgbClr val="0F172A"/>
+                    </a:solidFill>
+                  </a:tcPr>
+                </a:tc>
+              </a:tr>
+              <a:tr h="640080">
+                <a:tc>
+                  <a:txBody>
+                    <a:bodyPr/>
+                    <a:lstStyle/>
+                    <a:p>
+                      <a:pPr>
+                        <a:defRPr sz="1350" b="0">
+                          <a:solidFill>
+                            <a:srgbClr val="334155"/>
+                          </a:solidFill>
+                        </a:defRPr>
+                      </a:pPr>
+                      <a:r>
+                        <a:t>Spatial holdout</a:t>
+                      </a:r>
+                    </a:p>
+                  </a:txBody>
+                  <a:tcPr marT="25400" marB="25400">
+                    <a:solidFill>
+                      <a:srgbClr val="FFFFFF"/>
+                    </a:solidFill>
+                  </a:tcPr>
+                </a:tc>
+                <a:tc>
+                  <a:txBody>
+                    <a:bodyPr/>
+                    <a:lstStyle/>
+                    <a:p>
+                      <a:pPr>
+                        <a:defRPr sz="1350" b="0">
+                          <a:solidFill>
+                            <a:srgbClr val="334155"/>
+                          </a:solidFill>
+                        </a:defRPr>
+                      </a:pPr>
+                      <a:r>
+                        <a:t>FAIL by the 5% bar — 5.66% drop, improved from 7.88%, not eliminated</a:t>
+                      </a:r>
+                    </a:p>
+                  </a:txBody>
+                  <a:tcPr marT="25400" marB="25400">
+                    <a:solidFill>
+                      <a:srgbClr val="FFFFFF"/>
+                    </a:solidFill>
+                  </a:tcPr>
+                </a:tc>
+              </a:tr>
+              <a:tr h="640080">
+                <a:tc>
+                  <a:txBody>
+                    <a:bodyPr/>
+                    <a:lstStyle/>
+                    <a:p>
+                      <a:pPr>
+                        <a:defRPr sz="1350" b="0">
+                          <a:solidFill>
+                            <a:srgbClr val="334155"/>
+                          </a:solidFill>
+                        </a:defRPr>
+                      </a:pPr>
+                      <a:r>
+                        <a:t>Risk weights</a:t>
+                      </a:r>
+                    </a:p>
+                  </a:txBody>
+                  <a:tcPr marT="25400" marB="25400">
+                    <a:solidFill>
+                      <a:srgbClr val="F4F6FB"/>
+                    </a:solidFill>
+                  </a:tcPr>
+                </a:tc>
+                <a:tc>
+                  <a:txBody>
+                    <a:bodyPr/>
+                    <a:lstStyle/>
+                    <a:p>
+                      <a:pPr>
+                        <a:defRPr sz="1350" b="0">
+                          <a:solidFill>
+                            <a:srgbClr val="334155"/>
+                          </a:solidFill>
+                        </a:defRPr>
+                      </a:pPr>
+                      <a:r>
+                        <a:t>Data-driven PROXY fit (target_count_60m) — no ground-truth congestion data exists</a:t>
+                      </a:r>
+                    </a:p>
+                  </a:txBody>
+                  <a:tcPr marT="25400" marB="25400">
+                    <a:solidFill>
+                      <a:srgbClr val="F4F6FB"/>
+                    </a:solidFill>
+                  </a:tcPr>
+                </a:tc>
+              </a:tr>
+              <a:tr h="640080">
+                <a:tc>
+                  <a:txBody>
+                    <a:bodyPr/>
+                    <a:lstStyle/>
+                    <a:p>
+                      <a:pPr>
+                        <a:defRPr sz="1350" b="0">
+                          <a:solidFill>
+                            <a:srgbClr val="334155"/>
+                          </a:solidFill>
+                        </a:defRPr>
+                      </a:pPr>
+                      <a:r>
+                        <a:t>Enforcement timestamps</a:t>
+                      </a:r>
+                    </a:p>
+                  </a:txBody>
+                  <a:tcPr marT="25400" marB="25400">
+                    <a:solidFill>
+                      <a:srgbClr val="FFFFFF"/>
+                    </a:solidFill>
+                  </a:tcPr>
+                </a:tc>
+                <a:tc>
+                  <a:txBody>
+                    <a:bodyPr/>
+                    <a:lstStyle/>
+                    <a:p>
+                      <a:pPr>
+                        <a:defRPr sz="1350" b="0">
+                          <a:solidFill>
+                            <a:srgbClr val="334155"/>
+                          </a:solidFill>
+                        </a:defRPr>
+                      </a:pPr>
+                      <a:r>
+                        <a:t>closed_datetime / action_taken_timestamp 100% missing in this extract</a:t>
+                      </a:r>
+                    </a:p>
+                  </a:txBody>
+                  <a:tcPr marT="25400" marB="25400">
+                    <a:solidFill>
+                      <a:srgbClr val="FFFFFF"/>
+                    </a:solidFill>
+                  </a:tcPr>
+                </a:tc>
+              </a:tr>
+              <a:tr h="640080">
+                <a:tc>
+                  <a:txBody>
+                    <a:bodyPr/>
+                    <a:lstStyle/>
+                    <a:p>
+                      <a:pPr>
+                        <a:defRPr sz="1350" b="0">
+                          <a:solidFill>
+                            <a:srgbClr val="334155"/>
+                          </a:solidFill>
+                        </a:defRPr>
+                      </a:pPr>
+                      <a:r>
+                        <a:t>Data window</a:t>
+                      </a:r>
+                    </a:p>
+                  </a:txBody>
+                  <a:tcPr marT="25400" marB="25400">
+                    <a:solidFill>
+                      <a:srgbClr val="F4F6FB"/>
+                    </a:solidFill>
+                  </a:tcPr>
+                </a:tc>
+                <a:tc>
+                  <a:txBody>
+                    <a:bodyPr/>
+                    <a:lstStyle/>
+                    <a:p>
+                      <a:pPr>
+                        <a:defRPr sz="1350" b="0">
+                          <a:solidFill>
+                            <a:srgbClr val="334155"/>
+                          </a:solidFill>
+                        </a:defRPr>
+                      </a:pPr>
+                      <a:r>
+                        <a:t>Single 5-month window (Nov 2023 – Apr 2024) — seasonality untested</a:t>
+                      </a:r>
+                    </a:p>
+                  </a:txBody>
+                  <a:tcPr marT="25400" marB="25400">
+                    <a:solidFill>
+                      <a:srgbClr val="F4F6FB"/>
+                    </a:solidFill>
+                  </a:tcPr>
+                </a:tc>
+              </a:tr>
+              <a:tr h="640080">
+                <a:tc>
+                  <a:txBody>
+                    <a:bodyPr/>
+                    <a:lstStyle/>
+                    <a:p>
+                      <a:pPr>
+                        <a:defRPr sz="1350" b="0">
+                          <a:solidFill>
+                            <a:srgbClr val="334155"/>
+                          </a:solidFill>
+                        </a:defRPr>
+                      </a:pPr>
+                      <a:r>
+                        <a:t>Live streaming</a:t>
+                      </a:r>
+                    </a:p>
+                  </a:txBody>
+                  <a:tcPr marT="25400" marB="25400">
+                    <a:solidFill>
+                      <a:srgbClr val="FFFFFF"/>
+                    </a:solidFill>
+                  </a:tcPr>
+                </a:tc>
+                <a:tc>
+                  <a:txBody>
+                    <a:bodyPr/>
+                    <a:lstStyle/>
+                    <a:p>
+                      <a:pPr>
+                        <a:defRPr sz="1350" b="0">
+                          <a:solidFill>
+                            <a:srgbClr val="334155"/>
+                          </a:solidFill>
+                        </a:defRPr>
+                      </a:pPr>
+                      <a:r>
+                        <a:t>None — latest historical snapshot per cell, not real-time; Kafka is the next step</a:t>
+                      </a:r>
+                    </a:p>
+                  </a:txBody>
+                  <a:tcPr marT="25400" marB="25400">
+                    <a:solidFill>
+                      <a:srgbClr val="FFFFFF"/>
+                    </a:solidFill>
+                  </a:tcPr>
+                </a:tc>
+              </a:tr>
+              <a:tr h="640080">
+                <a:tc>
+                  <a:txBody>
+                    <a:bodyPr/>
+                    <a:lstStyle/>
+                    <a:p>
+                      <a:pPr>
+                        <a:defRPr sz="1350" b="0">
+                          <a:solidFill>
+                            <a:srgbClr val="334155"/>
+                          </a:solidFill>
+                        </a:defRPr>
+                      </a:pPr>
+                      <a:r>
+                        <a:t>Retraining persistence</a:t>
+                      </a:r>
+                    </a:p>
+                  </a:txBody>
+                  <a:tcPr marT="25400" marB="25400">
+                    <a:solidFill>
+                      <a:srgbClr val="F4F6FB"/>
+                    </a:solidFill>
+                  </a:tcPr>
+                </a:tc>
+                <a:tc>
+                  <a:txBody>
+                    <a:bodyPr/>
+                    <a:lstStyle/>
+                    <a:p>
+                      <a:pPr>
+                        <a:defRPr sz="1350" b="0">
+                          <a:solidFill>
+                            <a:srgbClr val="334155"/>
+                          </a:solidFill>
+                        </a:defRPr>
+                      </a:pPr>
+                      <a:r>
+                        <a:t>Doesn't survive ephemeral redeploys without a persistent volume</a:t>
+                      </a:r>
+                    </a:p>
+                  </a:txBody>
+                  <a:tcPr marT="25400" marB="25400">
+                    <a:solidFill>
+                      <a:srgbClr val="F4F6FB"/>
+                    </a:solidFill>
+                  </a:tcPr>
+                </a:tc>
+              </a:tr>
+              <a:tr h="640080">
+                <a:tc>
+                  <a:txBody>
+                    <a:bodyPr/>
+                    <a:lstStyle/>
+                    <a:p>
+                      <a:pPr>
+                        <a:defRPr sz="1350" b="0">
+                          <a:solidFill>
+                            <a:srgbClr val="334155"/>
+                          </a:solidFill>
+                        </a:defRPr>
+                      </a:pPr>
+                      <a:r>
+                        <a:t>Cold-start geography</a:t>
+                      </a:r>
+                    </a:p>
+                  </a:txBody>
+                  <a:tcPr marT="25400" marB="25400">
+                    <a:solidFill>
+                      <a:srgbClr val="FFFFFF"/>
+                    </a:solidFill>
+                  </a:tcPr>
+                </a:tc>
+                <a:tc>
+                  <a:txBody>
+                    <a:bodyPr/>
+                    <a:lstStyle/>
+                    <a:p>
+                      <a:pPr>
+                        <a:defRPr sz="1350" b="0">
+                          <a:solidFill>
+                            <a:srgbClr val="334155"/>
+                          </a:solidFill>
+                        </a:defRPr>
+                      </a:pPr>
+                      <a:r>
+                        <a:t>New H3 cells return a conservative default with an explicit flag, never a fabrication</a:t>
+                      </a:r>
+                    </a:p>
+                  </a:txBody>
+                  <a:tcPr marT="25400" marB="25400">
+                    <a:solidFill>
+                      <a:srgbClr val="FFFFFF"/>
+                    </a:solidFill>
+                  </a:tcPr>
+                </a:tc>
+              </a:tr>
+            </a:tbl>
+          </a:graphicData>
+        </a:graphic>
+      </p:graphicFrame>
     </p:spTree>
   </p:cSld>
   <p:clrMapOvr>
@@ -4319,7 +5763,6 @@
                 <a:solidFill>
                   <a:srgbClr val="FFFFFF"/>
                 </a:solidFill>
-                <a:latin typeface="Calibri"/>
               </a:rPr>
               <a:t>Results Summary</a:t>
             </a:r>
@@ -4354,7 +5797,6 @@
                 <a:solidFill>
                   <a:srgbClr val="C7D2FE"/>
                 </a:solidFill>
-                <a:latin typeface="Calibri"/>
               </a:rPr>
               <a:t>What this system actually delivers</a:t>
             </a:r>
@@ -4412,8 +5854,8 @@
         </p:nvSpPr>
         <p:spPr>
           <a:xfrm>
-            <a:off x="457200" y="1280160"/>
-            <a:ext cx="2697480" cy="1188720"/>
+            <a:off x="457200" y="1234440"/>
+            <a:ext cx="2606040" cy="1143000"/>
           </a:xfrm>
           <a:prstGeom prst="rect">
             <a:avLst/>
@@ -4455,8 +5897,8 @@
         </p:nvSpPr>
         <p:spPr>
           <a:xfrm>
-            <a:off x="457200" y="1371600"/>
-            <a:ext cx="2697480" cy="1005840"/>
+            <a:off x="457200" y="1325880"/>
+            <a:ext cx="2606040" cy="960120"/>
           </a:xfrm>
           <a:prstGeom prst="rect">
             <a:avLst/>
@@ -4471,7 +5913,7 @@
           <a:p>
             <a:pPr algn="ctr"/>
             <a:r>
-              <a:rPr sz="2600" b="1">
+              <a:rPr sz="2400" b="1">
                 <a:solidFill>
                   <a:srgbClr val="4F46E5"/>
                 </a:solidFill>
@@ -4482,12 +5924,12 @@
           <a:p>
             <a:pPr algn="ctr"/>
             <a:r>
-              <a:rPr sz="1100">
+              <a:rPr sz="1050">
                 <a:solidFill>
                   <a:srgbClr val="334155"/>
                 </a:solidFill>
               </a:rPr>
-              <a:t>Violation records processed</a:t>
+              <a:t>Violations processed</a:t>
             </a:r>
           </a:p>
         </p:txBody>
@@ -4500,8 +5942,8 @@
         </p:nvSpPr>
         <p:spPr>
           <a:xfrm>
-            <a:off x="3246120" y="1280160"/>
-            <a:ext cx="2697480" cy="1188720"/>
+            <a:off x="3200400" y="1234440"/>
+            <a:ext cx="2606040" cy="1143000"/>
           </a:xfrm>
           <a:prstGeom prst="rect">
             <a:avLst/>
@@ -4543,8 +5985,8 @@
         </p:nvSpPr>
         <p:spPr>
           <a:xfrm>
-            <a:off x="3246120" y="1371600"/>
-            <a:ext cx="2697480" cy="1005840"/>
+            <a:off x="3200400" y="1325880"/>
+            <a:ext cx="2606040" cy="960120"/>
           </a:xfrm>
           <a:prstGeom prst="rect">
             <a:avLst/>
@@ -4559,7 +6001,7 @@
           <a:p>
             <a:pPr algn="ctr"/>
             <a:r>
-              <a:rPr sz="2600" b="1">
+              <a:rPr sz="2400" b="1">
                 <a:solidFill>
                   <a:srgbClr val="4F46E5"/>
                 </a:solidFill>
@@ -4570,12 +6012,12 @@
           <a:p>
             <a:pPr algn="ctr"/>
             <a:r>
-              <a:rPr sz="1100">
+              <a:rPr sz="1050">
                 <a:solidFill>
                   <a:srgbClr val="334155"/>
                 </a:solidFill>
               </a:rPr>
-              <a:t>H3 cells with live predictions</a:t>
+              <a:t>H3 cells, live predictions</a:t>
             </a:r>
           </a:p>
         </p:txBody>
@@ -4588,8 +6030,8 @@
         </p:nvSpPr>
         <p:spPr>
           <a:xfrm>
-            <a:off x="6035040" y="1280160"/>
-            <a:ext cx="2697480" cy="1188720"/>
+            <a:off x="5943600" y="1234440"/>
+            <a:ext cx="2606040" cy="1143000"/>
           </a:xfrm>
           <a:prstGeom prst="rect">
             <a:avLst/>
@@ -4631,8 +6073,8 @@
         </p:nvSpPr>
         <p:spPr>
           <a:xfrm>
-            <a:off x="6035040" y="1371600"/>
-            <a:ext cx="2697480" cy="1005840"/>
+            <a:off x="5943600" y="1325880"/>
+            <a:ext cx="2606040" cy="960120"/>
           </a:xfrm>
           <a:prstGeom prst="rect">
             <a:avLst/>
@@ -4647,7 +6089,7 @@
           <a:p>
             <a:pPr algn="ctr"/>
             <a:r>
-              <a:rPr sz="2600" b="1">
+              <a:rPr sz="2400" b="1">
                 <a:solidFill>
                   <a:srgbClr val="4F46E5"/>
                 </a:solidFill>
@@ -4658,12 +6100,12 @@
           <a:p>
             <a:pPr algn="ctr"/>
             <a:r>
-              <a:rPr sz="1100">
+              <a:rPr sz="1050">
                 <a:solidFill>
                   <a:srgbClr val="334155"/>
                 </a:solidFill>
               </a:rPr>
-              <a:t>Best val PR-AUC (CatBoost)</a:t>
+              <a:t>Best val PR-AUC</a:t>
             </a:r>
           </a:p>
         </p:txBody>
@@ -4676,8 +6118,8 @@
         </p:nvSpPr>
         <p:spPr>
           <a:xfrm>
-            <a:off x="8823960" y="1280160"/>
-            <a:ext cx="2880360" cy="1188720"/>
+            <a:off x="8686800" y="1234440"/>
+            <a:ext cx="3017520" cy="1143000"/>
           </a:xfrm>
           <a:prstGeom prst="rect">
             <a:avLst/>
@@ -4719,8 +6161,8 @@
         </p:nvSpPr>
         <p:spPr>
           <a:xfrm>
-            <a:off x="8823960" y="1371600"/>
-            <a:ext cx="2880360" cy="1005840"/>
+            <a:off x="8686800" y="1325880"/>
+            <a:ext cx="3017520" cy="960120"/>
           </a:xfrm>
           <a:prstGeom prst="rect">
             <a:avLst/>
@@ -4735,7 +6177,7 @@
           <a:p>
             <a:pPr algn="ctr"/>
             <a:r>
-              <a:rPr sz="2600" b="1">
+              <a:rPr sz="2400" b="1">
                 <a:solidFill>
                   <a:srgbClr val="15803D"/>
                 </a:solidFill>
@@ -4746,7 +6188,7 @@
           <a:p>
             <a:pPr algn="ctr"/>
             <a:r>
-              <a:rPr sz="1100">
+              <a:rPr sz="1050">
                 <a:solidFill>
                   <a:srgbClr val="334155"/>
                 </a:solidFill>
@@ -4764,8 +6206,8 @@
         </p:nvSpPr>
         <p:spPr>
           <a:xfrm>
-            <a:off x="457200" y="2651760"/>
-            <a:ext cx="2697480" cy="1188720"/>
+            <a:off x="457200" y="2514600"/>
+            <a:ext cx="2606040" cy="1143000"/>
           </a:xfrm>
           <a:prstGeom prst="rect">
             <a:avLst/>
@@ -4807,8 +6249,8 @@
         </p:nvSpPr>
         <p:spPr>
           <a:xfrm>
-            <a:off x="457200" y="2743200"/>
-            <a:ext cx="2697480" cy="1005840"/>
+            <a:off x="457200" y="2606040"/>
+            <a:ext cx="2606040" cy="960120"/>
           </a:xfrm>
           <a:prstGeom prst="rect">
             <a:avLst/>
@@ -4823,7 +6265,7 @@
           <a:p>
             <a:pPr algn="ctr"/>
             <a:r>
-              <a:rPr sz="2600" b="1">
+              <a:rPr sz="2400" b="1">
                 <a:solidFill>
                   <a:srgbClr val="15803D"/>
                 </a:solidFill>
@@ -4834,7 +6276,7 @@
           <a:p>
             <a:pPr algn="ctr"/>
             <a:r>
-              <a:rPr sz="1100">
+              <a:rPr sz="1050">
                 <a:solidFill>
                   <a:srgbClr val="334155"/>
                 </a:solidFill>
@@ -4852,8 +6294,8 @@
         </p:nvSpPr>
         <p:spPr>
           <a:xfrm>
-            <a:off x="3246120" y="2651760"/>
-            <a:ext cx="2697480" cy="1188720"/>
+            <a:off x="3200400" y="2514600"/>
+            <a:ext cx="2606040" cy="1143000"/>
           </a:xfrm>
           <a:prstGeom prst="rect">
             <a:avLst/>
@@ -4895,8 +6337,8 @@
         </p:nvSpPr>
         <p:spPr>
           <a:xfrm>
-            <a:off x="3246120" y="2743200"/>
-            <a:ext cx="2697480" cy="1005840"/>
+            <a:off x="3200400" y="2606040"/>
+            <a:ext cx="2606040" cy="960120"/>
           </a:xfrm>
           <a:prstGeom prst="rect">
             <a:avLst/>
@@ -4911,7 +6353,7 @@
           <a:p>
             <a:pPr algn="ctr"/>
             <a:r>
-              <a:rPr sz="2600" b="1">
+              <a:rPr sz="2400" b="1">
                 <a:solidFill>
                   <a:srgbClr val="15803D"/>
                 </a:solidFill>
@@ -4922,13 +6364,12 @@
           <a:p>
             <a:pPr algn="ctr"/>
             <a:r>
-              <a:rPr sz="1100">
+              <a:rPr sz="1050">
                 <a:solidFill>
                   <a:srgbClr val="334155"/>
                 </a:solidFill>
               </a:rPr>
-              <a:t>Spatial abstraction (no
-coordinate memorization)</a:t>
+              <a:t>Spatial abstraction</a:t>
             </a:r>
           </a:p>
         </p:txBody>
@@ -4941,8 +6382,8 @@
         </p:nvSpPr>
         <p:spPr>
           <a:xfrm>
-            <a:off x="6035040" y="2651760"/>
-            <a:ext cx="2697480" cy="1188720"/>
+            <a:off x="5943600" y="2514600"/>
+            <a:ext cx="2606040" cy="1143000"/>
           </a:xfrm>
           <a:prstGeom prst="rect">
             <a:avLst/>
@@ -4984,8 +6425,8 @@
         </p:nvSpPr>
         <p:spPr>
           <a:xfrm>
-            <a:off x="6035040" y="2743200"/>
-            <a:ext cx="2697480" cy="1005840"/>
+            <a:off x="5943600" y="2606040"/>
+            <a:ext cx="2606040" cy="960120"/>
           </a:xfrm>
           <a:prstGeom prst="rect">
             <a:avLst/>
@@ -5000,7 +6441,7 @@
           <a:p>
             <a:pPr algn="ctr"/>
             <a:r>
-              <a:rPr sz="2600" b="1">
+              <a:rPr sz="2400" b="1">
                 <a:solidFill>
                   <a:srgbClr val="4F46E5"/>
                 </a:solidFill>
@@ -5011,12 +6452,12 @@
           <a:p>
             <a:pPr algn="ctr"/>
             <a:r>
-              <a:rPr sz="1100">
+              <a:rPr sz="1050">
                 <a:solidFill>
                   <a:srgbClr val="334155"/>
                 </a:solidFill>
               </a:rPr>
-              <a:t>Cost-aware operating threshold</a:t>
+              <a:t>Operating threshold</a:t>
             </a:r>
           </a:p>
         </p:txBody>
@@ -5029,8 +6470,8 @@
         </p:nvSpPr>
         <p:spPr>
           <a:xfrm>
-            <a:off x="8823960" y="2651760"/>
-            <a:ext cx="2880360" cy="1188720"/>
+            <a:off x="8686800" y="2514600"/>
+            <a:ext cx="3017520" cy="1143000"/>
           </a:xfrm>
           <a:prstGeom prst="rect">
             <a:avLst/>
@@ -5072,8 +6513,8 @@
         </p:nvSpPr>
         <p:spPr>
           <a:xfrm>
-            <a:off x="8823960" y="2743200"/>
-            <a:ext cx="2880360" cy="1005840"/>
+            <a:off x="8686800" y="2606040"/>
+            <a:ext cx="3017520" cy="960120"/>
           </a:xfrm>
           <a:prstGeom prst="rect">
             <a:avLst/>
@@ -5088,7 +6529,7 @@
           <a:p>
             <a:pPr algn="ctr"/>
             <a:r>
-              <a:rPr sz="2600" b="1">
+              <a:rPr sz="2400" b="1">
                 <a:solidFill>
                   <a:srgbClr val="15803D"/>
                 </a:solidFill>
@@ -5099,94 +6540,252 @@
           <a:p>
             <a:pPr algn="ctr"/>
             <a:r>
-              <a:rPr sz="1100">
+              <a:rPr sz="1050">
                 <a:solidFill>
                   <a:srgbClr val="334155"/>
                 </a:solidFill>
               </a:rPr>
-              <a:t>External data used
-(fully compliant, ADR-001)</a:t>
-            </a:r>
-          </a:p>
-        </p:txBody>
-      </p:sp>
-      <p:sp>
-        <p:nvSpPr>
-          <p:cNvPr id="22" name="TextBox 21"/>
-          <p:cNvSpPr txBox="1"/>
-          <p:nvPr/>
-        </p:nvSpPr>
-        <p:spPr>
-          <a:xfrm>
-            <a:off x="548640" y="4160520"/>
-            <a:ext cx="11064240" cy="2286000"/>
-          </a:xfrm>
-          <a:prstGeom prst="rect">
-            <a:avLst/>
-          </a:prstGeom>
-          <a:noFill/>
-        </p:spPr>
-        <p:txBody>
-          <a:bodyPr wrap="square">
-            <a:spAutoFit/>
-          </a:bodyPr>
-          <a:lstStyle/>
-          <a:p>
-            <a:pPr>
-              <a:lnSpc>
-                <a:spcPct val="115000"/>
-              </a:lnSpc>
-              <a:spcAft>
-                <a:spcPts val="600"/>
-              </a:spcAft>
-              <a:defRPr sz="1500">
-                <a:solidFill>
-                  <a:srgbClr val="334155"/>
-                </a:solidFill>
-              </a:defRPr>
-            </a:pPr>
-            <a:r>
-              <a:t>• Live risk distribution: 94.2% LOW / 5.5% MEDIUM / 0.3% HIGH — patrol resources can be concentrated on the small fraction of cells actually at risk</a:t>
-            </a:r>
-          </a:p>
-          <a:p>
-            <a:pPr>
-              <a:lnSpc>
-                <a:spcPct val="115000"/>
-              </a:lnSpc>
-              <a:spcAft>
-                <a:spcPts val="600"/>
-              </a:spcAft>
-              <a:defRPr sz="1500">
-                <a:solidFill>
-                  <a:srgbClr val="334155"/>
-                </a:solidFill>
-              </a:defRPr>
-            </a:pPr>
-            <a:r>
-              <a:t>• Three full retraining cycles run end-to-end during development (feature changes, risk-weight refit, hyperparameter fix) — each verified against the same spatial holdout test before and after, not just "trust the new number"</a:t>
-            </a:r>
-          </a:p>
-          <a:p>
-            <a:pPr>
-              <a:lnSpc>
-                <a:spcPct val="115000"/>
-              </a:lnSpc>
-              <a:spcAft>
-                <a:spcPts val="600"/>
-              </a:spcAft>
-              <a:defRPr sz="1500">
-                <a:solidFill>
-                  <a:srgbClr val="334155"/>
-                </a:solidFill>
-              </a:defRPr>
-            </a:pPr>
-            <a:r>
-              <a:t>• Every reported number in this deck is read from the live /metrics endpoint or docs/spatial_holdout_result.json — generated by code, not hand-typed into slides</a:t>
-            </a:r>
-          </a:p>
-        </p:txBody>
-      </p:sp>
+              <a:t>External data used</a:t>
+            </a:r>
+          </a:p>
+        </p:txBody>
+      </p:sp>
+      <p:graphicFrame>
+        <p:nvGraphicFramePr>
+          <p:cNvPr id="22" name="Chart 21"/>
+          <p:cNvGraphicFramePr>
+            <a:graphicFrameLocks noGrp="1"/>
+          </p:cNvGraphicFramePr>
+          <p:nvPr/>
+        </p:nvGraphicFramePr>
+        <p:xfrm>
+          <a:off x="457200" y="3886200"/>
+          <a:ext cx="5029200" cy="2651760"/>
+        </p:xfrm>
+        <a:graphic>
+          <a:graphicData uri="http://schemas.openxmlformats.org/drawingml/2006/chart">
+            <c:chart xmlns:c="http://schemas.openxmlformats.org/drawingml/2006/chart" r:id="rId2"/>
+          </a:graphicData>
+        </a:graphic>
+      </p:graphicFrame>
+      <p:graphicFrame>
+        <p:nvGraphicFramePr>
+          <p:cNvPr id="23" name="Table 22"/>
+          <p:cNvGraphicFramePr>
+            <a:graphicFrameLocks noGrp="1"/>
+          </p:cNvGraphicFramePr>
+          <p:nvPr/>
+        </p:nvGraphicFramePr>
+        <p:xfrm>
+          <a:off x="5760720" y="3886200"/>
+          <a:ext cx="5852160" cy="2651760"/>
+        </p:xfrm>
+        <a:graphic>
+          <a:graphicData uri="http://schemas.openxmlformats.org/drawingml/2006/table">
+            <a:tbl>
+              <a:tblPr firstRow="1" bandRow="1">
+                <a:tableStyleId>{5C22544A-7EE6-4342-B048-85BDC9FD1C3A}</a:tableStyleId>
+              </a:tblPr>
+              <a:tblGrid>
+                <a:gridCol w="2743200"/>
+                <a:gridCol w="3108960"/>
+              </a:tblGrid>
+              <a:tr h="662940">
+                <a:tc>
+                  <a:txBody>
+                    <a:bodyPr/>
+                    <a:lstStyle/>
+                    <a:p>
+                      <a:pPr>
+                        <a:defRPr sz="1200" b="1">
+                          <a:solidFill>
+                            <a:srgbClr val="FFFFFF"/>
+                          </a:solidFill>
+                        </a:defRPr>
+                      </a:pPr>
+                      <a:r>
+                        <a:t>Verification</a:t>
+                      </a:r>
+                    </a:p>
+                  </a:txBody>
+                  <a:tcPr marT="25400" marB="25400">
+                    <a:solidFill>
+                      <a:srgbClr val="0F172A"/>
+                    </a:solidFill>
+                  </a:tcPr>
+                </a:tc>
+                <a:tc>
+                  <a:txBody>
+                    <a:bodyPr/>
+                    <a:lstStyle/>
+                    <a:p>
+                      <a:pPr>
+                        <a:defRPr sz="1200" b="1">
+                          <a:solidFill>
+                            <a:srgbClr val="FFFFFF"/>
+                          </a:solidFill>
+                        </a:defRPr>
+                      </a:pPr>
+                      <a:r>
+                        <a:t>Result</a:t>
+                      </a:r>
+                    </a:p>
+                  </a:txBody>
+                  <a:tcPr marT="25400" marB="25400">
+                    <a:solidFill>
+                      <a:srgbClr val="0F172A"/>
+                    </a:solidFill>
+                  </a:tcPr>
+                </a:tc>
+              </a:tr>
+              <a:tr h="662940">
+                <a:tc>
+                  <a:txBody>
+                    <a:bodyPr/>
+                    <a:lstStyle/>
+                    <a:p>
+                      <a:pPr>
+                        <a:defRPr sz="1200" b="0">
+                          <a:solidFill>
+                            <a:srgbClr val="334155"/>
+                          </a:solidFill>
+                        </a:defRPr>
+                      </a:pPr>
+                      <a:r>
+                        <a:t>Retraining cycles run end-to-end</a:t>
+                      </a:r>
+                    </a:p>
+                  </a:txBody>
+                  <a:tcPr marT="25400" marB="25400">
+                    <a:solidFill>
+                      <a:srgbClr val="FFFFFF"/>
+                    </a:solidFill>
+                  </a:tcPr>
+                </a:tc>
+                <a:tc>
+                  <a:txBody>
+                    <a:bodyPr/>
+                    <a:lstStyle/>
+                    <a:p>
+                      <a:pPr>
+                        <a:defRPr sz="1200" b="0">
+                          <a:solidFill>
+                            <a:srgbClr val="334155"/>
+                          </a:solidFill>
+                        </a:defRPr>
+                      </a:pPr>
+                      <a:r>
+                        <a:t>3 (features, weights, hyperparameters)</a:t>
+                      </a:r>
+                    </a:p>
+                  </a:txBody>
+                  <a:tcPr marT="25400" marB="25400">
+                    <a:solidFill>
+                      <a:srgbClr val="FFFFFF"/>
+                    </a:solidFill>
+                  </a:tcPr>
+                </a:tc>
+              </a:tr>
+              <a:tr h="662940">
+                <a:tc>
+                  <a:txBody>
+                    <a:bodyPr/>
+                    <a:lstStyle/>
+                    <a:p>
+                      <a:pPr>
+                        <a:defRPr sz="1200" b="0">
+                          <a:solidFill>
+                            <a:srgbClr val="334155"/>
+                          </a:solidFill>
+                        </a:defRPr>
+                      </a:pPr>
+                      <a:r>
+                        <a:t>Spatial holdout re-checked</a:t>
+                      </a:r>
+                    </a:p>
+                  </a:txBody>
+                  <a:tcPr marT="25400" marB="25400">
+                    <a:solidFill>
+                      <a:srgbClr val="F4F6FB"/>
+                    </a:solidFill>
+                  </a:tcPr>
+                </a:tc>
+                <a:tc>
+                  <a:txBody>
+                    <a:bodyPr/>
+                    <a:lstStyle/>
+                    <a:p>
+                      <a:pPr>
+                        <a:defRPr sz="1200" b="0">
+                          <a:solidFill>
+                            <a:srgbClr val="334155"/>
+                          </a:solidFill>
+                        </a:defRPr>
+                      </a:pPr>
+                      <a:r>
+                        <a:t>Before and after each change</a:t>
+                      </a:r>
+                    </a:p>
+                  </a:txBody>
+                  <a:tcPr marT="25400" marB="25400">
+                    <a:solidFill>
+                      <a:srgbClr val="F4F6FB"/>
+                    </a:solidFill>
+                  </a:tcPr>
+                </a:tc>
+              </a:tr>
+              <a:tr h="662940">
+                <a:tc>
+                  <a:txBody>
+                    <a:bodyPr/>
+                    <a:lstStyle/>
+                    <a:p>
+                      <a:pPr>
+                        <a:defRPr sz="1200" b="0">
+                          <a:solidFill>
+                            <a:srgbClr val="334155"/>
+                          </a:solidFill>
+                        </a:defRPr>
+                      </a:pPr>
+                      <a:r>
+                        <a:t>Numbers in this deck</a:t>
+                      </a:r>
+                    </a:p>
+                  </a:txBody>
+                  <a:tcPr marT="25400" marB="25400">
+                    <a:solidFill>
+                      <a:srgbClr val="FFFFFF"/>
+                    </a:solidFill>
+                  </a:tcPr>
+                </a:tc>
+                <a:tc>
+                  <a:txBody>
+                    <a:bodyPr/>
+                    <a:lstStyle/>
+                    <a:p>
+                      <a:pPr>
+                        <a:defRPr sz="1200" b="0">
+                          <a:solidFill>
+                            <a:srgbClr val="334155"/>
+                          </a:solidFill>
+                        </a:defRPr>
+                      </a:pPr>
+                      <a:r>
+                        <a:t>Read from /metrics + spatial_holdout_result.json, not hand-typed</a:t>
+                      </a:r>
+                    </a:p>
+                  </a:txBody>
+                  <a:tcPr marT="25400" marB="25400">
+                    <a:solidFill>
+                      <a:srgbClr val="FFFFFF"/>
+                    </a:solidFill>
+                  </a:tcPr>
+                </a:tc>
+              </a:tr>
+            </a:tbl>
+          </a:graphicData>
+        </a:graphic>
+      </p:graphicFrame>
     </p:spTree>
   </p:cSld>
   <p:clrMapOvr>
@@ -5276,7 +6875,6 @@
                 <a:solidFill>
                   <a:srgbClr val="FFFFFF"/>
                 </a:solidFill>
-                <a:latin typeface="Calibri"/>
               </a:rPr>
               <a:t>The Problem</a:t>
             </a:r>
@@ -5311,7 +6909,6 @@
                 <a:solidFill>
                   <a:srgbClr val="C7D2FE"/>
                 </a:solidFill>
-                <a:latin typeface="Calibri"/>
               </a:rPr>
               <a:t>Why reactive enforcement isn't enough</a:t>
             </a:r>
@@ -5370,7 +6967,7 @@
         <p:spPr>
           <a:xfrm>
             <a:off x="548640" y="1188720"/>
-            <a:ext cx="5486400" cy="5029200"/>
+            <a:ext cx="5394960" cy="2743200"/>
           </a:xfrm>
           <a:prstGeom prst="rect">
             <a:avLst/>
@@ -5388,7 +6985,7 @@
                 <a:spcPct val="115000"/>
               </a:lnSpc>
               <a:spcAft>
-                <a:spcPts val="600"/>
+                <a:spcPts val="500"/>
               </a:spcAft>
               <a:defRPr sz="1600">
                 <a:solidFill>
@@ -5397,7 +6994,7 @@
               </a:defRPr>
             </a:pPr>
             <a:r>
-              <a:t>• 298,450 logged parking violations across ~5 months (Nov 2023 – Apr 2024), Bengaluru</a:t>
+              <a:t>• 298,450 violations logged over ~5 months, Bengaluru</a:t>
             </a:r>
           </a:p>
           <a:p>
@@ -5406,7 +7003,7 @@
                 <a:spcPct val="115000"/>
               </a:lnSpc>
               <a:spcAft>
-                <a:spcPts val="600"/>
+                <a:spcPts val="500"/>
               </a:spcAft>
               <a:defRPr sz="1600">
                 <a:solidFill>
@@ -5415,7 +7012,7 @@
               </a:defRPr>
             </a:pPr>
             <a:r>
-              <a:t>• Enforcement today is reactive: officers respond after violations are already logged</a:t>
+              <a:t>• Enforcement today is reactive — ticket after the fact</a:t>
             </a:r>
           </a:p>
           <a:p>
@@ -5424,7 +7021,7 @@
                 <a:spcPct val="115000"/>
               </a:lnSpc>
               <a:spcAft>
-                <a:spcPts val="600"/>
+                <a:spcPts val="500"/>
               </a:spcAft>
               <a:defRPr sz="1600">
                 <a:solidFill>
@@ -5433,7 +7030,7 @@
               </a:defRPr>
             </a:pPr>
             <a:r>
-              <a:t>• No existing system answers: "which junction will be a hotspot in the next hour?"</a:t>
+              <a:t>• No system predicts tomorrow's hotspot, only logs today's</a:t>
             </a:r>
           </a:p>
           <a:p>
@@ -5442,7 +7039,7 @@
                 <a:spcPct val="115000"/>
               </a:lnSpc>
               <a:spcAft>
-                <a:spcPts val="600"/>
+                <a:spcPts val="500"/>
               </a:spcAft>
               <a:defRPr sz="1600">
                 <a:solidFill>
@@ -5451,25 +7048,7 @@
               </a:defRPr>
             </a:pPr>
             <a:r>
-              <a:t>• Competition constraint: only the HackerEarth-provided violations dataset may be used — no Maps/traffic APIs, no external enrichment, or risk of disqualification</a:t>
-            </a:r>
-          </a:p>
-          <a:p>
-            <a:pPr>
-              <a:lnSpc>
-                <a:spcPct val="115000"/>
-              </a:lnSpc>
-              <a:spcAft>
-                <a:spcPts val="600"/>
-              </a:spcAft>
-              <a:defRPr sz="1600">
-                <a:solidFill>
-                  <a:srgbClr val="334155"/>
-                </a:solidFill>
-              </a:defRPr>
-            </a:pPr>
-            <a:r>
-              <a:t>• Goal: turn a static violations log into a forward-looking, retrainable decision-support system for patrol dispatch</a:t>
+              <a:t>• Constraint: only the provided dataset — no Maps/external APIs</a:t>
             </a:r>
           </a:p>
         </p:txBody>
@@ -5482,8 +7061,8 @@
         </p:nvSpPr>
         <p:spPr>
           <a:xfrm>
-            <a:off x="6400800" y="1188720"/>
-            <a:ext cx="5212080" cy="5029200"/>
+            <a:off x="548640" y="4114800"/>
+            <a:ext cx="2606040" cy="1188720"/>
           </a:xfrm>
           <a:prstGeom prst="rect">
             <a:avLst/>
@@ -5525,8 +7104,8 @@
         </p:nvSpPr>
         <p:spPr>
           <a:xfrm>
-            <a:off x="6675120" y="1371600"/>
-            <a:ext cx="4754880" cy="365760"/>
+            <a:off x="548640" y="4206240"/>
+            <a:ext cx="2606040" cy="1005840"/>
           </a:xfrm>
           <a:prstGeom prst="rect">
             <a:avLst/>
@@ -5539,168 +7118,568 @@
           </a:bodyPr>
           <a:lstStyle/>
           <a:p>
+            <a:pPr algn="ctr"/>
+            <a:r>
+              <a:rPr sz="2400" b="1">
+                <a:solidFill>
+                  <a:srgbClr val="4F46E5"/>
+                </a:solidFill>
+              </a:rPr>
+              <a:t>298,450</a:t>
+            </a:r>
+          </a:p>
+          <a:p>
+            <a:pPr algn="ctr"/>
+            <a:r>
+              <a:rPr sz="1050">
+                <a:solidFill>
+                  <a:srgbClr val="334155"/>
+                </a:solidFill>
+              </a:rPr>
+              <a:t>Total violation rows</a:t>
+            </a:r>
+          </a:p>
+        </p:txBody>
+      </p:sp>
+      <p:sp>
+        <p:nvSpPr>
+          <p:cNvPr id="9" name="Rectangle 8"/>
+          <p:cNvSpPr/>
+          <p:nvPr/>
+        </p:nvSpPr>
+        <p:spPr>
+          <a:xfrm>
+            <a:off x="3337560" y="4114800"/>
+            <a:ext cx="2606040" cy="1188720"/>
+          </a:xfrm>
+          <a:prstGeom prst="rect">
+            <a:avLst/>
+          </a:prstGeom>
+          <a:solidFill>
+            <a:srgbClr val="F4F6FB"/>
+          </a:solidFill>
+          <a:ln>
+            <a:noFill/>
+          </a:ln>
+        </p:spPr>
+        <p:style>
+          <a:lnRef idx="1">
+            <a:schemeClr val="accent1"/>
+          </a:lnRef>
+          <a:fillRef idx="3">
+            <a:schemeClr val="accent1"/>
+          </a:fillRef>
+          <a:effectRef idx="2">
+            <a:schemeClr val="accent1"/>
+          </a:effectRef>
+          <a:fontRef idx="minor">
+            <a:schemeClr val="lt1"/>
+          </a:fontRef>
+        </p:style>
+        <p:txBody>
+          <a:bodyPr rtlCol="0" anchor="ctr"/>
+          <a:lstStyle/>
+          <a:p>
+            <a:pPr algn="ctr"/>
+          </a:p>
+        </p:txBody>
+      </p:sp>
+      <p:sp>
+        <p:nvSpPr>
+          <p:cNvPr id="10" name="TextBox 9"/>
+          <p:cNvSpPr txBox="1"/>
+          <p:nvPr/>
+        </p:nvSpPr>
+        <p:spPr>
+          <a:xfrm>
+            <a:off x="3337560" y="4206240"/>
+            <a:ext cx="2606040" cy="1005840"/>
+          </a:xfrm>
+          <a:prstGeom prst="rect">
+            <a:avLst/>
+          </a:prstGeom>
+          <a:noFill/>
+        </p:spPr>
+        <p:txBody>
+          <a:bodyPr wrap="square">
+            <a:spAutoFit/>
+          </a:bodyPr>
+          <a:lstStyle/>
+          <a:p>
+            <a:pPr algn="ctr"/>
+            <a:r>
+              <a:rPr sz="2400" b="1">
+                <a:solidFill>
+                  <a:srgbClr val="4F46E5"/>
+                </a:solidFill>
+              </a:rPr>
+              <a:t>24</a:t>
+            </a:r>
+          </a:p>
+          <a:p>
+            <a:pPr algn="ctr"/>
+            <a:r>
+              <a:rPr sz="1050">
+                <a:solidFill>
+                  <a:srgbClr val="334155"/>
+                </a:solidFill>
+              </a:rPr>
+              <a:t>Raw schema columns</a:t>
+            </a:r>
+          </a:p>
+        </p:txBody>
+      </p:sp>
+      <p:sp>
+        <p:nvSpPr>
+          <p:cNvPr id="11" name="Rectangle 10"/>
+          <p:cNvSpPr/>
+          <p:nvPr/>
+        </p:nvSpPr>
+        <p:spPr>
+          <a:xfrm>
+            <a:off x="6400800" y="1188720"/>
+            <a:ext cx="5212080" cy="5029200"/>
+          </a:xfrm>
+          <a:prstGeom prst="rect">
+            <a:avLst/>
+          </a:prstGeom>
+          <a:solidFill>
+            <a:srgbClr val="F4F6FB"/>
+          </a:solidFill>
+          <a:ln>
+            <a:noFill/>
+          </a:ln>
+        </p:spPr>
+        <p:style>
+          <a:lnRef idx="1">
+            <a:schemeClr val="accent1"/>
+          </a:lnRef>
+          <a:fillRef idx="3">
+            <a:schemeClr val="accent1"/>
+          </a:fillRef>
+          <a:effectRef idx="2">
+            <a:schemeClr val="accent1"/>
+          </a:effectRef>
+          <a:fontRef idx="minor">
+            <a:schemeClr val="lt1"/>
+          </a:fontRef>
+        </p:style>
+        <p:txBody>
+          <a:bodyPr rtlCol="0" anchor="ctr"/>
+          <a:lstStyle/>
+          <a:p>
+            <a:pPr algn="ctr"/>
+          </a:p>
+        </p:txBody>
+      </p:sp>
+      <p:sp>
+        <p:nvSpPr>
+          <p:cNvPr id="12" name="TextBox 11"/>
+          <p:cNvSpPr txBox="1"/>
+          <p:nvPr/>
+        </p:nvSpPr>
+        <p:spPr>
+          <a:xfrm>
+            <a:off x="6675120" y="1325880"/>
+            <a:ext cx="4754880" cy="365760"/>
+          </a:xfrm>
+          <a:prstGeom prst="rect">
+            <a:avLst/>
+          </a:prstGeom>
+          <a:noFill/>
+        </p:spPr>
+        <p:txBody>
+          <a:bodyPr wrap="square">
+            <a:spAutoFit/>
+          </a:bodyPr>
+          <a:lstStyle/>
+          <a:p>
             <a:pPr algn="l"/>
             <a:r>
               <a:rPr sz="1500" b="1">
                 <a:solidFill>
                   <a:srgbClr val="0F172A"/>
                 </a:solidFill>
-                <a:latin typeface="Calibri"/>
               </a:rPr>
-              <a:t>Dataset schema (raw)</a:t>
-            </a:r>
-          </a:p>
-        </p:txBody>
-      </p:sp>
-      <p:sp>
-        <p:nvSpPr>
-          <p:cNvPr id="9" name="TextBox 8"/>
-          <p:cNvSpPr txBox="1"/>
-          <p:nvPr/>
-        </p:nvSpPr>
-        <p:spPr>
-          <a:xfrm>
-            <a:off x="6675120" y="1783080"/>
-            <a:ext cx="4754880" cy="4297680"/>
-          </a:xfrm>
-          <a:prstGeom prst="rect">
-            <a:avLst/>
-          </a:prstGeom>
-          <a:noFill/>
-        </p:spPr>
-        <p:txBody>
-          <a:bodyPr wrap="square">
-            <a:spAutoFit/>
-          </a:bodyPr>
-          <a:lstStyle/>
-          <a:p>
-            <a:pPr>
-              <a:lnSpc>
-                <a:spcPct val="115000"/>
-              </a:lnSpc>
-              <a:spcAft>
-                <a:spcPts val="600"/>
-              </a:spcAft>
-              <a:defRPr sz="1300">
-                <a:solidFill>
-                  <a:srgbClr val="334155"/>
-                </a:solidFill>
-              </a:defRPr>
-            </a:pPr>
-            <a:r>
-              <a:t>• id, latitude, longitude, location</a:t>
-            </a:r>
-          </a:p>
-          <a:p>
-            <a:pPr>
-              <a:lnSpc>
-                <a:spcPct val="115000"/>
-              </a:lnSpc>
-              <a:spcAft>
-                <a:spcPts val="600"/>
-              </a:spcAft>
-              <a:defRPr sz="1300">
-                <a:solidFill>
-                  <a:srgbClr val="334155"/>
-                </a:solidFill>
-              </a:defRPr>
-            </a:pPr>
-            <a:r>
-              <a:t>• vehicle_number, vehicle_type, description</a:t>
-            </a:r>
-          </a:p>
-          <a:p>
-            <a:pPr>
-              <a:lnSpc>
-                <a:spcPct val="115000"/>
-              </a:lnSpc>
-              <a:spcAft>
-                <a:spcPts val="600"/>
-              </a:spcAft>
-              <a:defRPr sz="1300">
-                <a:solidFill>
-                  <a:srgbClr val="334155"/>
-                </a:solidFill>
-              </a:defRPr>
-            </a:pPr>
-            <a:r>
-              <a:t>• violation_type, offence_code</a:t>
-            </a:r>
-          </a:p>
-          <a:p>
-            <a:pPr>
-              <a:lnSpc>
-                <a:spcPct val="115000"/>
-              </a:lnSpc>
-              <a:spcAft>
-                <a:spcPts val="600"/>
-              </a:spcAft>
-              <a:defRPr sz="1300">
-                <a:solidFill>
-                  <a:srgbClr val="334155"/>
-                </a:solidFill>
-              </a:defRPr>
-            </a:pPr>
-            <a:r>
-              <a:t>• created_datetime, closed_datetime, modified_datetime</a:t>
-            </a:r>
-          </a:p>
-          <a:p>
-            <a:pPr>
-              <a:lnSpc>
-                <a:spcPct val="115000"/>
-              </a:lnSpc>
-              <a:spcAft>
-                <a:spcPts val="600"/>
-              </a:spcAft>
-              <a:defRPr sz="1300">
-                <a:solidFill>
-                  <a:srgbClr val="334155"/>
-                </a:solidFill>
-              </a:defRPr>
-            </a:pPr>
-            <a:r>
-              <a:t>• device_id, created_by_id, center_code, police_station, junction_name</a:t>
-            </a:r>
-          </a:p>
-          <a:p>
-            <a:pPr>
-              <a:lnSpc>
-                <a:spcPct val="115000"/>
-              </a:lnSpc>
-              <a:spcAft>
-                <a:spcPts val="600"/>
-              </a:spcAft>
-              <a:defRPr sz="1300">
-                <a:solidFill>
-                  <a:srgbClr val="334155"/>
-                </a:solidFill>
-              </a:defRPr>
-            </a:pPr>
-            <a:r>
-              <a:t>• data_sent_to_scita(_timestamp), action_taken_timestamp</a:t>
-            </a:r>
-          </a:p>
-          <a:p>
-            <a:pPr>
-              <a:lnSpc>
-                <a:spcPct val="115000"/>
-              </a:lnSpc>
-              <a:spcAft>
-                <a:spcPts val="600"/>
-              </a:spcAft>
-              <a:defRPr sz="1300">
-                <a:solidFill>
-                  <a:srgbClr val="334155"/>
-                </a:solidFill>
-              </a:defRPr>
-            </a:pPr>
-            <a:r>
-              <a:t>• updated_vehicle_number/type, validation_status/timestamp</a:t>
-            </a:r>
-          </a:p>
-        </p:txBody>
-      </p:sp>
+              <a:t>Raw schema (24 columns)</a:t>
+            </a:r>
+          </a:p>
+        </p:txBody>
+      </p:sp>
+      <p:graphicFrame>
+        <p:nvGraphicFramePr>
+          <p:cNvPr id="13" name="Table 12"/>
+          <p:cNvGraphicFramePr>
+            <a:graphicFrameLocks noGrp="1"/>
+          </p:cNvGraphicFramePr>
+          <p:nvPr/>
+        </p:nvGraphicFramePr>
+        <p:xfrm>
+          <a:off x="6675120" y="1737360"/>
+          <a:ext cx="4754880" cy="4297680"/>
+        </p:xfrm>
+        <a:graphic>
+          <a:graphicData uri="http://schemas.openxmlformats.org/drawingml/2006/table">
+            <a:tbl>
+              <a:tblPr firstRow="1" bandRow="1">
+                <a:tableStyleId>{5C22544A-7EE6-4342-B048-85BDC9FD1C3A}</a:tableStyleId>
+              </a:tblPr>
+              <a:tblGrid>
+                <a:gridCol w="1463040"/>
+                <a:gridCol w="3291840"/>
+              </a:tblGrid>
+              <a:tr h="613954">
+                <a:tc>
+                  <a:txBody>
+                    <a:bodyPr/>
+                    <a:lstStyle/>
+                    <a:p>
+                      <a:pPr>
+                        <a:defRPr sz="1100" b="1">
+                          <a:solidFill>
+                            <a:srgbClr val="FFFFFF"/>
+                          </a:solidFill>
+                        </a:defRPr>
+                      </a:pPr>
+                      <a:r>
+                        <a:t>Group</a:t>
+                      </a:r>
+                    </a:p>
+                  </a:txBody>
+                  <a:tcPr marT="25400" marB="25400">
+                    <a:solidFill>
+                      <a:srgbClr val="0F172A"/>
+                    </a:solidFill>
+                  </a:tcPr>
+                </a:tc>
+                <a:tc>
+                  <a:txBody>
+                    <a:bodyPr/>
+                    <a:lstStyle/>
+                    <a:p>
+                      <a:pPr>
+                        <a:defRPr sz="1100" b="1">
+                          <a:solidFill>
+                            <a:srgbClr val="FFFFFF"/>
+                          </a:solidFill>
+                        </a:defRPr>
+                      </a:pPr>
+                      <a:r>
+                        <a:t>Fields</a:t>
+                      </a:r>
+                    </a:p>
+                  </a:txBody>
+                  <a:tcPr marT="25400" marB="25400">
+                    <a:solidFill>
+                      <a:srgbClr val="0F172A"/>
+                    </a:solidFill>
+                  </a:tcPr>
+                </a:tc>
+              </a:tr>
+              <a:tr h="613954">
+                <a:tc>
+                  <a:txBody>
+                    <a:bodyPr/>
+                    <a:lstStyle/>
+                    <a:p>
+                      <a:pPr>
+                        <a:defRPr sz="1100" b="0">
+                          <a:solidFill>
+                            <a:srgbClr val="334155"/>
+                          </a:solidFill>
+                        </a:defRPr>
+                      </a:pPr>
+                      <a:r>
+                        <a:t>Identity / location</a:t>
+                      </a:r>
+                    </a:p>
+                  </a:txBody>
+                  <a:tcPr marT="25400" marB="25400">
+                    <a:solidFill>
+                      <a:srgbClr val="FFFFFF"/>
+                    </a:solidFill>
+                  </a:tcPr>
+                </a:tc>
+                <a:tc>
+                  <a:txBody>
+                    <a:bodyPr/>
+                    <a:lstStyle/>
+                    <a:p>
+                      <a:pPr>
+                        <a:defRPr sz="1100" b="0">
+                          <a:solidFill>
+                            <a:srgbClr val="334155"/>
+                          </a:solidFill>
+                        </a:defRPr>
+                      </a:pPr>
+                      <a:r>
+                        <a:t>id, latitude, longitude, location</a:t>
+                      </a:r>
+                    </a:p>
+                  </a:txBody>
+                  <a:tcPr marT="25400" marB="25400">
+                    <a:solidFill>
+                      <a:srgbClr val="FFFFFF"/>
+                    </a:solidFill>
+                  </a:tcPr>
+                </a:tc>
+              </a:tr>
+              <a:tr h="613954">
+                <a:tc>
+                  <a:txBody>
+                    <a:bodyPr/>
+                    <a:lstStyle/>
+                    <a:p>
+                      <a:pPr>
+                        <a:defRPr sz="1100" b="0">
+                          <a:solidFill>
+                            <a:srgbClr val="334155"/>
+                          </a:solidFill>
+                        </a:defRPr>
+                      </a:pPr>
+                      <a:r>
+                        <a:t>Vehicle</a:t>
+                      </a:r>
+                    </a:p>
+                  </a:txBody>
+                  <a:tcPr marT="25400" marB="25400">
+                    <a:solidFill>
+                      <a:srgbClr val="F4F6FB"/>
+                    </a:solidFill>
+                  </a:tcPr>
+                </a:tc>
+                <a:tc>
+                  <a:txBody>
+                    <a:bodyPr/>
+                    <a:lstStyle/>
+                    <a:p>
+                      <a:pPr>
+                        <a:defRPr sz="1100" b="0">
+                          <a:solidFill>
+                            <a:srgbClr val="334155"/>
+                          </a:solidFill>
+                        </a:defRPr>
+                      </a:pPr>
+                      <a:r>
+                        <a:t>vehicle_number, vehicle_type, updated_vehicle_number/type</a:t>
+                      </a:r>
+                    </a:p>
+                  </a:txBody>
+                  <a:tcPr marT="25400" marB="25400">
+                    <a:solidFill>
+                      <a:srgbClr val="F4F6FB"/>
+                    </a:solidFill>
+                  </a:tcPr>
+                </a:tc>
+              </a:tr>
+              <a:tr h="613954">
+                <a:tc>
+                  <a:txBody>
+                    <a:bodyPr/>
+                    <a:lstStyle/>
+                    <a:p>
+                      <a:pPr>
+                        <a:defRPr sz="1100" b="0">
+                          <a:solidFill>
+                            <a:srgbClr val="334155"/>
+                          </a:solidFill>
+                        </a:defRPr>
+                      </a:pPr>
+                      <a:r>
+                        <a:t>Violation</a:t>
+                      </a:r>
+                    </a:p>
+                  </a:txBody>
+                  <a:tcPr marT="25400" marB="25400">
+                    <a:solidFill>
+                      <a:srgbClr val="FFFFFF"/>
+                    </a:solidFill>
+                  </a:tcPr>
+                </a:tc>
+                <a:tc>
+                  <a:txBody>
+                    <a:bodyPr/>
+                    <a:lstStyle/>
+                    <a:p>
+                      <a:pPr>
+                        <a:defRPr sz="1100" b="0">
+                          <a:solidFill>
+                            <a:srgbClr val="334155"/>
+                          </a:solidFill>
+                        </a:defRPr>
+                      </a:pPr>
+                      <a:r>
+                        <a:t>description, violation_type, offence_code</a:t>
+                      </a:r>
+                    </a:p>
+                  </a:txBody>
+                  <a:tcPr marT="25400" marB="25400">
+                    <a:solidFill>
+                      <a:srgbClr val="FFFFFF"/>
+                    </a:solidFill>
+                  </a:tcPr>
+                </a:tc>
+              </a:tr>
+              <a:tr h="613954">
+                <a:tc>
+                  <a:txBody>
+                    <a:bodyPr/>
+                    <a:lstStyle/>
+                    <a:p>
+                      <a:pPr>
+                        <a:defRPr sz="1100" b="0">
+                          <a:solidFill>
+                            <a:srgbClr val="334155"/>
+                          </a:solidFill>
+                        </a:defRPr>
+                      </a:pPr>
+                      <a:r>
+                        <a:t>Timestamps</a:t>
+                      </a:r>
+                    </a:p>
+                  </a:txBody>
+                  <a:tcPr marT="25400" marB="25400">
+                    <a:solidFill>
+                      <a:srgbClr val="F4F6FB"/>
+                    </a:solidFill>
+                  </a:tcPr>
+                </a:tc>
+                <a:tc>
+                  <a:txBody>
+                    <a:bodyPr/>
+                    <a:lstStyle/>
+                    <a:p>
+                      <a:pPr>
+                        <a:defRPr sz="1100" b="0">
+                          <a:solidFill>
+                            <a:srgbClr val="334155"/>
+                          </a:solidFill>
+                        </a:defRPr>
+                      </a:pPr>
+                      <a:r>
+                        <a:t>created/closed/modified_datetime, action_taken_timestamp</a:t>
+                      </a:r>
+                    </a:p>
+                  </a:txBody>
+                  <a:tcPr marT="25400" marB="25400">
+                    <a:solidFill>
+                      <a:srgbClr val="F4F6FB"/>
+                    </a:solidFill>
+                  </a:tcPr>
+                </a:tc>
+              </a:tr>
+              <a:tr h="613954">
+                <a:tc>
+                  <a:txBody>
+                    <a:bodyPr/>
+                    <a:lstStyle/>
+                    <a:p>
+                      <a:pPr>
+                        <a:defRPr sz="1100" b="0">
+                          <a:solidFill>
+                            <a:srgbClr val="334155"/>
+                          </a:solidFill>
+                        </a:defRPr>
+                      </a:pPr>
+                      <a:r>
+                        <a:t>Org / device</a:t>
+                      </a:r>
+                    </a:p>
+                  </a:txBody>
+                  <a:tcPr marT="25400" marB="25400">
+                    <a:solidFill>
+                      <a:srgbClr val="FFFFFF"/>
+                    </a:solidFill>
+                  </a:tcPr>
+                </a:tc>
+                <a:tc>
+                  <a:txBody>
+                    <a:bodyPr/>
+                    <a:lstStyle/>
+                    <a:p>
+                      <a:pPr>
+                        <a:defRPr sz="1100" b="0">
+                          <a:solidFill>
+                            <a:srgbClr val="334155"/>
+                          </a:solidFill>
+                        </a:defRPr>
+                      </a:pPr>
+                      <a:r>
+                        <a:t>device_id, created_by_id, center_code, police_station,</a:t>
+                      </a:r>
+                    </a:p>
+                    <a:p>
+                      <a:pPr>
+                        <a:defRPr sz="1100" b="0">
+                          <a:solidFill>
+                            <a:srgbClr val="334155"/>
+                          </a:solidFill>
+                        </a:defRPr>
+                      </a:pPr>
+                      <a:r>
+                        <a:t>junction_name</a:t>
+                      </a:r>
+                    </a:p>
+                  </a:txBody>
+                  <a:tcPr marT="25400" marB="25400">
+                    <a:solidFill>
+                      <a:srgbClr val="FFFFFF"/>
+                    </a:solidFill>
+                  </a:tcPr>
+                </a:tc>
+              </a:tr>
+              <a:tr h="613956">
+                <a:tc>
+                  <a:txBody>
+                    <a:bodyPr/>
+                    <a:lstStyle/>
+                    <a:p>
+                      <a:pPr>
+                        <a:defRPr sz="1100" b="0">
+                          <a:solidFill>
+                            <a:srgbClr val="334155"/>
+                          </a:solidFill>
+                        </a:defRPr>
+                      </a:pPr>
+                      <a:r>
+                        <a:t>SCITA / validation</a:t>
+                      </a:r>
+                    </a:p>
+                  </a:txBody>
+                  <a:tcPr marT="25400" marB="25400">
+                    <a:solidFill>
+                      <a:srgbClr val="F4F6FB"/>
+                    </a:solidFill>
+                  </a:tcPr>
+                </a:tc>
+                <a:tc>
+                  <a:txBody>
+                    <a:bodyPr/>
+                    <a:lstStyle/>
+                    <a:p>
+                      <a:pPr>
+                        <a:defRPr sz="1100" b="0">
+                          <a:solidFill>
+                            <a:srgbClr val="334155"/>
+                          </a:solidFill>
+                        </a:defRPr>
+                      </a:pPr>
+                      <a:r>
+                        <a:t>data_sent_to_scita(_timestamp), validation_status(_timestamp)</a:t>
+                      </a:r>
+                    </a:p>
+                  </a:txBody>
+                  <a:tcPr marT="25400" marB="25400">
+                    <a:solidFill>
+                      <a:srgbClr val="F4F6FB"/>
+                    </a:solidFill>
+                  </a:tcPr>
+                </a:tc>
+              </a:tr>
+            </a:tbl>
+          </a:graphicData>
+        </a:graphic>
+      </p:graphicFrame>
     </p:spTree>
   </p:cSld>
   <p:clrMapOvr>
@@ -5790,7 +7769,6 @@
                 <a:solidFill>
                   <a:srgbClr val="FFFFFF"/>
                 </a:solidFill>
-                <a:latin typeface="Calibri"/>
               </a:rPr>
               <a:t>System Architecture</a:t>
             </a:r>
@@ -5825,7 +7803,6 @@
                 <a:solidFill>
                   <a:srgbClr val="C7D2FE"/>
                 </a:solidFill>
-                <a:latin typeface="Calibri"/>
               </a:rPr>
               <a:t>End-to-end pipeline, ingestion to dashboard</a:t>
             </a:r>
@@ -5948,7 +7925,7 @@
                 </a:solidFill>
               </a:rPr>
               <a:t>Raw CSV
-(298,450 rows)</a:t>
+298,450 rows</a:t>
             </a:r>
           </a:p>
           <a:p>
@@ -5959,8 +7936,8 @@
                   <a:srgbClr val="E2E8F0"/>
                 </a:solidFill>
               </a:rPr>
-              <a:t>Schema validation,
-dedupe, type cast</a:t>
+              <a:t>Validate,
+dedupe, cast</a:t>
             </a:r>
           </a:p>
         </p:txBody>
@@ -6083,9 +8060,8 @@
                   <a:srgbClr val="E2E8F0"/>
                 </a:solidFill>
               </a:rPr>
-              <a:t>H3 res-9 grid, rolling
-windows, leakage-safe
-merge_asof joins</a:t>
+              <a:t>H3 grid, rolling
+windows</a:t>
             </a:r>
           </a:p>
         </p:txBody>
@@ -6196,8 +8172,7 @@
                   <a:srgbClr val="FFFFFF"/>
                 </a:solidFill>
               </a:rPr>
-              <a:t>3 Models
-(trained)</a:t>
+              <a:t>3 Models</a:t>
             </a:r>
           </a:p>
           <a:p>
@@ -6208,9 +8183,8 @@
                   <a:srgbClr val="E2E8F0"/>
                 </a:solidFill>
               </a:rPr>
-              <a:t>CatBoost / LightGBM /
-XGBoost — classifier +
-regressor</a:t>
+              <a:t>CatBoost / LightGBM
+/ XGBoost</a:t>
             </a:r>
           </a:p>
         </p:txBody>
@@ -6333,9 +8307,8 @@
                   <a:srgbClr val="E2E8F0"/>
                 </a:solidFill>
               </a:rPr>
-              <a:t>Weighted blend of model
-outputs (ridge-NNLS
-fit weights)</a:t>
+              <a:t>Ridge-NNLS
+fit weights</a:t>
             </a:r>
           </a:p>
         </p:txBody>
@@ -6447,7 +8420,7 @@
                 </a:solidFill>
               </a:rPr>
               <a:t>FastAPI
-Serving Layer</a:t>
+Serving</a:t>
             </a:r>
           </a:p>
           <a:p>
@@ -6459,7 +8432,7 @@
                 </a:solidFill>
               </a:rPr>
               <a:t>/forecast /alerts
-/metrics /admin/*</a:t>
+/metrics /admin</a:t>
             </a:r>
           </a:p>
         </p:txBody>
@@ -6582,90 +8555,230 @@
                   <a:srgbClr val="E2E8F0"/>
                 </a:solidFill>
               </a:rPr>
-              <a:t>Live map, forecast,
-operations, analytics,
-admin</a:t>
-            </a:r>
-          </a:p>
-        </p:txBody>
-      </p:sp>
-      <p:sp>
-        <p:nvSpPr>
-          <p:cNvPr id="23" name="TextBox 22"/>
-          <p:cNvSpPr txBox="1"/>
-          <p:nvPr/>
-        </p:nvSpPr>
-        <p:spPr>
-          <a:xfrm>
-            <a:off x="548640" y="3200400"/>
-            <a:ext cx="11064240" cy="3200400"/>
-          </a:xfrm>
-          <a:prstGeom prst="rect">
-            <a:avLst/>
-          </a:prstGeom>
-          <a:noFill/>
-        </p:spPr>
-        <p:txBody>
-          <a:bodyPr wrap="square">
-            <a:spAutoFit/>
-          </a:bodyPr>
-          <a:lstStyle/>
-          <a:p>
-            <a:pPr>
-              <a:lnSpc>
-                <a:spcPct val="115000"/>
-              </a:lnSpc>
-              <a:spcAft>
-                <a:spcPts val="600"/>
-              </a:spcAft>
-              <a:defRPr sz="1500">
-                <a:solidFill>
-                  <a:srgbClr val="334155"/>
-                </a:solidFill>
-              </a:defRPr>
-            </a:pPr>
-            <a:r>
-              <a:t>• Retraining loop (ADR-024): police upload a CSV → lands in a PENDING staging area → reviewer approves/rejects → approved rows merge into the master raw dataset → an explicit Retrain action re-runs the full pipeline (features → train → risk weights → spatial holdout → alerts) and hot-reloads the serving layer with zero downtime</a:t>
-            </a:r>
-          </a:p>
-          <a:p>
-            <a:pPr>
-              <a:lnSpc>
-                <a:spcPct val="115000"/>
-              </a:lnSpc>
-              <a:spcAft>
-                <a:spcPts val="600"/>
-              </a:spcAft>
-              <a:defRPr sz="1500">
-                <a:solidFill>
-                  <a:srgbClr val="334155"/>
-                </a:solidFill>
-              </a:defRPr>
-            </a:pPr>
-            <a:r>
-              <a:t>• Deployment: Docker image → Docker Hub → Hugging Face Space (API) + Vercel (Next.js frontend, auto-deploys on push)</a:t>
-            </a:r>
-          </a:p>
-          <a:p>
-            <a:pPr>
-              <a:lnSpc>
-                <a:spcPct val="115000"/>
-              </a:lnSpc>
-              <a:spcAft>
-                <a:spcPts val="600"/>
-              </a:spcAft>
-              <a:defRPr sz="1500">
-                <a:solidFill>
-                  <a:srgbClr val="334155"/>
-                </a:solidFill>
-              </a:defRPr>
-            </a:pPr>
-            <a:r>
-              <a:t>• Admin API guarded by a single shared secret (X-Admin-Token header); 503 if unconfigured, 401 if wrong</a:t>
-            </a:r>
-          </a:p>
-        </p:txBody>
-      </p:sp>
+              <a:t>Map, forecast,
+analytics, admin</a:t>
+            </a:r>
+          </a:p>
+        </p:txBody>
+      </p:sp>
+      <p:graphicFrame>
+        <p:nvGraphicFramePr>
+          <p:cNvPr id="23" name="Table 22"/>
+          <p:cNvGraphicFramePr>
+            <a:graphicFrameLocks noGrp="1"/>
+          </p:cNvGraphicFramePr>
+          <p:nvPr/>
+        </p:nvGraphicFramePr>
+        <p:xfrm>
+          <a:off x="548640" y="3200400"/>
+          <a:ext cx="11064240" cy="2011680"/>
+        </p:xfrm>
+        <a:graphic>
+          <a:graphicData uri="http://schemas.openxmlformats.org/drawingml/2006/table">
+            <a:tbl>
+              <a:tblPr firstRow="1" bandRow="1">
+                <a:tableStyleId>{5C22544A-7EE6-4342-B048-85BDC9FD1C3A}</a:tableStyleId>
+              </a:tblPr>
+              <a:tblGrid>
+                <a:gridCol w="2377440"/>
+                <a:gridCol w="8686800"/>
+              </a:tblGrid>
+              <a:tr h="502920">
+                <a:tc>
+                  <a:txBody>
+                    <a:bodyPr/>
+                    <a:lstStyle/>
+                    <a:p>
+                      <a:pPr>
+                        <a:defRPr sz="1300" b="1">
+                          <a:solidFill>
+                            <a:srgbClr val="FFFFFF"/>
+                          </a:solidFill>
+                        </a:defRPr>
+                      </a:pPr>
+                      <a:r>
+                        <a:t>Layer</a:t>
+                      </a:r>
+                    </a:p>
+                  </a:txBody>
+                  <a:tcPr marT="25400" marB="25400">
+                    <a:solidFill>
+                      <a:srgbClr val="0F172A"/>
+                    </a:solidFill>
+                  </a:tcPr>
+                </a:tc>
+                <a:tc>
+                  <a:txBody>
+                    <a:bodyPr/>
+                    <a:lstStyle/>
+                    <a:p>
+                      <a:pPr>
+                        <a:defRPr sz="1300" b="1">
+                          <a:solidFill>
+                            <a:srgbClr val="FFFFFF"/>
+                          </a:solidFill>
+                        </a:defRPr>
+                      </a:pPr>
+                      <a:r>
+                        <a:t>What it does</a:t>
+                      </a:r>
+                    </a:p>
+                  </a:txBody>
+                  <a:tcPr marT="25400" marB="25400">
+                    <a:solidFill>
+                      <a:srgbClr val="0F172A"/>
+                    </a:solidFill>
+                  </a:tcPr>
+                </a:tc>
+              </a:tr>
+              <a:tr h="502920">
+                <a:tc>
+                  <a:txBody>
+                    <a:bodyPr/>
+                    <a:lstStyle/>
+                    <a:p>
+                      <a:pPr>
+                        <a:defRPr sz="1300" b="0">
+                          <a:solidFill>
+                            <a:srgbClr val="334155"/>
+                          </a:solidFill>
+                        </a:defRPr>
+                      </a:pPr>
+                      <a:r>
+                        <a:t>Retraining loop (ADR-024)</a:t>
+                      </a:r>
+                    </a:p>
+                  </a:txBody>
+                  <a:tcPr marT="25400" marB="25400">
+                    <a:solidFill>
+                      <a:srgbClr val="FFFFFF"/>
+                    </a:solidFill>
+                  </a:tcPr>
+                </a:tc>
+                <a:tc>
+                  <a:txBody>
+                    <a:bodyPr/>
+                    <a:lstStyle/>
+                    <a:p>
+                      <a:pPr>
+                        <a:defRPr sz="1300" b="0">
+                          <a:solidFill>
+                            <a:srgbClr val="334155"/>
+                          </a:solidFill>
+                        </a:defRPr>
+                      </a:pPr>
+                      <a:r>
+                        <a:t>Upload → PENDING staging → review approve/reject → merge → explicit Retrain → hot-reload, zero downtime</a:t>
+                      </a:r>
+                    </a:p>
+                  </a:txBody>
+                  <a:tcPr marT="25400" marB="25400">
+                    <a:solidFill>
+                      <a:srgbClr val="FFFFFF"/>
+                    </a:solidFill>
+                  </a:tcPr>
+                </a:tc>
+              </a:tr>
+              <a:tr h="502920">
+                <a:tc>
+                  <a:txBody>
+                    <a:bodyPr/>
+                    <a:lstStyle/>
+                    <a:p>
+                      <a:pPr>
+                        <a:defRPr sz="1300" b="0">
+                          <a:solidFill>
+                            <a:srgbClr val="334155"/>
+                          </a:solidFill>
+                        </a:defRPr>
+                      </a:pPr>
+                      <a:r>
+                        <a:t>Deployment</a:t>
+                      </a:r>
+                    </a:p>
+                  </a:txBody>
+                  <a:tcPr marT="25400" marB="25400">
+                    <a:solidFill>
+                      <a:srgbClr val="F4F6FB"/>
+                    </a:solidFill>
+                  </a:tcPr>
+                </a:tc>
+                <a:tc>
+                  <a:txBody>
+                    <a:bodyPr/>
+                    <a:lstStyle/>
+                    <a:p>
+                      <a:pPr>
+                        <a:defRPr sz="1300" b="0">
+                          <a:solidFill>
+                            <a:srgbClr val="334155"/>
+                          </a:solidFill>
+                        </a:defRPr>
+                      </a:pPr>
+                      <a:r>
+                        <a:t>Docker image → Docker Hub → Hugging Face Space (API) + Vercel (frontend, auto-deploy on push)</a:t>
+                      </a:r>
+                    </a:p>
+                  </a:txBody>
+                  <a:tcPr marT="25400" marB="25400">
+                    <a:solidFill>
+                      <a:srgbClr val="F4F6FB"/>
+                    </a:solidFill>
+                  </a:tcPr>
+                </a:tc>
+              </a:tr>
+              <a:tr h="502920">
+                <a:tc>
+                  <a:txBody>
+                    <a:bodyPr/>
+                    <a:lstStyle/>
+                    <a:p>
+                      <a:pPr>
+                        <a:defRPr sz="1300" b="0">
+                          <a:solidFill>
+                            <a:srgbClr val="334155"/>
+                          </a:solidFill>
+                        </a:defRPr>
+                      </a:pPr>
+                      <a:r>
+                        <a:t>Admin security</a:t>
+                      </a:r>
+                    </a:p>
+                  </a:txBody>
+                  <a:tcPr marT="25400" marB="25400">
+                    <a:solidFill>
+                      <a:srgbClr val="FFFFFF"/>
+                    </a:solidFill>
+                  </a:tcPr>
+                </a:tc>
+                <a:tc>
+                  <a:txBody>
+                    <a:bodyPr/>
+                    <a:lstStyle/>
+                    <a:p>
+                      <a:pPr>
+                        <a:defRPr sz="1300" b="0">
+                          <a:solidFill>
+                            <a:srgbClr val="334155"/>
+                          </a:solidFill>
+                        </a:defRPr>
+                      </a:pPr>
+                      <a:r>
+                        <a:t>X-Admin-Token header; 503 if unconfigured, 401 if wrong</a:t>
+                      </a:r>
+                    </a:p>
+                  </a:txBody>
+                  <a:tcPr marT="25400" marB="25400">
+                    <a:solidFill>
+                      <a:srgbClr val="FFFFFF"/>
+                    </a:solidFill>
+                  </a:tcPr>
+                </a:tc>
+              </a:tr>
+            </a:tbl>
+          </a:graphicData>
+        </a:graphic>
+      </p:graphicFrame>
     </p:spTree>
   </p:cSld>
   <p:clrMapOvr>
@@ -6755,7 +8868,6 @@
                 <a:solidFill>
                   <a:srgbClr val="FFFFFF"/>
                 </a:solidFill>
-                <a:latin typeface="Calibri"/>
               </a:rPr>
               <a:t>Feature Engineering</a:t>
             </a:r>
@@ -6790,7 +8902,6 @@
                 <a:solidFill>
                   <a:srgbClr val="C7D2FE"/>
                 </a:solidFill>
-                <a:latin typeface="Calibri"/>
               </a:rPr>
               <a:t>Leakage-safe, spatial + temporal</a:t>
             </a:r>
@@ -6840,155 +8951,697 @@
           </a:p>
         </p:txBody>
       </p:sp>
-      <p:sp>
-        <p:nvSpPr>
-          <p:cNvPr id="6" name="TextBox 5"/>
-          <p:cNvSpPr txBox="1"/>
-          <p:nvPr/>
-        </p:nvSpPr>
-        <p:spPr>
-          <a:xfrm>
-            <a:off x="548640" y="1188720"/>
-            <a:ext cx="5577840" cy="5120640"/>
-          </a:xfrm>
-          <a:prstGeom prst="rect">
-            <a:avLst/>
-          </a:prstGeom>
-          <a:noFill/>
-        </p:spPr>
-        <p:txBody>
-          <a:bodyPr wrap="square">
-            <a:spAutoFit/>
-          </a:bodyPr>
-          <a:lstStyle/>
-          <a:p>
-            <a:pPr>
-              <a:lnSpc>
-                <a:spcPct val="115000"/>
-              </a:lnSpc>
-              <a:spcAft>
-                <a:spcPts val="600"/>
-              </a:spcAft>
-              <a:defRPr sz="1450">
-                <a:solidFill>
-                  <a:srgbClr val="334155"/>
-                </a:solidFill>
-              </a:defRPr>
-            </a:pPr>
-            <a:r>
-              <a:t>• Spatial grid: H3 resolution 9 (~174m hex cells) — 2,534 distinct cells observed in the dataset</a:t>
-            </a:r>
-          </a:p>
-          <a:p>
-            <a:pPr>
-              <a:lnSpc>
-                <a:spcPct val="115000"/>
-              </a:lnSpc>
-              <a:spcAft>
-                <a:spcPts val="600"/>
-              </a:spcAft>
-              <a:defRPr sz="1450">
-                <a:solidFill>
-                  <a:srgbClr val="334155"/>
-                </a:solidFill>
-              </a:defRPr>
-            </a:pPr>
-            <a:r>
-              <a:t>• Density features: hotspot_frequency, violation_density, junction_density, police_station_density (per-cell historical aggregates, computed on an expanding/leave-future-out window)</a:t>
-            </a:r>
-          </a:p>
-          <a:p>
-            <a:pPr>
-              <a:lnSpc>
-                <a:spcPct val="115000"/>
-              </a:lnSpc>
-              <a:spcAft>
-                <a:spcPts val="600"/>
-              </a:spcAft>
-              <a:defRPr sz="1450">
-                <a:solidFill>
-                  <a:srgbClr val="334155"/>
-                </a:solidFill>
-              </a:defRPr>
-            </a:pPr>
-            <a:r>
-              <a:t>• Neighbor-averaged features (ADR-022): ring-1 H3 neighbor average of each density/intensity feature — 6 new columns — added via pandas merge_asof(direction="backward") to stay leakage-safe</a:t>
-            </a:r>
-          </a:p>
-          <a:p>
-            <a:pPr>
-              <a:lnSpc>
-                <a:spcPct val="115000"/>
-              </a:lnSpc>
-              <a:spcAft>
-                <a:spcPts val="600"/>
-              </a:spcAft>
-              <a:defRPr sz="1450">
-                <a:solidFill>
-                  <a:srgbClr val="334155"/>
-                </a:solidFill>
-              </a:defRPr>
-            </a:pPr>
-            <a:r>
-              <a:t>• Temporal: hour, weekday, is_weekend, hour_sin/cos (cyclical encoding), is_peak_hour</a:t>
-            </a:r>
-          </a:p>
-          <a:p>
-            <a:pPr>
-              <a:lnSpc>
-                <a:spcPct val="115000"/>
-              </a:lnSpc>
-              <a:spcAft>
-                <a:spcPts val="600"/>
-              </a:spcAft>
-              <a:defRPr sz="1450">
-                <a:solidFill>
-                  <a:srgbClr val="334155"/>
-                </a:solidFill>
-              </a:defRPr>
-            </a:pPr>
-            <a:r>
-              <a:t>• Rolling counts: violations in the last 15m / 30m / 60m, same_hour_previous_day, rolling_hotspot_intensity</a:t>
-            </a:r>
-          </a:p>
-          <a:p>
-            <a:pPr>
-              <a:lnSpc>
-                <a:spcPct val="115000"/>
-              </a:lnSpc>
-              <a:spcAft>
-                <a:spcPts val="600"/>
-              </a:spcAft>
-              <a:defRPr sz="1450">
-                <a:solidFill>
-                  <a:srgbClr val="334155"/>
-                </a:solidFill>
-              </a:defRPr>
-            </a:pPr>
-            <a:r>
-              <a:t>• Historical risk priors: junction_historical_risk, offence_historical_risk, vehicle_type_historical_risk, center_code_historical_risk</a:t>
-            </a:r>
-          </a:p>
-          <a:p>
-            <a:pPr>
-              <a:lnSpc>
-                <a:spcPct val="115000"/>
-              </a:lnSpc>
-              <a:spcAft>
-                <a:spcPts val="600"/>
-              </a:spcAft>
-              <a:defRPr sz="1450">
-                <a:solidFill>
-                  <a:srgbClr val="334155"/>
-                </a:solidFill>
-              </a:defRPr>
-            </a:pPr>
-            <a:r>
-              <a:t>• Data-quality flags (kept, not dropped): is_outlier_coordinate, is_duplicate_vehicle_event</a:t>
-            </a:r>
-          </a:p>
-        </p:txBody>
-      </p:sp>
+      <p:graphicFrame>
+        <p:nvGraphicFramePr>
+          <p:cNvPr id="6" name="Table 5"/>
+          <p:cNvGraphicFramePr>
+            <a:graphicFrameLocks noGrp="1"/>
+          </p:cNvGraphicFramePr>
+          <p:nvPr/>
+        </p:nvGraphicFramePr>
+        <p:xfrm>
+          <a:off x="548640" y="1188720"/>
+          <a:ext cx="6583680" cy="4937760"/>
+        </p:xfrm>
+        <a:graphic>
+          <a:graphicData uri="http://schemas.openxmlformats.org/drawingml/2006/table">
+            <a:tbl>
+              <a:tblPr firstRow="1" bandRow="1">
+                <a:tableStyleId>{5C22544A-7EE6-4342-B048-85BDC9FD1C3A}</a:tableStyleId>
+              </a:tblPr>
+              <a:tblGrid>
+                <a:gridCol w="1920240"/>
+                <a:gridCol w="4023360"/>
+                <a:gridCol w="640080"/>
+              </a:tblGrid>
+              <a:tr h="617220">
+                <a:tc>
+                  <a:txBody>
+                    <a:bodyPr/>
+                    <a:lstStyle/>
+                    <a:p>
+                      <a:pPr>
+                        <a:defRPr sz="1150" b="1">
+                          <a:solidFill>
+                            <a:srgbClr val="FFFFFF"/>
+                          </a:solidFill>
+                        </a:defRPr>
+                      </a:pPr>
+                      <a:r>
+                        <a:t>Category</a:t>
+                      </a:r>
+                    </a:p>
+                  </a:txBody>
+                  <a:tcPr marT="25400" marB="25400">
+                    <a:solidFill>
+                      <a:srgbClr val="0F172A"/>
+                    </a:solidFill>
+                  </a:tcPr>
+                </a:tc>
+                <a:tc>
+                  <a:txBody>
+                    <a:bodyPr/>
+                    <a:lstStyle/>
+                    <a:p>
+                      <a:pPr>
+                        <a:defRPr sz="1150" b="1">
+                          <a:solidFill>
+                            <a:srgbClr val="FFFFFF"/>
+                          </a:solidFill>
+                        </a:defRPr>
+                      </a:pPr>
+                      <a:r>
+                        <a:t>Examples</a:t>
+                      </a:r>
+                    </a:p>
+                  </a:txBody>
+                  <a:tcPr marT="25400" marB="25400">
+                    <a:solidFill>
+                      <a:srgbClr val="0F172A"/>
+                    </a:solidFill>
+                  </a:tcPr>
+                </a:tc>
+                <a:tc>
+                  <a:txBody>
+                    <a:bodyPr/>
+                    <a:lstStyle/>
+                    <a:p>
+                      <a:pPr>
+                        <a:defRPr sz="1150" b="1">
+                          <a:solidFill>
+                            <a:srgbClr val="FFFFFF"/>
+                          </a:solidFill>
+                        </a:defRPr>
+                      </a:pPr>
+                      <a:r>
+                        <a:t>#</a:t>
+                      </a:r>
+                    </a:p>
+                  </a:txBody>
+                  <a:tcPr marT="25400" marB="25400">
+                    <a:solidFill>
+                      <a:srgbClr val="0F172A"/>
+                    </a:solidFill>
+                  </a:tcPr>
+                </a:tc>
+              </a:tr>
+              <a:tr h="617220">
+                <a:tc>
+                  <a:txBody>
+                    <a:bodyPr/>
+                    <a:lstStyle/>
+                    <a:p>
+                      <a:pPr>
+                        <a:defRPr sz="1150" b="0">
+                          <a:solidFill>
+                            <a:srgbClr val="334155"/>
+                          </a:solidFill>
+                        </a:defRPr>
+                      </a:pPr>
+                      <a:r>
+                        <a:t>Spatial density</a:t>
+                      </a:r>
+                    </a:p>
+                  </a:txBody>
+                  <a:tcPr marT="25400" marB="25400">
+                    <a:solidFill>
+                      <a:srgbClr val="FFFFFF"/>
+                    </a:solidFill>
+                  </a:tcPr>
+                </a:tc>
+                <a:tc>
+                  <a:txBody>
+                    <a:bodyPr/>
+                    <a:lstStyle/>
+                    <a:p>
+                      <a:pPr>
+                        <a:defRPr sz="1150" b="0">
+                          <a:solidFill>
+                            <a:srgbClr val="334155"/>
+                          </a:solidFill>
+                        </a:defRPr>
+                      </a:pPr>
+                      <a:r>
+                        <a:t>hotspot_frequency, violation_density,</a:t>
+                      </a:r>
+                    </a:p>
+                    <a:p>
+                      <a:pPr>
+                        <a:defRPr sz="1150" b="0">
+                          <a:solidFill>
+                            <a:srgbClr val="334155"/>
+                          </a:solidFill>
+                        </a:defRPr>
+                      </a:pPr>
+                      <a:r>
+                        <a:t>junction_density, police_station_density</a:t>
+                      </a:r>
+                    </a:p>
+                  </a:txBody>
+                  <a:tcPr marT="25400" marB="25400">
+                    <a:solidFill>
+                      <a:srgbClr val="FFFFFF"/>
+                    </a:solidFill>
+                  </a:tcPr>
+                </a:tc>
+                <a:tc>
+                  <a:txBody>
+                    <a:bodyPr/>
+                    <a:lstStyle/>
+                    <a:p>
+                      <a:pPr>
+                        <a:defRPr sz="1150" b="0">
+                          <a:solidFill>
+                            <a:srgbClr val="334155"/>
+                          </a:solidFill>
+                        </a:defRPr>
+                      </a:pPr>
+                      <a:r>
+                        <a:t>4</a:t>
+                      </a:r>
+                    </a:p>
+                  </a:txBody>
+                  <a:tcPr marT="25400" marB="25400">
+                    <a:solidFill>
+                      <a:srgbClr val="FFFFFF"/>
+                    </a:solidFill>
+                  </a:tcPr>
+                </a:tc>
+              </a:tr>
+              <a:tr h="617220">
+                <a:tc>
+                  <a:txBody>
+                    <a:bodyPr/>
+                    <a:lstStyle/>
+                    <a:p>
+                      <a:pPr>
+                        <a:defRPr sz="1150" b="0">
+                          <a:solidFill>
+                            <a:srgbClr val="334155"/>
+                          </a:solidFill>
+                        </a:defRPr>
+                      </a:pPr>
+                      <a:r>
+                        <a:t>Neighbor-averaged</a:t>
+                      </a:r>
+                    </a:p>
+                    <a:p>
+                      <a:pPr>
+                        <a:defRPr sz="1150" b="0">
+                          <a:solidFill>
+                            <a:srgbClr val="334155"/>
+                          </a:solidFill>
+                        </a:defRPr>
+                      </a:pPr>
+                      <a:r>
+                        <a:t>(ADR-022)</a:t>
+                      </a:r>
+                    </a:p>
+                  </a:txBody>
+                  <a:tcPr marT="25400" marB="25400">
+                    <a:solidFill>
+                      <a:srgbClr val="F4F6FB"/>
+                    </a:solidFill>
+                  </a:tcPr>
+                </a:tc>
+                <a:tc>
+                  <a:txBody>
+                    <a:bodyPr/>
+                    <a:lstStyle/>
+                    <a:p>
+                      <a:pPr>
+                        <a:defRPr sz="1150" b="0">
+                          <a:solidFill>
+                            <a:srgbClr val="334155"/>
+                          </a:solidFill>
+                        </a:defRPr>
+                      </a:pPr>
+                      <a:r>
+                        <a:t>ring-1 H3 neighbor avg of each</a:t>
+                      </a:r>
+                    </a:p>
+                    <a:p>
+                      <a:pPr>
+                        <a:defRPr sz="1150" b="0">
+                          <a:solidFill>
+                            <a:srgbClr val="334155"/>
+                          </a:solidFill>
+                        </a:defRPr>
+                      </a:pPr>
+                      <a:r>
+                        <a:t>density/intensity feature</a:t>
+                      </a:r>
+                    </a:p>
+                  </a:txBody>
+                  <a:tcPr marT="25400" marB="25400">
+                    <a:solidFill>
+                      <a:srgbClr val="F4F6FB"/>
+                    </a:solidFill>
+                  </a:tcPr>
+                </a:tc>
+                <a:tc>
+                  <a:txBody>
+                    <a:bodyPr/>
+                    <a:lstStyle/>
+                    <a:p>
+                      <a:pPr>
+                        <a:defRPr sz="1150" b="0">
+                          <a:solidFill>
+                            <a:srgbClr val="334155"/>
+                          </a:solidFill>
+                        </a:defRPr>
+                      </a:pPr>
+                      <a:r>
+                        <a:t>6</a:t>
+                      </a:r>
+                    </a:p>
+                  </a:txBody>
+                  <a:tcPr marT="25400" marB="25400">
+                    <a:solidFill>
+                      <a:srgbClr val="F4F6FB"/>
+                    </a:solidFill>
+                  </a:tcPr>
+                </a:tc>
+              </a:tr>
+              <a:tr h="617220">
+                <a:tc>
+                  <a:txBody>
+                    <a:bodyPr/>
+                    <a:lstStyle/>
+                    <a:p>
+                      <a:pPr>
+                        <a:defRPr sz="1150" b="0">
+                          <a:solidFill>
+                            <a:srgbClr val="334155"/>
+                          </a:solidFill>
+                        </a:defRPr>
+                      </a:pPr>
+                      <a:r>
+                        <a:t>Temporal</a:t>
+                      </a:r>
+                    </a:p>
+                  </a:txBody>
+                  <a:tcPr marT="25400" marB="25400">
+                    <a:solidFill>
+                      <a:srgbClr val="FFFFFF"/>
+                    </a:solidFill>
+                  </a:tcPr>
+                </a:tc>
+                <a:tc>
+                  <a:txBody>
+                    <a:bodyPr/>
+                    <a:lstStyle/>
+                    <a:p>
+                      <a:pPr>
+                        <a:defRPr sz="1150" b="0">
+                          <a:solidFill>
+                            <a:srgbClr val="334155"/>
+                          </a:solidFill>
+                        </a:defRPr>
+                      </a:pPr>
+                      <a:r>
+                        <a:t>hour, weekday, is_weekend,</a:t>
+                      </a:r>
+                    </a:p>
+                    <a:p>
+                      <a:pPr>
+                        <a:defRPr sz="1150" b="0">
+                          <a:solidFill>
+                            <a:srgbClr val="334155"/>
+                          </a:solidFill>
+                        </a:defRPr>
+                      </a:pPr>
+                      <a:r>
+                        <a:t>hour_sin/cos, is_peak_hour</a:t>
+                      </a:r>
+                    </a:p>
+                  </a:txBody>
+                  <a:tcPr marT="25400" marB="25400">
+                    <a:solidFill>
+                      <a:srgbClr val="FFFFFF"/>
+                    </a:solidFill>
+                  </a:tcPr>
+                </a:tc>
+                <a:tc>
+                  <a:txBody>
+                    <a:bodyPr/>
+                    <a:lstStyle/>
+                    <a:p>
+                      <a:pPr>
+                        <a:defRPr sz="1150" b="0">
+                          <a:solidFill>
+                            <a:srgbClr val="334155"/>
+                          </a:solidFill>
+                        </a:defRPr>
+                      </a:pPr>
+                      <a:r>
+                        <a:t>6</a:t>
+                      </a:r>
+                    </a:p>
+                  </a:txBody>
+                  <a:tcPr marT="25400" marB="25400">
+                    <a:solidFill>
+                      <a:srgbClr val="FFFFFF"/>
+                    </a:solidFill>
+                  </a:tcPr>
+                </a:tc>
+              </a:tr>
+              <a:tr h="617220">
+                <a:tc>
+                  <a:txBody>
+                    <a:bodyPr/>
+                    <a:lstStyle/>
+                    <a:p>
+                      <a:pPr>
+                        <a:defRPr sz="1150" b="0">
+                          <a:solidFill>
+                            <a:srgbClr val="334155"/>
+                          </a:solidFill>
+                        </a:defRPr>
+                      </a:pPr>
+                      <a:r>
+                        <a:t>Rolling counts</a:t>
+                      </a:r>
+                    </a:p>
+                  </a:txBody>
+                  <a:tcPr marT="25400" marB="25400">
+                    <a:solidFill>
+                      <a:srgbClr val="F4F6FB"/>
+                    </a:solidFill>
+                  </a:tcPr>
+                </a:tc>
+                <a:tc>
+                  <a:txBody>
+                    <a:bodyPr/>
+                    <a:lstStyle/>
+                    <a:p>
+                      <a:pPr>
+                        <a:defRPr sz="1150" b="0">
+                          <a:solidFill>
+                            <a:srgbClr val="334155"/>
+                          </a:solidFill>
+                        </a:defRPr>
+                      </a:pPr>
+                      <a:r>
+                        <a:t>violations_last_15/30/60m,</a:t>
+                      </a:r>
+                    </a:p>
+                    <a:p>
+                      <a:pPr>
+                        <a:defRPr sz="1150" b="0">
+                          <a:solidFill>
+                            <a:srgbClr val="334155"/>
+                          </a:solidFill>
+                        </a:defRPr>
+                      </a:pPr>
+                      <a:r>
+                        <a:t>same_hour_previous_day, rolling_intensity</a:t>
+                      </a:r>
+                    </a:p>
+                  </a:txBody>
+                  <a:tcPr marT="25400" marB="25400">
+                    <a:solidFill>
+                      <a:srgbClr val="F4F6FB"/>
+                    </a:solidFill>
+                  </a:tcPr>
+                </a:tc>
+                <a:tc>
+                  <a:txBody>
+                    <a:bodyPr/>
+                    <a:lstStyle/>
+                    <a:p>
+                      <a:pPr>
+                        <a:defRPr sz="1150" b="0">
+                          <a:solidFill>
+                            <a:srgbClr val="334155"/>
+                          </a:solidFill>
+                        </a:defRPr>
+                      </a:pPr>
+                      <a:r>
+                        <a:t>5</a:t>
+                      </a:r>
+                    </a:p>
+                  </a:txBody>
+                  <a:tcPr marT="25400" marB="25400">
+                    <a:solidFill>
+                      <a:srgbClr val="F4F6FB"/>
+                    </a:solidFill>
+                  </a:tcPr>
+                </a:tc>
+              </a:tr>
+              <a:tr h="617220">
+                <a:tc>
+                  <a:txBody>
+                    <a:bodyPr/>
+                    <a:lstStyle/>
+                    <a:p>
+                      <a:pPr>
+                        <a:defRPr sz="1150" b="0">
+                          <a:solidFill>
+                            <a:srgbClr val="334155"/>
+                          </a:solidFill>
+                        </a:defRPr>
+                      </a:pPr>
+                      <a:r>
+                        <a:t>Historical risk priors</a:t>
+                      </a:r>
+                    </a:p>
+                  </a:txBody>
+                  <a:tcPr marT="25400" marB="25400">
+                    <a:solidFill>
+                      <a:srgbClr val="FFFFFF"/>
+                    </a:solidFill>
+                  </a:tcPr>
+                </a:tc>
+                <a:tc>
+                  <a:txBody>
+                    <a:bodyPr/>
+                    <a:lstStyle/>
+                    <a:p>
+                      <a:pPr>
+                        <a:defRPr sz="1150" b="0">
+                          <a:solidFill>
+                            <a:srgbClr val="334155"/>
+                          </a:solidFill>
+                        </a:defRPr>
+                      </a:pPr>
+                      <a:r>
+                        <a:t>junction/offence/vehicle_type/</a:t>
+                      </a:r>
+                    </a:p>
+                    <a:p>
+                      <a:pPr>
+                        <a:defRPr sz="1150" b="0">
+                          <a:solidFill>
+                            <a:srgbClr val="334155"/>
+                          </a:solidFill>
+                        </a:defRPr>
+                      </a:pPr>
+                      <a:r>
+                        <a:t>center_code_historical_risk</a:t>
+                      </a:r>
+                    </a:p>
+                  </a:txBody>
+                  <a:tcPr marT="25400" marB="25400">
+                    <a:solidFill>
+                      <a:srgbClr val="FFFFFF"/>
+                    </a:solidFill>
+                  </a:tcPr>
+                </a:tc>
+                <a:tc>
+                  <a:txBody>
+                    <a:bodyPr/>
+                    <a:lstStyle/>
+                    <a:p>
+                      <a:pPr>
+                        <a:defRPr sz="1150" b="0">
+                          <a:solidFill>
+                            <a:srgbClr val="334155"/>
+                          </a:solidFill>
+                        </a:defRPr>
+                      </a:pPr>
+                      <a:r>
+                        <a:t>4</a:t>
+                      </a:r>
+                    </a:p>
+                  </a:txBody>
+                  <a:tcPr marT="25400" marB="25400">
+                    <a:solidFill>
+                      <a:srgbClr val="FFFFFF"/>
+                    </a:solidFill>
+                  </a:tcPr>
+                </a:tc>
+              </a:tr>
+              <a:tr h="617220">
+                <a:tc>
+                  <a:txBody>
+                    <a:bodyPr/>
+                    <a:lstStyle/>
+                    <a:p>
+                      <a:pPr>
+                        <a:defRPr sz="1150" b="0">
+                          <a:solidFill>
+                            <a:srgbClr val="334155"/>
+                          </a:solidFill>
+                        </a:defRPr>
+                      </a:pPr>
+                      <a:r>
+                        <a:t>Data-quality flags</a:t>
+                      </a:r>
+                    </a:p>
+                  </a:txBody>
+                  <a:tcPr marT="25400" marB="25400">
+                    <a:solidFill>
+                      <a:srgbClr val="F4F6FB"/>
+                    </a:solidFill>
+                  </a:tcPr>
+                </a:tc>
+                <a:tc>
+                  <a:txBody>
+                    <a:bodyPr/>
+                    <a:lstStyle/>
+                    <a:p>
+                      <a:pPr>
+                        <a:defRPr sz="1150" b="0">
+                          <a:solidFill>
+                            <a:srgbClr val="334155"/>
+                          </a:solidFill>
+                        </a:defRPr>
+                      </a:pPr>
+                      <a:r>
+                        <a:t>is_outlier_coordinate,</a:t>
+                      </a:r>
+                    </a:p>
+                    <a:p>
+                      <a:pPr>
+                        <a:defRPr sz="1150" b="0">
+                          <a:solidFill>
+                            <a:srgbClr val="334155"/>
+                          </a:solidFill>
+                        </a:defRPr>
+                      </a:pPr>
+                      <a:r>
+                        <a:t>is_duplicate_vehicle_event</a:t>
+                      </a:r>
+                    </a:p>
+                  </a:txBody>
+                  <a:tcPr marT="25400" marB="25400">
+                    <a:solidFill>
+                      <a:srgbClr val="F4F6FB"/>
+                    </a:solidFill>
+                  </a:tcPr>
+                </a:tc>
+                <a:tc>
+                  <a:txBody>
+                    <a:bodyPr/>
+                    <a:lstStyle/>
+                    <a:p>
+                      <a:pPr>
+                        <a:defRPr sz="1150" b="0">
+                          <a:solidFill>
+                            <a:srgbClr val="334155"/>
+                          </a:solidFill>
+                        </a:defRPr>
+                      </a:pPr>
+                      <a:r>
+                        <a:t>2</a:t>
+                      </a:r>
+                    </a:p>
+                  </a:txBody>
+                  <a:tcPr marT="25400" marB="25400">
+                    <a:solidFill>
+                      <a:srgbClr val="F4F6FB"/>
+                    </a:solidFill>
+                  </a:tcPr>
+                </a:tc>
+              </a:tr>
+              <a:tr h="617220">
+                <a:tc>
+                  <a:txBody>
+                    <a:bodyPr/>
+                    <a:lstStyle/>
+                    <a:p>
+                      <a:pPr>
+                        <a:defRPr sz="1150" b="0">
+                          <a:solidFill>
+                            <a:srgbClr val="334155"/>
+                          </a:solidFill>
+                        </a:defRPr>
+                      </a:pPr>
+                      <a:r>
+                        <a:t>Categorical</a:t>
+                      </a:r>
+                    </a:p>
+                  </a:txBody>
+                  <a:tcPr marT="25400" marB="25400">
+                    <a:solidFill>
+                      <a:srgbClr val="FFFFFF"/>
+                    </a:solidFill>
+                  </a:tcPr>
+                </a:tc>
+                <a:tc>
+                  <a:txBody>
+                    <a:bodyPr/>
+                    <a:lstStyle/>
+                    <a:p>
+                      <a:pPr>
+                        <a:defRPr sz="1150" b="0">
+                          <a:solidFill>
+                            <a:srgbClr val="334155"/>
+                          </a:solidFill>
+                        </a:defRPr>
+                      </a:pPr>
+                      <a:r>
+                        <a:t>junction_name, police_station, center_code,</a:t>
+                      </a:r>
+                    </a:p>
+                    <a:p>
+                      <a:pPr>
+                        <a:defRPr sz="1150" b="0">
+                          <a:solidFill>
+                            <a:srgbClr val="334155"/>
+                          </a:solidFill>
+                        </a:defRPr>
+                      </a:pPr>
+                      <a:r>
+                        <a:t>vehicle_type, offence_code, violation_type</a:t>
+                      </a:r>
+                    </a:p>
+                  </a:txBody>
+                  <a:tcPr marT="25400" marB="25400">
+                    <a:solidFill>
+                      <a:srgbClr val="FFFFFF"/>
+                    </a:solidFill>
+                  </a:tcPr>
+                </a:tc>
+                <a:tc>
+                  <a:txBody>
+                    <a:bodyPr/>
+                    <a:lstStyle/>
+                    <a:p>
+                      <a:pPr>
+                        <a:defRPr sz="1150" b="0">
+                          <a:solidFill>
+                            <a:srgbClr val="334155"/>
+                          </a:solidFill>
+                        </a:defRPr>
+                      </a:pPr>
+                      <a:r>
+                        <a:t>6</a:t>
+                      </a:r>
+                    </a:p>
+                  </a:txBody>
+                  <a:tcPr marT="25400" marB="25400">
+                    <a:solidFill>
+                      <a:srgbClr val="FFFFFF"/>
+                    </a:solidFill>
+                  </a:tcPr>
+                </a:tc>
+              </a:tr>
+            </a:tbl>
+          </a:graphicData>
+        </a:graphic>
+      </p:graphicFrame>
       <p:sp>
         <p:nvSpPr>
           <p:cNvPr id="7" name="Rectangle 6"/>
@@ -6997,8 +9650,8 @@
         </p:nvSpPr>
         <p:spPr>
           <a:xfrm>
-            <a:off x="6400800" y="1188720"/>
-            <a:ext cx="5212080" cy="5120640"/>
+            <a:off x="7315200" y="1188720"/>
+            <a:ext cx="4343400" cy="4937760"/>
           </a:xfrm>
           <a:prstGeom prst="rect">
             <a:avLst/>
@@ -7040,8 +9693,8 @@
         </p:nvSpPr>
         <p:spPr>
           <a:xfrm>
-            <a:off x="6675120" y="1371600"/>
-            <a:ext cx="4754880" cy="365760"/>
+            <a:off x="7498079" y="1325880"/>
+            <a:ext cx="4023360" cy="365760"/>
           </a:xfrm>
           <a:prstGeom prst="rect">
             <a:avLst/>
@@ -7060,9 +9713,8 @@
                 <a:solidFill>
                   <a:srgbClr val="0F172A"/>
                 </a:solidFill>
-                <a:latin typeface="Calibri"/>
               </a:rPr>
-              <a:t>Leakage-safety discipline</a:t>
+              <a:t>Leakage-safety rules</a:t>
             </a:r>
           </a:p>
         </p:txBody>
@@ -7075,8 +9727,8 @@
         </p:nvSpPr>
         <p:spPr>
           <a:xfrm>
-            <a:off x="6675120" y="1783080"/>
-            <a:ext cx="4754880" cy="4389120"/>
+            <a:off x="7498079" y="1737360"/>
+            <a:ext cx="4023360" cy="2560320"/>
           </a:xfrm>
           <a:prstGeom prst="rect">
             <a:avLst/>
@@ -7094,16 +9746,20 @@
                 <a:spcPct val="115000"/>
               </a:lnSpc>
               <a:spcAft>
-                <a:spcPts val="600"/>
+                <a:spcPts val="500"/>
               </a:spcAft>
-              <a:defRPr sz="1350">
+              <a:defRPr sz="1250">
                 <a:solidFill>
                   <a:srgbClr val="334155"/>
                 </a:solidFill>
               </a:defRPr>
             </a:pPr>
             <a:r>
-              <a:t>• Every rolling/historical feature uses an EXPANDING window computed strictly before the current event's timestamp — never the full dataset</a:t>
+              <a:t>• Every rolling feature uses an expanding,</a:t>
+            </a:r>
+            <a:br/>
+            <a:r>
+              <a:t>strictly-past-only window</a:t>
             </a:r>
           </a:p>
           <a:p>
@@ -7112,16 +9768,20 @@
                 <a:spcPct val="115000"/>
               </a:lnSpc>
               <a:spcAft>
-                <a:spcPts val="600"/>
+                <a:spcPts val="500"/>
               </a:spcAft>
-              <a:defRPr sz="1350">
+              <a:defRPr sz="1250">
                 <a:solidFill>
                   <a:srgbClr val="334155"/>
                 </a:solidFill>
               </a:defRPr>
             </a:pPr>
             <a:r>
-              <a:t>• pandas merge_asof(direction="backward") used for every spatial/temporal join, guaranteeing a row only ever sees data from earlier in time</a:t>
+              <a:t>• merge_asof(direction="backward") for</a:t>
+            </a:r>
+            <a:br/>
+            <a:r>
+              <a:t>every spatial/temporal join</a:t>
             </a:r>
           </a:p>
           <a:p>
@@ -7130,16 +9790,20 @@
                 <a:spcPct val="115000"/>
               </a:lnSpc>
               <a:spcAft>
-                <a:spcPts val="600"/>
+                <a:spcPts val="500"/>
               </a:spcAft>
-              <a:defRPr sz="1350">
+              <a:defRPr sz="1250">
                 <a:solidFill>
                   <a:srgbClr val="334155"/>
                 </a:solidFill>
               </a:defRPr>
             </a:pPr>
             <a:r>
-              <a:t>• ADR-022 (Phase 8) deliberately UNFROZE the Phase 4 feature lock and the decision to keep h3_cell as a raw categorical input, once retraining became possible</a:t>
+              <a:t>• h3_cell/geohash dropped as direct model</a:t>
+            </a:r>
+            <a:br/>
+            <a:r>
+              <a:t>inputs — kept only for serving lookups</a:t>
             </a:r>
           </a:p>
           <a:p>
@@ -7148,16 +9812,24 @@
                 <a:spcPct val="115000"/>
               </a:lnSpc>
               <a:spcAft>
-                <a:spcPts val="600"/>
+                <a:spcPts val="500"/>
               </a:spcAft>
-              <a:defRPr sz="1350">
+              <a:defRPr sz="1250">
                 <a:solidFill>
                   <a:srgbClr val="334155"/>
                 </a:solidFill>
               </a:defRPr>
             </a:pPr>
             <a:r>
-              <a:t>• h3_cell / geohash dropped as direct model inputs (kept only for serving-time cell lookups) — SHAP audit + spatial holdout both flagged raw cell identity as a memorization risk</a:t>
+              <a:t>• Phase 4 feature lock deliberately</a:t>
+            </a:r>
+            <a:br/>
+            <a:r>
+              <a:t>un-frozen once retraining became</a:t>
+            </a:r>
+            <a:br/>
+            <a:r>
+              <a:t>possible (ADR-022)</a:t>
             </a:r>
           </a:p>
         </p:txBody>
@@ -7251,7 +9923,6 @@
                 <a:solidFill>
                   <a:srgbClr val="FFFFFF"/>
                 </a:solidFill>
-                <a:latin typeface="Calibri"/>
               </a:rPr>
               <a:t>Modeling Approach</a:t>
             </a:r>
@@ -7286,7 +9957,6 @@
                 <a:solidFill>
                   <a:srgbClr val="C7D2FE"/>
                 </a:solidFill>
-                <a:latin typeface="Calibri"/>
               </a:rPr>
               <a:t>3 gradient-boosted models, 2 tasks</a:t>
             </a:r>
@@ -7336,58 +10006,17 @@
           </a:p>
         </p:txBody>
       </p:sp>
-      <p:sp>
-        <p:nvSpPr>
-          <p:cNvPr id="6" name="TextBox 5"/>
-          <p:cNvSpPr txBox="1"/>
-          <p:nvPr/>
-        </p:nvSpPr>
-        <p:spPr>
-          <a:xfrm>
-            <a:off x="548640" y="1188720"/>
-            <a:ext cx="11064240" cy="822960"/>
-          </a:xfrm>
-          <a:prstGeom prst="rect">
-            <a:avLst/>
-          </a:prstGeom>
-          <a:noFill/>
-        </p:spPr>
-        <p:txBody>
-          <a:bodyPr wrap="square">
-            <a:spAutoFit/>
-          </a:bodyPr>
-          <a:lstStyle/>
-          <a:p>
-            <a:pPr>
-              <a:lnSpc>
-                <a:spcPct val="115000"/>
-              </a:lnSpc>
-              <a:spcAft>
-                <a:spcPts val="600"/>
-              </a:spcAft>
-              <a:defRPr sz="1500">
-                <a:solidFill>
-                  <a:srgbClr val="334155"/>
-                </a:solidFill>
-              </a:defRPr>
-            </a:pPr>
-            <a:r>
-              <a:t>• Two prediction tasks per H3 cell: (1) hotspot_probability — binary classifier, will this cell exceed a violation threshold in the next 60 minutes; (2) predicted_count — regressor, how many violations are expected in that window</a:t>
-            </a:r>
-          </a:p>
-        </p:txBody>
-      </p:sp>
       <p:graphicFrame>
         <p:nvGraphicFramePr>
-          <p:cNvPr id="7" name="Table 6"/>
+          <p:cNvPr id="6" name="Table 5"/>
           <p:cNvGraphicFramePr>
             <a:graphicFrameLocks noGrp="1"/>
           </p:cNvGraphicFramePr>
           <p:nvPr/>
         </p:nvGraphicFramePr>
         <p:xfrm>
-          <a:off x="548640" y="2148840"/>
-          <a:ext cx="7040880" cy="1737360"/>
+          <a:off x="457200" y="1143000"/>
+          <a:ext cx="5943600" cy="1554480"/>
         </p:xfrm>
         <a:graphic>
           <a:graphicData uri="http://schemas.openxmlformats.org/drawingml/2006/table">
@@ -7396,14 +10025,13 @@
                 <a:tableStyleId>{5C22544A-7EE6-4342-B048-85BDC9FD1C3A}</a:tableStyleId>
               </a:tblPr>
               <a:tblGrid>
-                <a:gridCol w="2011680"/>
-                <a:gridCol w="1097280"/>
-                <a:gridCol w="1097280"/>
-                <a:gridCol w="1005840"/>
-                <a:gridCol w="914400"/>
-                <a:gridCol w="914400"/>
+                <a:gridCol w="1737360"/>
+                <a:gridCol w="1051560"/>
+                <a:gridCol w="1051560"/>
+                <a:gridCol w="1051560"/>
+                <a:gridCol w="1051560"/>
               </a:tblGrid>
-              <a:tr h="434340">
+              <a:tr h="388620">
                 <a:tc>
                   <a:txBody>
                     <a:bodyPr/>
@@ -7421,7 +10049,7 @@
                       </a:r>
                     </a:p>
                   </a:txBody>
-                  <a:tcPr>
+                  <a:tcPr marT="25400" marB="25400">
                     <a:solidFill>
                       <a:srgbClr val="0F172A"/>
                     </a:solidFill>
@@ -7440,11 +10068,11 @@
                         </a:defRPr>
                       </a:pPr>
                       <a:r>
-                        <a:t>Val PR-AUC</a:t>
-                      </a:r>
-                    </a:p>
-                  </a:txBody>
-                  <a:tcPr>
+                        <a:t>PR-AUC</a:t>
+                      </a:r>
+                    </a:p>
+                  </a:txBody>
+                  <a:tcPr marT="25400" marB="25400">
                     <a:solidFill>
                       <a:srgbClr val="0F172A"/>
                     </a:solidFill>
@@ -7467,7 +10095,7 @@
                       </a:r>
                     </a:p>
                   </a:txBody>
-                  <a:tcPr>
+                  <a:tcPr marT="25400" marB="25400">
                     <a:solidFill>
                       <a:srgbClr val="0F172A"/>
                     </a:solidFill>
@@ -7490,7 +10118,7 @@
                       </a:r>
                     </a:p>
                   </a:txBody>
-                  <a:tcPr>
+                  <a:tcPr marT="25400" marB="25400">
                     <a:solidFill>
                       <a:srgbClr val="0F172A"/>
                     </a:solidFill>
@@ -7513,37 +10141,14 @@
                       </a:r>
                     </a:p>
                   </a:txBody>
-                  <a:tcPr>
+                  <a:tcPr marT="25400" marB="25400">
                     <a:solidFill>
                       <a:srgbClr val="0F172A"/>
                     </a:solidFill>
                   </a:tcPr>
                 </a:tc>
-                <a:tc>
-                  <a:txBody>
-                    <a:bodyPr/>
-                    <a:lstStyle/>
-                    <a:p>
-                      <a:pPr>
-                        <a:defRPr sz="1200" b="1">
-                          <a:solidFill>
-                            <a:srgbClr val="FFFFFF"/>
-                          </a:solidFill>
-                        </a:defRPr>
-                      </a:pPr>
-                      <a:r>
-                        <a:t>Brier</a:t>
-                      </a:r>
-                    </a:p>
-                  </a:txBody>
-                  <a:tcPr>
-                    <a:solidFill>
-                      <a:srgbClr val="0F172A"/>
-                    </a:solidFill>
-                  </a:tcPr>
-                </a:tc>
               </a:tr>
-              <a:tr h="434340">
+              <a:tr h="388620">
                 <a:tc>
                   <a:txBody>
                     <a:bodyPr/>
@@ -7561,7 +10166,7 @@
                       </a:r>
                     </a:p>
                   </a:txBody>
-                  <a:tcPr>
+                  <a:tcPr marT="25400" marB="25400">
                     <a:solidFill>
                       <a:srgbClr val="FFFFFF"/>
                     </a:solidFill>
@@ -7584,7 +10189,7 @@
                       </a:r>
                     </a:p>
                   </a:txBody>
-                  <a:tcPr>
+                  <a:tcPr marT="25400" marB="25400">
                     <a:solidFill>
                       <a:srgbClr val="FFFFFF"/>
                     </a:solidFill>
@@ -7607,7 +10212,7 @@
                       </a:r>
                     </a:p>
                   </a:txBody>
-                  <a:tcPr>
+                  <a:tcPr marT="25400" marB="25400">
                     <a:solidFill>
                       <a:srgbClr val="FFFFFF"/>
                     </a:solidFill>
@@ -7630,7 +10235,7 @@
                       </a:r>
                     </a:p>
                   </a:txBody>
-                  <a:tcPr>
+                  <a:tcPr marT="25400" marB="25400">
                     <a:solidFill>
                       <a:srgbClr val="FFFFFF"/>
                     </a:solidFill>
@@ -7653,12 +10258,14 @@
                       </a:r>
                     </a:p>
                   </a:txBody>
-                  <a:tcPr>
+                  <a:tcPr marT="25400" marB="25400">
                     <a:solidFill>
                       <a:srgbClr val="FFFFFF"/>
                     </a:solidFill>
                   </a:tcPr>
                 </a:tc>
+              </a:tr>
+              <a:tr h="388620">
                 <a:tc>
                   <a:txBody>
                     <a:bodyPr/>
@@ -7672,18 +10279,133 @@
                         </a:defRPr>
                       </a:pPr>
                       <a:r>
-                        <a:t>0.1766</a:t>
-                      </a:r>
-                    </a:p>
-                  </a:txBody>
-                  <a:tcPr>
+                        <a:t>LightGBM</a:t>
+                      </a:r>
+                    </a:p>
+                  </a:txBody>
+                  <a:tcPr marT="25400" marB="25400">
+                    <a:solidFill>
+                      <a:srgbClr val="F4F6FB"/>
+                    </a:solidFill>
+                  </a:tcPr>
+                </a:tc>
+                <a:tc>
+                  <a:txBody>
+                    <a:bodyPr/>
+                    <a:lstStyle/>
+                    <a:p>
+                      <a:pPr>
+                        <a:defRPr sz="1200" b="0">
+                          <a:solidFill>
+                            <a:srgbClr val="334155"/>
+                          </a:solidFill>
+                        </a:defRPr>
+                      </a:pPr>
+                      <a:r>
+                        <a:t>0.8649</a:t>
+                      </a:r>
+                    </a:p>
+                  </a:txBody>
+                  <a:tcPr marT="25400" marB="25400">
+                    <a:solidFill>
+                      <a:srgbClr val="F4F6FB"/>
+                    </a:solidFill>
+                  </a:tcPr>
+                </a:tc>
+                <a:tc>
+                  <a:txBody>
+                    <a:bodyPr/>
+                    <a:lstStyle/>
+                    <a:p>
+                      <a:pPr>
+                        <a:defRPr sz="1200" b="0">
+                          <a:solidFill>
+                            <a:srgbClr val="334155"/>
+                          </a:solidFill>
+                        </a:defRPr>
+                      </a:pPr>
+                      <a:r>
+                        <a:t>0.7351</a:t>
+                      </a:r>
+                    </a:p>
+                  </a:txBody>
+                  <a:tcPr marT="25400" marB="25400">
+                    <a:solidFill>
+                      <a:srgbClr val="F4F6FB"/>
+                    </a:solidFill>
+                  </a:tcPr>
+                </a:tc>
+                <a:tc>
+                  <a:txBody>
+                    <a:bodyPr/>
+                    <a:lstStyle/>
+                    <a:p>
+                      <a:pPr>
+                        <a:defRPr sz="1200" b="0">
+                          <a:solidFill>
+                            <a:srgbClr val="334155"/>
+                          </a:solidFill>
+                        </a:defRPr>
+                      </a:pPr>
+                      <a:r>
+                        <a:t>0.9505</a:t>
+                      </a:r>
+                    </a:p>
+                  </a:txBody>
+                  <a:tcPr marT="25400" marB="25400">
+                    <a:solidFill>
+                      <a:srgbClr val="F4F6FB"/>
+                    </a:solidFill>
+                  </a:tcPr>
+                </a:tc>
+                <a:tc>
+                  <a:txBody>
+                    <a:bodyPr/>
+                    <a:lstStyle/>
+                    <a:p>
+                      <a:pPr>
+                        <a:defRPr sz="1200" b="0">
+                          <a:solidFill>
+                            <a:srgbClr val="334155"/>
+                          </a:solidFill>
+                        </a:defRPr>
+                      </a:pPr>
+                      <a:r>
+                        <a:t>0.8290</a:t>
+                      </a:r>
+                    </a:p>
+                  </a:txBody>
+                  <a:tcPr marT="25400" marB="25400">
+                    <a:solidFill>
+                      <a:srgbClr val="F4F6FB"/>
+                    </a:solidFill>
+                  </a:tcPr>
+                </a:tc>
+              </a:tr>
+              <a:tr h="388620">
+                <a:tc>
+                  <a:txBody>
+                    <a:bodyPr/>
+                    <a:lstStyle/>
+                    <a:p>
+                      <a:pPr>
+                        <a:defRPr sz="1200" b="0">
+                          <a:solidFill>
+                            <a:srgbClr val="334155"/>
+                          </a:solidFill>
+                        </a:defRPr>
+                      </a:pPr>
+                      <a:r>
+                        <a:t>XGBoost</a:t>
+                      </a:r>
+                    </a:p>
+                  </a:txBody>
+                  <a:tcPr marT="25400" marB="25400">
                     <a:solidFill>
                       <a:srgbClr val="FFFFFF"/>
                     </a:solidFill>
                   </a:tcPr>
                 </a:tc>
-              </a:tr>
-              <a:tr h="434340">
                 <a:tc>
                   <a:txBody>
                     <a:bodyPr/>
@@ -7697,13 +10419,13 @@
                         </a:defRPr>
                       </a:pPr>
                       <a:r>
-                        <a:t>LightGBM</a:t>
-                      </a:r>
-                    </a:p>
-                  </a:txBody>
-                  <a:tcPr>
-                    <a:solidFill>
-                      <a:srgbClr val="F4F6FB"/>
+                        <a:t>0.8632</a:t>
+                      </a:r>
+                    </a:p>
+                  </a:txBody>
+                  <a:tcPr marT="25400" marB="25400">
+                    <a:solidFill>
+                      <a:srgbClr val="FFFFFF"/>
                     </a:solidFill>
                   </a:tcPr>
                 </a:tc>
@@ -7720,13 +10442,13 @@
                         </a:defRPr>
                       </a:pPr>
                       <a:r>
-                        <a:t>0.8649</a:t>
-                      </a:r>
-                    </a:p>
-                  </a:txBody>
-                  <a:tcPr>
-                    <a:solidFill>
-                      <a:srgbClr val="F4F6FB"/>
+                        <a:t>0.7245</a:t>
+                      </a:r>
+                    </a:p>
+                  </a:txBody>
+                  <a:tcPr marT="25400" marB="25400">
+                    <a:solidFill>
+                      <a:srgbClr val="FFFFFF"/>
                     </a:solidFill>
                   </a:tcPr>
                 </a:tc>
@@ -7743,13 +10465,13 @@
                         </a:defRPr>
                       </a:pPr>
                       <a:r>
-                        <a:t>0.7351</a:t>
-                      </a:r>
-                    </a:p>
-                  </a:txBody>
-                  <a:tcPr>
-                    <a:solidFill>
-                      <a:srgbClr val="F4F6FB"/>
+                        <a:t>0.9567</a:t>
+                      </a:r>
+                    </a:p>
+                  </a:txBody>
+                  <a:tcPr marT="25400" marB="25400">
+                    <a:solidFill>
+                      <a:srgbClr val="FFFFFF"/>
                     </a:solidFill>
                   </a:tcPr>
                 </a:tc>
@@ -7766,197 +10488,11 @@
                         </a:defRPr>
                       </a:pPr>
                       <a:r>
-                        <a:t>0.9505</a:t>
-                      </a:r>
-                    </a:p>
-                  </a:txBody>
-                  <a:tcPr>
-                    <a:solidFill>
-                      <a:srgbClr val="F4F6FB"/>
-                    </a:solidFill>
-                  </a:tcPr>
-                </a:tc>
-                <a:tc>
-                  <a:txBody>
-                    <a:bodyPr/>
-                    <a:lstStyle/>
-                    <a:p>
-                      <a:pPr>
-                        <a:defRPr sz="1200" b="0">
-                          <a:solidFill>
-                            <a:srgbClr val="334155"/>
-                          </a:solidFill>
-                        </a:defRPr>
-                      </a:pPr>
-                      <a:r>
-                        <a:t>0.8290</a:t>
-                      </a:r>
-                    </a:p>
-                  </a:txBody>
-                  <a:tcPr>
-                    <a:solidFill>
-                      <a:srgbClr val="F4F6FB"/>
-                    </a:solidFill>
-                  </a:tcPr>
-                </a:tc>
-                <a:tc>
-                  <a:txBody>
-                    <a:bodyPr/>
-                    <a:lstStyle/>
-                    <a:p>
-                      <a:pPr>
-                        <a:defRPr sz="1200" b="0">
-                          <a:solidFill>
-                            <a:srgbClr val="334155"/>
-                          </a:solidFill>
-                        </a:defRPr>
-                      </a:pPr>
-                      <a:r>
-                        <a:t>0.1832</a:t>
-                      </a:r>
-                    </a:p>
-                  </a:txBody>
-                  <a:tcPr>
-                    <a:solidFill>
-                      <a:srgbClr val="F4F6FB"/>
-                    </a:solidFill>
-                  </a:tcPr>
-                </a:tc>
-              </a:tr>
-              <a:tr h="434340">
-                <a:tc>
-                  <a:txBody>
-                    <a:bodyPr/>
-                    <a:lstStyle/>
-                    <a:p>
-                      <a:pPr>
-                        <a:defRPr sz="1200" b="0">
-                          <a:solidFill>
-                            <a:srgbClr val="334155"/>
-                          </a:solidFill>
-                        </a:defRPr>
-                      </a:pPr>
-                      <a:r>
-                        <a:t>XGBoost</a:t>
-                      </a:r>
-                    </a:p>
-                  </a:txBody>
-                  <a:tcPr>
-                    <a:solidFill>
-                      <a:srgbClr val="FFFFFF"/>
-                    </a:solidFill>
-                  </a:tcPr>
-                </a:tc>
-                <a:tc>
-                  <a:txBody>
-                    <a:bodyPr/>
-                    <a:lstStyle/>
-                    <a:p>
-                      <a:pPr>
-                        <a:defRPr sz="1200" b="0">
-                          <a:solidFill>
-                            <a:srgbClr val="334155"/>
-                          </a:solidFill>
-                        </a:defRPr>
-                      </a:pPr>
-                      <a:r>
-                        <a:t>0.8632</a:t>
-                      </a:r>
-                    </a:p>
-                  </a:txBody>
-                  <a:tcPr>
-                    <a:solidFill>
-                      <a:srgbClr val="FFFFFF"/>
-                    </a:solidFill>
-                  </a:tcPr>
-                </a:tc>
-                <a:tc>
-                  <a:txBody>
-                    <a:bodyPr/>
-                    <a:lstStyle/>
-                    <a:p>
-                      <a:pPr>
-                        <a:defRPr sz="1200" b="0">
-                          <a:solidFill>
-                            <a:srgbClr val="334155"/>
-                          </a:solidFill>
-                        </a:defRPr>
-                      </a:pPr>
-                      <a:r>
-                        <a:t>0.7245</a:t>
-                      </a:r>
-                    </a:p>
-                  </a:txBody>
-                  <a:tcPr>
-                    <a:solidFill>
-                      <a:srgbClr val="FFFFFF"/>
-                    </a:solidFill>
-                  </a:tcPr>
-                </a:tc>
-                <a:tc>
-                  <a:txBody>
-                    <a:bodyPr/>
-                    <a:lstStyle/>
-                    <a:p>
-                      <a:pPr>
-                        <a:defRPr sz="1200" b="0">
-                          <a:solidFill>
-                            <a:srgbClr val="334155"/>
-                          </a:solidFill>
-                        </a:defRPr>
-                      </a:pPr>
-                      <a:r>
-                        <a:t>0.9567</a:t>
-                      </a:r>
-                    </a:p>
-                  </a:txBody>
-                  <a:tcPr>
-                    <a:solidFill>
-                      <a:srgbClr val="FFFFFF"/>
-                    </a:solidFill>
-                  </a:tcPr>
-                </a:tc>
-                <a:tc>
-                  <a:txBody>
-                    <a:bodyPr/>
-                    <a:lstStyle/>
-                    <a:p>
-                      <a:pPr>
-                        <a:defRPr sz="1200" b="0">
-                          <a:solidFill>
-                            <a:srgbClr val="334155"/>
-                          </a:solidFill>
-                        </a:defRPr>
-                      </a:pPr>
-                      <a:r>
                         <a:t>0.8246</a:t>
                       </a:r>
                     </a:p>
                   </a:txBody>
-                  <a:tcPr>
-                    <a:solidFill>
-                      <a:srgbClr val="FFFFFF"/>
-                    </a:solidFill>
-                  </a:tcPr>
-                </a:tc>
-                <a:tc>
-                  <a:txBody>
-                    <a:bodyPr/>
-                    <a:lstStyle/>
-                    <a:p>
-                      <a:pPr>
-                        <a:defRPr sz="1200" b="0">
-                          <a:solidFill>
-                            <a:srgbClr val="334155"/>
-                          </a:solidFill>
-                        </a:defRPr>
-                      </a:pPr>
-                      <a:r>
-                        <a:t>0.1918</a:t>
-                      </a:r>
-                    </a:p>
-                  </a:txBody>
-                  <a:tcPr>
+                  <a:tcPr marT="25400" marB="25400">
                     <a:solidFill>
                       <a:srgbClr val="FFFFFF"/>
                     </a:solidFill>
@@ -7969,14 +10505,14 @@
       </p:graphicFrame>
       <p:sp>
         <p:nvSpPr>
-          <p:cNvPr id="8" name="TextBox 7"/>
+          <p:cNvPr id="7" name="TextBox 6"/>
           <p:cNvSpPr txBox="1"/>
           <p:nvPr/>
         </p:nvSpPr>
         <p:spPr>
           <a:xfrm>
-            <a:off x="548640" y="4114800"/>
-            <a:ext cx="6400800" cy="365760"/>
+            <a:off x="457200" y="2788920"/>
+            <a:ext cx="5943600" cy="365760"/>
           </a:xfrm>
           <a:prstGeom prst="rect">
             <a:avLst/>
@@ -7991,70 +10527,482 @@
           <a:p>
             <a:pPr algn="l"/>
             <a:r>
+              <a:rPr sz="1200" b="0">
+                <a:solidFill>
+                  <a:srgbClr val="334155"/>
+                </a:solidFill>
+              </a:rPr>
+              <a:t>Operating threshold: 0.15 (cost-aware — favors recall)</a:t>
+            </a:r>
+          </a:p>
+        </p:txBody>
+      </p:sp>
+      <p:graphicFrame>
+        <p:nvGraphicFramePr>
+          <p:cNvPr id="8" name="Table 7"/>
+          <p:cNvGraphicFramePr>
+            <a:graphicFrameLocks noGrp="1"/>
+          </p:cNvGraphicFramePr>
+          <p:nvPr/>
+        </p:nvGraphicFramePr>
+        <p:xfrm>
+          <a:off x="457200" y="3246120"/>
+          <a:ext cx="5943600" cy="1371600"/>
+        </p:xfrm>
+        <a:graphic>
+          <a:graphicData uri="http://schemas.openxmlformats.org/drawingml/2006/table">
+            <a:tbl>
+              <a:tblPr firstRow="1" bandRow="1">
+                <a:tableStyleId>{5C22544A-7EE6-4342-B048-85BDC9FD1C3A}</a:tableStyleId>
+              </a:tblPr>
+              <a:tblGrid>
+                <a:gridCol w="1737360"/>
+                <a:gridCol w="1371600"/>
+                <a:gridCol w="1371600"/>
+                <a:gridCol w="1463040"/>
+              </a:tblGrid>
+              <a:tr h="342900">
+                <a:tc>
+                  <a:txBody>
+                    <a:bodyPr/>
+                    <a:lstStyle/>
+                    <a:p>
+                      <a:pPr>
+                        <a:defRPr sz="1200" b="1">
+                          <a:solidFill>
+                            <a:srgbClr val="FFFFFF"/>
+                          </a:solidFill>
+                        </a:defRPr>
+                      </a:pPr>
+                      <a:r>
+                        <a:t>Count regression</a:t>
+                      </a:r>
+                    </a:p>
+                  </a:txBody>
+                  <a:tcPr marT="25400" marB="25400">
+                    <a:solidFill>
+                      <a:srgbClr val="0F172A"/>
+                    </a:solidFill>
+                  </a:tcPr>
+                </a:tc>
+                <a:tc>
+                  <a:txBody>
+                    <a:bodyPr/>
+                    <a:lstStyle/>
+                    <a:p>
+                      <a:pPr>
+                        <a:defRPr sz="1200" b="1">
+                          <a:solidFill>
+                            <a:srgbClr val="FFFFFF"/>
+                          </a:solidFill>
+                        </a:defRPr>
+                      </a:pPr>
+                      <a:r>
+                        <a:t>MAE</a:t>
+                      </a:r>
+                    </a:p>
+                  </a:txBody>
+                  <a:tcPr marT="25400" marB="25400">
+                    <a:solidFill>
+                      <a:srgbClr val="0F172A"/>
+                    </a:solidFill>
+                  </a:tcPr>
+                </a:tc>
+                <a:tc>
+                  <a:txBody>
+                    <a:bodyPr/>
+                    <a:lstStyle/>
+                    <a:p>
+                      <a:pPr>
+                        <a:defRPr sz="1200" b="1">
+                          <a:solidFill>
+                            <a:srgbClr val="FFFFFF"/>
+                          </a:solidFill>
+                        </a:defRPr>
+                      </a:pPr>
+                      <a:r>
+                        <a:t>RMSE</a:t>
+                      </a:r>
+                    </a:p>
+                  </a:txBody>
+                  <a:tcPr marT="25400" marB="25400">
+                    <a:solidFill>
+                      <a:srgbClr val="0F172A"/>
+                    </a:solidFill>
+                  </a:tcPr>
+                </a:tc>
+                <a:tc>
+                  <a:txBody>
+                    <a:bodyPr/>
+                    <a:lstStyle/>
+                    <a:p>
+                      <a:pPr>
+                        <a:defRPr sz="1200" b="1">
+                          <a:solidFill>
+                            <a:srgbClr val="FFFFFF"/>
+                          </a:solidFill>
+                        </a:defRPr>
+                      </a:pPr>
+                      <a:r>
+                        <a:t>R²</a:t>
+                      </a:r>
+                    </a:p>
+                  </a:txBody>
+                  <a:tcPr marT="25400" marB="25400">
+                    <a:solidFill>
+                      <a:srgbClr val="0F172A"/>
+                    </a:solidFill>
+                  </a:tcPr>
+                </a:tc>
+              </a:tr>
+              <a:tr h="342900">
+                <a:tc>
+                  <a:txBody>
+                    <a:bodyPr/>
+                    <a:lstStyle/>
+                    <a:p>
+                      <a:pPr>
+                        <a:defRPr sz="1200" b="0">
+                          <a:solidFill>
+                            <a:srgbClr val="334155"/>
+                          </a:solidFill>
+                        </a:defRPr>
+                      </a:pPr>
+                      <a:r>
+                        <a:t>CatBoost</a:t>
+                      </a:r>
+                    </a:p>
+                  </a:txBody>
+                  <a:tcPr marT="25400" marB="25400">
+                    <a:solidFill>
+                      <a:srgbClr val="FFFFFF"/>
+                    </a:solidFill>
+                  </a:tcPr>
+                </a:tc>
+                <a:tc>
+                  <a:txBody>
+                    <a:bodyPr/>
+                    <a:lstStyle/>
+                    <a:p>
+                      <a:pPr>
+                        <a:defRPr sz="1200" b="0">
+                          <a:solidFill>
+                            <a:srgbClr val="334155"/>
+                          </a:solidFill>
+                        </a:defRPr>
+                      </a:pPr>
+                      <a:r>
+                        <a:t>5.92</a:t>
+                      </a:r>
+                    </a:p>
+                  </a:txBody>
+                  <a:tcPr marT="25400" marB="25400">
+                    <a:solidFill>
+                      <a:srgbClr val="FFFFFF"/>
+                    </a:solidFill>
+                  </a:tcPr>
+                </a:tc>
+                <a:tc>
+                  <a:txBody>
+                    <a:bodyPr/>
+                    <a:lstStyle/>
+                    <a:p>
+                      <a:pPr>
+                        <a:defRPr sz="1200" b="0">
+                          <a:solidFill>
+                            <a:srgbClr val="334155"/>
+                          </a:solidFill>
+                        </a:defRPr>
+                      </a:pPr>
+                      <a:r>
+                        <a:t>10.58</a:t>
+                      </a:r>
+                    </a:p>
+                  </a:txBody>
+                  <a:tcPr marT="25400" marB="25400">
+                    <a:solidFill>
+                      <a:srgbClr val="FFFFFF"/>
+                    </a:solidFill>
+                  </a:tcPr>
+                </a:tc>
+                <a:tc>
+                  <a:txBody>
+                    <a:bodyPr/>
+                    <a:lstStyle/>
+                    <a:p>
+                      <a:pPr>
+                        <a:defRPr sz="1200" b="0">
+                          <a:solidFill>
+                            <a:srgbClr val="334155"/>
+                          </a:solidFill>
+                        </a:defRPr>
+                      </a:pPr>
+                      <a:r>
+                        <a:t>0.271</a:t>
+                      </a:r>
+                    </a:p>
+                  </a:txBody>
+                  <a:tcPr marT="25400" marB="25400">
+                    <a:solidFill>
+                      <a:srgbClr val="FFFFFF"/>
+                    </a:solidFill>
+                  </a:tcPr>
+                </a:tc>
+              </a:tr>
+              <a:tr h="342900">
+                <a:tc>
+                  <a:txBody>
+                    <a:bodyPr/>
+                    <a:lstStyle/>
+                    <a:p>
+                      <a:pPr>
+                        <a:defRPr sz="1200" b="0">
+                          <a:solidFill>
+                            <a:srgbClr val="334155"/>
+                          </a:solidFill>
+                        </a:defRPr>
+                      </a:pPr>
+                      <a:r>
+                        <a:t>LightGBM</a:t>
+                      </a:r>
+                    </a:p>
+                  </a:txBody>
+                  <a:tcPr marT="25400" marB="25400">
+                    <a:solidFill>
+                      <a:srgbClr val="F4F6FB"/>
+                    </a:solidFill>
+                  </a:tcPr>
+                </a:tc>
+                <a:tc>
+                  <a:txBody>
+                    <a:bodyPr/>
+                    <a:lstStyle/>
+                    <a:p>
+                      <a:pPr>
+                        <a:defRPr sz="1200" b="0">
+                          <a:solidFill>
+                            <a:srgbClr val="334155"/>
+                          </a:solidFill>
+                        </a:defRPr>
+                      </a:pPr>
+                      <a:r>
+                        <a:t>6.02</a:t>
+                      </a:r>
+                    </a:p>
+                  </a:txBody>
+                  <a:tcPr marT="25400" marB="25400">
+                    <a:solidFill>
+                      <a:srgbClr val="F4F6FB"/>
+                    </a:solidFill>
+                  </a:tcPr>
+                </a:tc>
+                <a:tc>
+                  <a:txBody>
+                    <a:bodyPr/>
+                    <a:lstStyle/>
+                    <a:p>
+                      <a:pPr>
+                        <a:defRPr sz="1200" b="0">
+                          <a:solidFill>
+                            <a:srgbClr val="334155"/>
+                          </a:solidFill>
+                        </a:defRPr>
+                      </a:pPr>
+                      <a:r>
+                        <a:t>10.92</a:t>
+                      </a:r>
+                    </a:p>
+                  </a:txBody>
+                  <a:tcPr marT="25400" marB="25400">
+                    <a:solidFill>
+                      <a:srgbClr val="F4F6FB"/>
+                    </a:solidFill>
+                  </a:tcPr>
+                </a:tc>
+                <a:tc>
+                  <a:txBody>
+                    <a:bodyPr/>
+                    <a:lstStyle/>
+                    <a:p>
+                      <a:pPr>
+                        <a:defRPr sz="1200" b="0">
+                          <a:solidFill>
+                            <a:srgbClr val="334155"/>
+                          </a:solidFill>
+                        </a:defRPr>
+                      </a:pPr>
+                      <a:r>
+                        <a:t>0.223</a:t>
+                      </a:r>
+                    </a:p>
+                  </a:txBody>
+                  <a:tcPr marT="25400" marB="25400">
+                    <a:solidFill>
+                      <a:srgbClr val="F4F6FB"/>
+                    </a:solidFill>
+                  </a:tcPr>
+                </a:tc>
+              </a:tr>
+              <a:tr h="342900">
+                <a:tc>
+                  <a:txBody>
+                    <a:bodyPr/>
+                    <a:lstStyle/>
+                    <a:p>
+                      <a:pPr>
+                        <a:defRPr sz="1200" b="0">
+                          <a:solidFill>
+                            <a:srgbClr val="334155"/>
+                          </a:solidFill>
+                        </a:defRPr>
+                      </a:pPr>
+                      <a:r>
+                        <a:t>XGBoost</a:t>
+                      </a:r>
+                    </a:p>
+                  </a:txBody>
+                  <a:tcPr marT="25400" marB="25400">
+                    <a:solidFill>
+                      <a:srgbClr val="FFFFFF"/>
+                    </a:solidFill>
+                  </a:tcPr>
+                </a:tc>
+                <a:tc>
+                  <a:txBody>
+                    <a:bodyPr/>
+                    <a:lstStyle/>
+                    <a:p>
+                      <a:pPr>
+                        <a:defRPr sz="1200" b="0">
+                          <a:solidFill>
+                            <a:srgbClr val="334155"/>
+                          </a:solidFill>
+                        </a:defRPr>
+                      </a:pPr>
+                      <a:r>
+                        <a:t>6.24</a:t>
+                      </a:r>
+                    </a:p>
+                  </a:txBody>
+                  <a:tcPr marT="25400" marB="25400">
+                    <a:solidFill>
+                      <a:srgbClr val="FFFFFF"/>
+                    </a:solidFill>
+                  </a:tcPr>
+                </a:tc>
+                <a:tc>
+                  <a:txBody>
+                    <a:bodyPr/>
+                    <a:lstStyle/>
+                    <a:p>
+                      <a:pPr>
+                        <a:defRPr sz="1200" b="0">
+                          <a:solidFill>
+                            <a:srgbClr val="334155"/>
+                          </a:solidFill>
+                        </a:defRPr>
+                      </a:pPr>
+                      <a:r>
+                        <a:t>11.18</a:t>
+                      </a:r>
+                    </a:p>
+                  </a:txBody>
+                  <a:tcPr marT="25400" marB="25400">
+                    <a:solidFill>
+                      <a:srgbClr val="FFFFFF"/>
+                    </a:solidFill>
+                  </a:tcPr>
+                </a:tc>
+                <a:tc>
+                  <a:txBody>
+                    <a:bodyPr/>
+                    <a:lstStyle/>
+                    <a:p>
+                      <a:pPr>
+                        <a:defRPr sz="1200" b="0">
+                          <a:solidFill>
+                            <a:srgbClr val="334155"/>
+                          </a:solidFill>
+                        </a:defRPr>
+                      </a:pPr>
+                      <a:r>
+                        <a:t>0.186</a:t>
+                      </a:r>
+                    </a:p>
+                  </a:txBody>
+                  <a:tcPr marT="25400" marB="25400">
+                    <a:solidFill>
+                      <a:srgbClr val="FFFFFF"/>
+                    </a:solidFill>
+                  </a:tcPr>
+                </a:tc>
+              </a:tr>
+            </a:tbl>
+          </a:graphicData>
+        </a:graphic>
+      </p:graphicFrame>
+      <p:graphicFrame>
+        <p:nvGraphicFramePr>
+          <p:cNvPr id="9" name="Chart 8"/>
+          <p:cNvGraphicFramePr>
+            <a:graphicFrameLocks noGrp="1"/>
+          </p:cNvGraphicFramePr>
+          <p:nvPr/>
+        </p:nvGraphicFramePr>
+        <p:xfrm>
+          <a:off x="6675120" y="1143000"/>
+          <a:ext cx="5029200" cy="2651760"/>
+        </p:xfrm>
+        <a:graphic>
+          <a:graphicData uri="http://schemas.openxmlformats.org/drawingml/2006/chart">
+            <c:chart xmlns:c="http://schemas.openxmlformats.org/drawingml/2006/chart" r:id="rId2"/>
+          </a:graphicData>
+        </a:graphic>
+      </p:graphicFrame>
+      <p:sp>
+        <p:nvSpPr>
+          <p:cNvPr id="10" name="TextBox 9"/>
+          <p:cNvSpPr txBox="1"/>
+          <p:nvPr/>
+        </p:nvSpPr>
+        <p:spPr>
+          <a:xfrm>
+            <a:off x="457200" y="4754880"/>
+            <a:ext cx="11155680" cy="365760"/>
+          </a:xfrm>
+          <a:prstGeom prst="rect">
+            <a:avLst/>
+          </a:prstGeom>
+          <a:noFill/>
+        </p:spPr>
+        <p:txBody>
+          <a:bodyPr wrap="square">
+            <a:spAutoFit/>
+          </a:bodyPr>
+          <a:lstStyle/>
+          <a:p>
+            <a:pPr algn="l"/>
+            <a:r>
               <a:rPr sz="1250" b="0">
                 <a:solidFill>
                   <a:srgbClr val="334155"/>
                 </a:solidFill>
-                <a:latin typeface="Calibri"/>
               </a:rPr>
-              <a:t>Operating point: threshold 0.15 (cost-aware, optimized for recall over precision — missing a real hotspot costs more than a false alarm)</a:t>
-            </a:r>
-          </a:p>
-        </p:txBody>
-      </p:sp>
-      <p:sp>
-        <p:nvSpPr>
-          <p:cNvPr id="9" name="Rectangle 8"/>
-          <p:cNvSpPr/>
-          <p:nvPr/>
-        </p:nvSpPr>
-        <p:spPr>
-          <a:xfrm>
-            <a:off x="7223760" y="2148840"/>
-            <a:ext cx="4434840" cy="2103120"/>
-          </a:xfrm>
-          <a:prstGeom prst="rect">
-            <a:avLst/>
-          </a:prstGeom>
-          <a:solidFill>
-            <a:srgbClr val="F4F6FB"/>
-          </a:solidFill>
-          <a:ln>
-            <a:noFill/>
-          </a:ln>
-        </p:spPr>
-        <p:style>
-          <a:lnRef idx="1">
-            <a:schemeClr val="accent1"/>
-          </a:lnRef>
-          <a:fillRef idx="3">
-            <a:schemeClr val="accent1"/>
-          </a:fillRef>
-          <a:effectRef idx="2">
-            <a:schemeClr val="accent1"/>
-          </a:effectRef>
-          <a:fontRef idx="minor">
-            <a:schemeClr val="lt1"/>
-          </a:fontRef>
-        </p:style>
-        <p:txBody>
-          <a:bodyPr rtlCol="0" anchor="ctr"/>
-          <a:lstStyle/>
-          <a:p>
-            <a:pPr algn="ctr"/>
-          </a:p>
-        </p:txBody>
-      </p:sp>
-      <p:sp>
-        <p:nvSpPr>
-          <p:cNvPr id="10" name="TextBox 9"/>
+              <a:t>Calibration test (Platt/Isotonic): &lt;5% Brier improvement over raw probabilities — rejected, not adopted</a:t>
+            </a:r>
+          </a:p>
+        </p:txBody>
+      </p:sp>
+      <p:sp>
+        <p:nvSpPr>
+          <p:cNvPr id="11" name="TextBox 10"/>
           <p:cNvSpPr txBox="1"/>
           <p:nvPr/>
         </p:nvSpPr>
         <p:spPr>
           <a:xfrm>
-            <a:off x="7406640" y="2286000"/>
-            <a:ext cx="4114800" cy="365760"/>
+            <a:off x="457200" y="5212080"/>
+            <a:ext cx="11155680" cy="457200"/>
           </a:xfrm>
           <a:prstGeom prst="rect">
             <a:avLst/>
@@ -8069,149 +11017,12 @@
           <a:p>
             <a:pPr algn="l"/>
             <a:r>
-              <a:rPr sz="1400" b="1">
+              <a:rPr sz="1300" b="1">
                 <a:solidFill>
                   <a:srgbClr val="0F172A"/>
                 </a:solidFill>
-                <a:latin typeface="Calibri"/>
               </a:rPr>
-              <a:t>Count regression (R²)</a:t>
-            </a:r>
-          </a:p>
-        </p:txBody>
-      </p:sp>
-      <p:sp>
-        <p:nvSpPr>
-          <p:cNvPr id="11" name="TextBox 10"/>
-          <p:cNvSpPr txBox="1"/>
-          <p:nvPr/>
-        </p:nvSpPr>
-        <p:spPr>
-          <a:xfrm>
-            <a:off x="7406640" y="2651760"/>
-            <a:ext cx="4114800" cy="1463040"/>
-          </a:xfrm>
-          <a:prstGeom prst="rect">
-            <a:avLst/>
-          </a:prstGeom>
-          <a:noFill/>
-        </p:spPr>
-        <p:txBody>
-          <a:bodyPr wrap="square">
-            <a:spAutoFit/>
-          </a:bodyPr>
-          <a:lstStyle/>
-          <a:p>
-            <a:pPr>
-              <a:lnSpc>
-                <a:spcPct val="115000"/>
-              </a:lnSpc>
-              <a:spcAft>
-                <a:spcPts val="600"/>
-              </a:spcAft>
-              <a:defRPr sz="1250">
-                <a:solidFill>
-                  <a:srgbClr val="334155"/>
-                </a:solidFill>
-              </a:defRPr>
-            </a:pPr>
-            <a:r>
-              <a:t>• CatBoost: MAE 5.92, RMSE 10.58, R² 0.271</a:t>
-            </a:r>
-          </a:p>
-          <a:p>
-            <a:pPr>
-              <a:lnSpc>
-                <a:spcPct val="115000"/>
-              </a:lnSpc>
-              <a:spcAft>
-                <a:spcPts val="600"/>
-              </a:spcAft>
-              <a:defRPr sz="1250">
-                <a:solidFill>
-                  <a:srgbClr val="334155"/>
-                </a:solidFill>
-              </a:defRPr>
-            </a:pPr>
-            <a:r>
-              <a:t>• LightGBM: MAE 6.02, RMSE 10.92, R² 0.223</a:t>
-            </a:r>
-          </a:p>
-          <a:p>
-            <a:pPr>
-              <a:lnSpc>
-                <a:spcPct val="115000"/>
-              </a:lnSpc>
-              <a:spcAft>
-                <a:spcPts val="600"/>
-              </a:spcAft>
-              <a:defRPr sz="1250">
-                <a:solidFill>
-                  <a:srgbClr val="334155"/>
-                </a:solidFill>
-              </a:defRPr>
-            </a:pPr>
-            <a:r>
-              <a:t>• XGBoost: MAE 6.24, RMSE 11.18, R² 0.186</a:t>
-            </a:r>
-          </a:p>
-        </p:txBody>
-      </p:sp>
-      <p:sp>
-        <p:nvSpPr>
-          <p:cNvPr id="12" name="TextBox 11"/>
-          <p:cNvSpPr txBox="1"/>
-          <p:nvPr/>
-        </p:nvSpPr>
-        <p:spPr>
-          <a:xfrm>
-            <a:off x="548640" y="4480560"/>
-            <a:ext cx="11064240" cy="1828800"/>
-          </a:xfrm>
-          <a:prstGeom prst="rect">
-            <a:avLst/>
-          </a:prstGeom>
-          <a:noFill/>
-        </p:spPr>
-        <p:txBody>
-          <a:bodyPr wrap="square">
-            <a:spAutoFit/>
-          </a:bodyPr>
-          <a:lstStyle/>
-          <a:p>
-            <a:pPr>
-              <a:lnSpc>
-                <a:spcPct val="115000"/>
-              </a:lnSpc>
-              <a:spcAft>
-                <a:spcPts val="600"/>
-              </a:spcAft>
-              <a:defRPr sz="1400">
-                <a:solidFill>
-                  <a:srgbClr val="334155"/>
-                </a:solidFill>
-              </a:defRPr>
-            </a:pPr>
-            <a:r>
-              <a:t>• Multi-horizon check: PR-AUC rises with longer windows (15m: 0.7834 → 30m: 0.8337 → 60m: 0.8767 → 90m: 0.8929) — confirms the model is genuinely using temporal accumulation, not noise</a:t>
-            </a:r>
-          </a:p>
-          <a:p>
-            <a:pPr>
-              <a:lnSpc>
-                <a:spcPct val="115000"/>
-              </a:lnSpc>
-              <a:spcAft>
-                <a:spcPts val="600"/>
-              </a:spcAft>
-              <a:defRPr sz="1400">
-                <a:solidFill>
-                  <a:srgbClr val="334155"/>
-                </a:solidFill>
-              </a:defRPr>
-            </a:pPr>
-            <a:r>
-              <a:t>• Calibration tested: Platt/Isotonic scaling gave &lt;5% Brier-score improvement over the raw probabilities — rejected, the model is already reasonably well-calibrated out of the box</a:t>
+              <a:t>PR-AUC rises monotonically with horizon length — confirms the model uses real temporal accumulation, not noise</a:t>
             </a:r>
           </a:p>
         </p:txBody>
@@ -8305,7 +11116,6 @@
                 <a:solidFill>
                   <a:srgbClr val="FFFFFF"/>
                 </a:solidFill>
-                <a:latin typeface="Calibri"/>
               </a:rPr>
               <a:t>Congestion Risk Score</a:t>
             </a:r>
@@ -8340,7 +11150,6 @@
                 <a:solidFill>
                   <a:srgbClr val="C7D2FE"/>
                 </a:solidFill>
-                <a:latin typeface="Calibri"/>
               </a:rPr>
               <a:t>A derived score, not a new ML target</a:t>
             </a:r>
@@ -8398,8 +11207,8 @@
         </p:nvSpPr>
         <p:spPr>
           <a:xfrm>
-            <a:off x="548640" y="1234440"/>
-            <a:ext cx="11064240" cy="1737360"/>
+            <a:off x="457200" y="1188720"/>
+            <a:ext cx="6400800" cy="1417320"/>
           </a:xfrm>
           <a:prstGeom prst="rect">
             <a:avLst/>
@@ -8441,8 +11250,8 @@
         </p:nvSpPr>
         <p:spPr>
           <a:xfrm>
-            <a:off x="822960" y="1417320"/>
-            <a:ext cx="10515600" cy="365760"/>
+            <a:off x="685800" y="1325880"/>
+            <a:ext cx="5943600" cy="365760"/>
           </a:xfrm>
           <a:prstGeom prst="rect">
             <a:avLst/>
@@ -8457,11 +11266,10 @@
           <a:p>
             <a:pPr algn="l"/>
             <a:r>
-              <a:rPr sz="2000" b="1">
+              <a:rPr sz="1800" b="1">
                 <a:solidFill>
                   <a:srgbClr val="FFFFFF"/>
                 </a:solidFill>
-                <a:latin typeface="Calibri"/>
               </a:rPr>
               <a:t>risk_score = 100 × Σ wᵢ · componentᵢ</a:t>
             </a:r>
@@ -8476,8 +11284,8 @@
         </p:nvSpPr>
         <p:spPr>
           <a:xfrm>
-            <a:off x="822960" y="1874519"/>
-            <a:ext cx="10515600" cy="1005840"/>
+            <a:off x="685800" y="1737360"/>
+            <a:ext cx="5943600" cy="822960"/>
           </a:xfrm>
           <a:prstGeom prst="rect">
             <a:avLst/>
@@ -8495,16 +11303,16 @@
                 <a:spcPct val="115000"/>
               </a:lnSpc>
               <a:spcAft>
-                <a:spcPts val="600"/>
+                <a:spcPts val="500"/>
               </a:spcAft>
-              <a:defRPr sz="1300">
+              <a:defRPr sz="1200">
                 <a:solidFill>
                   <a:srgbClr val="E2E8F0"/>
                 </a:solidFill>
               </a:defRPr>
             </a:pPr>
             <a:r>
-              <a:t>• w_hotspot · hotspot_probability      (classifier output, 0–1)</a:t>
+              <a:t>• hotspot_probability + normalized_predicted_count</a:t>
             </a:r>
           </a:p>
           <a:p>
@@ -8513,34 +11321,57 @@
                 <a:spcPct val="115000"/>
               </a:lnSpc>
               <a:spcAft>
-                <a:spcPts val="600"/>
+                <a:spcPts val="500"/>
               </a:spcAft>
-              <a:defRPr sz="1300">
+              <a:defRPr sz="1200">
                 <a:solidFill>
                   <a:srgbClr val="E2E8F0"/>
                 </a:solidFill>
               </a:defRPr>
             </a:pPr>
             <a:r>
-              <a:t>• + w_count   · normalized_predicted_count   (regressor output, min-max scaled on train period)</a:t>
-            </a:r>
-          </a:p>
+              <a:t>• + persistence + recent_intensity  (all 0–1 scaled)</a:t>
+            </a:r>
+          </a:p>
+        </p:txBody>
+      </p:sp>
+      <p:sp>
+        <p:nvSpPr>
+          <p:cNvPr id="9" name="TextBox 8"/>
+          <p:cNvSpPr txBox="1"/>
+          <p:nvPr/>
+        </p:nvSpPr>
+        <p:spPr>
+          <a:xfrm>
+            <a:off x="457200" y="2834640"/>
+            <a:ext cx="6400800" cy="1828800"/>
+          </a:xfrm>
+          <a:prstGeom prst="rect">
+            <a:avLst/>
+          </a:prstGeom>
+          <a:noFill/>
+        </p:spPr>
+        <p:txBody>
+          <a:bodyPr wrap="square">
+            <a:spAutoFit/>
+          </a:bodyPr>
+          <a:lstStyle/>
           <a:p>
             <a:pPr>
               <a:lnSpc>
                 <a:spcPct val="115000"/>
               </a:lnSpc>
               <a:spcAft>
-                <a:spcPts val="600"/>
+                <a:spcPts val="500"/>
               </a:spcAft>
               <a:defRPr sz="1300">
                 <a:solidFill>
-                  <a:srgbClr val="E2E8F0"/>
+                  <a:srgbClr val="334155"/>
                 </a:solidFill>
               </a:defRPr>
             </a:pPr>
             <a:r>
-              <a:t>• + w_persist · persistence                    (rolling_hotspot_intensity, min-max scaled)</a:t>
+              <a:t>• Originally hand-picked: 0.40 / 0.30 / 0.20 / 0.10</a:t>
             </a:r>
           </a:p>
           <a:p>
@@ -8549,92 +11380,34 @@
                 <a:spcPct val="115000"/>
               </a:lnSpc>
               <a:spcAft>
-                <a:spcPts val="600"/>
+                <a:spcPts val="500"/>
               </a:spcAft>
               <a:defRPr sz="1300">
                 <a:solidFill>
-                  <a:srgbClr val="E2E8F0"/>
+                  <a:srgbClr val="334155"/>
                 </a:solidFill>
               </a:defRPr>
             </a:pPr>
             <a:r>
-              <a:t>• + w_recent  · recent_intensity              (violations_last_15m, min-max scaled)</a:t>
-            </a:r>
-          </a:p>
-        </p:txBody>
-      </p:sp>
-      <p:sp>
-        <p:nvSpPr>
-          <p:cNvPr id="9" name="TextBox 8"/>
-          <p:cNvSpPr txBox="1"/>
-          <p:nvPr/>
-        </p:nvSpPr>
-        <p:spPr>
-          <a:xfrm>
-            <a:off x="548640" y="3154680"/>
-            <a:ext cx="5486400" cy="365760"/>
-          </a:xfrm>
-          <a:prstGeom prst="rect">
-            <a:avLst/>
-          </a:prstGeom>
-          <a:noFill/>
-        </p:spPr>
-        <p:txBody>
-          <a:bodyPr wrap="square">
-            <a:spAutoFit/>
-          </a:bodyPr>
-          <a:lstStyle/>
-          <a:p>
-            <a:pPr algn="l"/>
-            <a:r>
-              <a:rPr sz="1600" b="1">
-                <a:solidFill>
-                  <a:srgbClr val="0F172A"/>
-                </a:solidFill>
-                <a:latin typeface="Calibri"/>
-              </a:rPr>
-              <a:t>Weights — fit, not hand-picked (ADR-023)</a:t>
-            </a:r>
-          </a:p>
-        </p:txBody>
-      </p:sp>
-      <p:sp>
-        <p:nvSpPr>
-          <p:cNvPr id="10" name="TextBox 9"/>
-          <p:cNvSpPr txBox="1"/>
-          <p:nvPr/>
-        </p:nvSpPr>
-        <p:spPr>
-          <a:xfrm>
-            <a:off x="548640" y="3566160"/>
-            <a:ext cx="5486400" cy="2743200"/>
-          </a:xfrm>
-          <a:prstGeom prst="rect">
-            <a:avLst/>
-          </a:prstGeom>
-          <a:noFill/>
-        </p:spPr>
-        <p:txBody>
-          <a:bodyPr wrap="square">
-            <a:spAutoFit/>
-          </a:bodyPr>
-          <a:lstStyle/>
+              <a:t>• Plain NNLS collapsed to 100% on one component (tautological target leakage)</a:t>
+            </a:r>
+          </a:p>
           <a:p>
             <a:pPr>
               <a:lnSpc>
                 <a:spcPct val="115000"/>
               </a:lnSpc>
               <a:spcAft>
-                <a:spcPts val="600"/>
+                <a:spcPts val="500"/>
               </a:spcAft>
-              <a:defRPr sz="1350">
+              <a:defRPr sz="1300">
                 <a:solidFill>
                   <a:srgbClr val="334155"/>
                 </a:solidFill>
               </a:defRPr>
             </a:pPr>
             <a:r>
-              <a:t>• Originally hand-picked: 0.40 / 0.30 / 0.20 / 0.10</a:t>
+              <a:t>• Fix: ridge-regularized NNLS — solve [X; √α·I]β ≈ [y; 0], sweep α, pick smallest α with max weight ≤ 75%</a:t>
             </a:r>
           </a:p>
           <a:p>
@@ -8643,74 +11416,38 @@
                 <a:spcPct val="115000"/>
               </a:lnSpc>
               <a:spcAft>
-                <a:spcPts val="600"/>
+                <a:spcPts val="500"/>
               </a:spcAft>
-              <a:defRPr sz="1350">
+              <a:defRPr sz="1300">
                 <a:solidFill>
                   <a:srgbClr val="334155"/>
                 </a:solidFill>
               </a:defRPr>
             </a:pPr>
             <a:r>
-              <a:t>• Now fit via ridge-regularized Non-Negative Least Squares against target_count_60m (best available outcome proxy — no ground-truth congestion data exists in this dataset)</a:t>
-            </a:r>
-          </a:p>
-          <a:p>
-            <a:pPr>
-              <a:lnSpc>
-                <a:spcPct val="115000"/>
-              </a:lnSpc>
-              <a:spcAft>
-                <a:spcPts val="600"/>
-              </a:spcAft>
-              <a:defRPr sz="1350">
-                <a:solidFill>
-                  <a:srgbClr val="334155"/>
-                </a:solidFill>
-              </a:defRPr>
-            </a:pPr>
-            <a:r>
-              <a:t>• Plain NNLS collapsed to 100% weight on normalized_predicted_count — near-tautological, since the regressor was trained to predict that exact target</a:t>
-            </a:r>
-          </a:p>
-          <a:p>
-            <a:pPr>
-              <a:lnSpc>
-                <a:spcPct val="115000"/>
-              </a:lnSpc>
-              <a:spcAft>
-                <a:spcPts val="600"/>
-              </a:spcAft>
-              <a:defRPr sz="1350">
-                <a:solidFill>
-                  <a:srgbClr val="334155"/>
-                </a:solidFill>
-              </a:defRPr>
-            </a:pPr>
-            <a:r>
-              <a:t>• Fix: augmented-system ridge NNLS, sweeping α ∈ {0, 10, 50, ..., 5000}, picking the SMALLEST α where max component weight ≤ 75%</a:t>
-            </a:r>
-          </a:p>
-          <a:p>
-            <a:pPr>
-              <a:lnSpc>
-                <a:spcPct val="115000"/>
-              </a:lnSpc>
-              <a:spcAft>
-                <a:spcPts val="600"/>
-              </a:spcAft>
-              <a:defRPr sz="1350">
-                <a:solidFill>
-                  <a:srgbClr val="334155"/>
-                </a:solidFill>
-              </a:defRPr>
-            </a:pPr>
-            <a:r>
-              <a:t>• Current fitted weights: hotspot 0.020 / count 0.701 / persistence 0.147 / recent 0.131</a:t>
-            </a:r>
-          </a:p>
-        </p:txBody>
-      </p:sp>
+              <a:t>• Refit automatically on every retrain — no frozen constants</a:t>
+            </a:r>
+          </a:p>
+        </p:txBody>
+      </p:sp>
+      <p:graphicFrame>
+        <p:nvGraphicFramePr>
+          <p:cNvPr id="10" name="Chart 9"/>
+          <p:cNvGraphicFramePr>
+            <a:graphicFrameLocks noGrp="1"/>
+          </p:cNvGraphicFramePr>
+          <p:nvPr/>
+        </p:nvGraphicFramePr>
+        <p:xfrm>
+          <a:off x="7040880" y="1188720"/>
+          <a:ext cx="4663440" cy="3291840"/>
+        </p:xfrm>
+        <a:graphic>
+          <a:graphicData uri="http://schemas.openxmlformats.org/drawingml/2006/chart">
+            <c:chart xmlns:c="http://schemas.openxmlformats.org/drawingml/2006/chart" r:id="rId2"/>
+          </a:graphicData>
+        </a:graphic>
+      </p:graphicFrame>
       <p:sp>
         <p:nvSpPr>
           <p:cNvPr id="11" name="Rectangle 10"/>
@@ -8719,8 +11456,8 @@
         </p:nvSpPr>
         <p:spPr>
           <a:xfrm>
-            <a:off x="6309360" y="3154680"/>
-            <a:ext cx="5349240" cy="3154680"/>
+            <a:off x="457200" y="4846320"/>
+            <a:ext cx="3108960" cy="1188720"/>
           </a:xfrm>
           <a:prstGeom prst="rect">
             <a:avLst/>
@@ -8762,8 +11499,8 @@
         </p:nvSpPr>
         <p:spPr>
           <a:xfrm>
-            <a:off x="6492240" y="3291840"/>
-            <a:ext cx="5029200" cy="365760"/>
+            <a:off x="457200" y="4937760"/>
+            <a:ext cx="3108960" cy="1005840"/>
           </a:xfrm>
           <a:prstGeom prst="rect">
             <a:avLst/>
@@ -8776,29 +11513,83 @@
           </a:bodyPr>
           <a:lstStyle/>
           <a:p>
-            <a:pPr algn="l"/>
-            <a:r>
-              <a:rPr sz="1500" b="1">
+            <a:pPr algn="ctr"/>
+            <a:r>
+              <a:rPr sz="2400" b="1">
                 <a:solidFill>
-                  <a:srgbClr val="0F172A"/>
+                  <a:srgbClr val="4F46E5"/>
                 </a:solidFill>
-                <a:latin typeface="Calibri"/>
               </a:rPr>
-              <a:t>Ridge-NNLS (the fix, in equations)</a:t>
-            </a:r>
-          </a:p>
-        </p:txBody>
-      </p:sp>
-      <p:sp>
-        <p:nvSpPr>
-          <p:cNvPr id="13" name="TextBox 12"/>
+              <a:t>50 / 85 / 97</a:t>
+            </a:r>
+          </a:p>
+          <a:p>
+            <a:pPr algn="ctr"/>
+            <a:r>
+              <a:rPr sz="1050">
+                <a:solidFill>
+                  <a:srgbClr val="334155"/>
+                </a:solidFill>
+              </a:rPr>
+              <a:t>Band cutoffs
+(percentile of train risk scores)</a:t>
+            </a:r>
+          </a:p>
+        </p:txBody>
+      </p:sp>
+      <p:sp>
+        <p:nvSpPr>
+          <p:cNvPr id="13" name="Rectangle 12"/>
+          <p:cNvSpPr/>
+          <p:nvPr/>
+        </p:nvSpPr>
+        <p:spPr>
+          <a:xfrm>
+            <a:off x="3749039" y="4846320"/>
+            <a:ext cx="3108960" cy="1188720"/>
+          </a:xfrm>
+          <a:prstGeom prst="rect">
+            <a:avLst/>
+          </a:prstGeom>
+          <a:solidFill>
+            <a:srgbClr val="F4F6FB"/>
+          </a:solidFill>
+          <a:ln>
+            <a:noFill/>
+          </a:ln>
+        </p:spPr>
+        <p:style>
+          <a:lnRef idx="1">
+            <a:schemeClr val="accent1"/>
+          </a:lnRef>
+          <a:fillRef idx="3">
+            <a:schemeClr val="accent1"/>
+          </a:fillRef>
+          <a:effectRef idx="2">
+            <a:schemeClr val="accent1"/>
+          </a:effectRef>
+          <a:fontRef idx="minor">
+            <a:schemeClr val="lt1"/>
+          </a:fontRef>
+        </p:style>
+        <p:txBody>
+          <a:bodyPr rtlCol="0" anchor="ctr"/>
+          <a:lstStyle/>
+          <a:p>
+            <a:pPr algn="ctr"/>
+          </a:p>
+        </p:txBody>
+      </p:sp>
+      <p:sp>
+        <p:nvSpPr>
+          <p:cNvPr id="14" name="TextBox 13"/>
           <p:cNvSpPr txBox="1"/>
           <p:nvPr/>
         </p:nvSpPr>
         <p:spPr>
           <a:xfrm>
-            <a:off x="6492240" y="3703320"/>
-            <a:ext cx="5029200" cy="2468880"/>
+            <a:off x="3749039" y="4937760"/>
+            <a:ext cx="3108960" cy="1005840"/>
           </a:xfrm>
           <a:prstGeom prst="rect">
             <a:avLst/>
@@ -8811,93 +11602,115 @@
           </a:bodyPr>
           <a:lstStyle/>
           <a:p>
-            <a:pPr>
-              <a:lnSpc>
-                <a:spcPct val="115000"/>
-              </a:lnSpc>
-              <a:spcAft>
-                <a:spcPts val="600"/>
-              </a:spcAft>
-              <a:defRPr sz="1300">
+            <a:pPr algn="ctr"/>
+            <a:r>
+              <a:rPr sz="2400" b="1">
+                <a:solidFill>
+                  <a:srgbClr val="4F46E5"/>
+                </a:solidFill>
+              </a:rPr>
+              <a:t>4</a:t>
+            </a:r>
+          </a:p>
+          <a:p>
+            <a:pPr algn="ctr"/>
+            <a:r>
+              <a:rPr sz="1050">
                 <a:solidFill>
                   <a:srgbClr val="334155"/>
                 </a:solidFill>
-              </a:defRPr>
-            </a:pPr>
-            <a:r>
-              <a:t>• Augmented system trick: solve NNLS on</a:t>
-            </a:r>
-          </a:p>
-          <a:p>
-            <a:pPr>
-              <a:lnSpc>
-                <a:spcPct val="115000"/>
-              </a:lnSpc>
-              <a:spcAft>
-                <a:spcPts val="600"/>
-              </a:spcAft>
-              <a:defRPr sz="1300">
+              </a:rPr>
+              <a:t>Bands: LOW / MEDIUM
+/ HIGH / CRITICAL</a:t>
+            </a:r>
+          </a:p>
+        </p:txBody>
+      </p:sp>
+      <p:sp>
+        <p:nvSpPr>
+          <p:cNvPr id="15" name="Rectangle 14"/>
+          <p:cNvSpPr/>
+          <p:nvPr/>
+        </p:nvSpPr>
+        <p:spPr>
+          <a:xfrm>
+            <a:off x="7040880" y="4846320"/>
+            <a:ext cx="4663440" cy="1188720"/>
+          </a:xfrm>
+          <a:prstGeom prst="rect">
+            <a:avLst/>
+          </a:prstGeom>
+          <a:solidFill>
+            <a:srgbClr val="F4F6FB"/>
+          </a:solidFill>
+          <a:ln>
+            <a:noFill/>
+          </a:ln>
+        </p:spPr>
+        <p:style>
+          <a:lnRef idx="1">
+            <a:schemeClr val="accent1"/>
+          </a:lnRef>
+          <a:fillRef idx="3">
+            <a:schemeClr val="accent1"/>
+          </a:fillRef>
+          <a:effectRef idx="2">
+            <a:schemeClr val="accent1"/>
+          </a:effectRef>
+          <a:fontRef idx="minor">
+            <a:schemeClr val="lt1"/>
+          </a:fontRef>
+        </p:style>
+        <p:txBody>
+          <a:bodyPr rtlCol="0" anchor="ctr"/>
+          <a:lstStyle/>
+          <a:p>
+            <a:pPr algn="ctr"/>
+          </a:p>
+        </p:txBody>
+      </p:sp>
+      <p:sp>
+        <p:nvSpPr>
+          <p:cNvPr id="16" name="TextBox 15"/>
+          <p:cNvSpPr txBox="1"/>
+          <p:nvPr/>
+        </p:nvSpPr>
+        <p:spPr>
+          <a:xfrm>
+            <a:off x="7040880" y="4937760"/>
+            <a:ext cx="4663440" cy="1005840"/>
+          </a:xfrm>
+          <a:prstGeom prst="rect">
+            <a:avLst/>
+          </a:prstGeom>
+          <a:noFill/>
+        </p:spPr>
+        <p:txBody>
+          <a:bodyPr wrap="square">
+            <a:spAutoFit/>
+          </a:bodyPr>
+          <a:lstStyle/>
+          <a:p>
+            <a:pPr algn="ctr"/>
+            <a:r>
+              <a:rPr sz="2400" b="1">
+                <a:solidFill>
+                  <a:srgbClr val="4F46E5"/>
+                </a:solidFill>
+              </a:rPr>
+              <a:t>target_count_60m</a:t>
+            </a:r>
+          </a:p>
+          <a:p>
+            <a:pPr algn="ctr"/>
+            <a:r>
+              <a:rPr sz="1050">
                 <a:solidFill>
                   <a:srgbClr val="334155"/>
                 </a:solidFill>
-              </a:defRPr>
-            </a:pPr>
-            <a:r>
-              <a:t>    – [X; √α·I] β ≈ [y; 0]</a:t>
-            </a:r>
-          </a:p>
-          <a:p>
-            <a:pPr>
-              <a:lnSpc>
-                <a:spcPct val="115000"/>
-              </a:lnSpc>
-              <a:spcAft>
-                <a:spcPts val="600"/>
-              </a:spcAft>
-              <a:defRPr sz="1300">
-                <a:solidFill>
-                  <a:srgbClr val="334155"/>
-                </a:solidFill>
-              </a:defRPr>
-            </a:pPr>
-            <a:r>
-              <a:t>• equivalent to ridge-penalized least squares, with the non-negativity constraint preserved</a:t>
-            </a:r>
-          </a:p>
-          <a:p>
-            <a:pPr>
-              <a:lnSpc>
-                <a:spcPct val="115000"/>
-              </a:lnSpc>
-              <a:spcAft>
-                <a:spcPts val="600"/>
-              </a:spcAft>
-              <a:defRPr sz="1300">
-                <a:solidFill>
-                  <a:srgbClr val="334155"/>
-                </a:solidFill>
-              </a:defRPr>
-            </a:pPr>
-            <a:r>
-              <a:t>• Band cutoffs: 50th / 85th / 97th percentile of train-period risk scores → LOW / MEDIUM / HIGH / CRITICAL</a:t>
-            </a:r>
-          </a:p>
-          <a:p>
-            <a:pPr>
-              <a:lnSpc>
-                <a:spcPct val="115000"/>
-              </a:lnSpc>
-              <a:spcAft>
-                <a:spcPts val="600"/>
-              </a:spcAft>
-              <a:defRPr sz="1300">
-                <a:solidFill>
-                  <a:srgbClr val="334155"/>
-                </a:solidFill>
-              </a:defRPr>
-            </a:pPr>
-            <a:r>
-              <a:t>• Everything refit automatically on every retrain — no more frozen, hand-tuned constants</a:t>
+              </a:rPr>
+              <a:t>Outcome proxy used for fitting
+(no ground-truth congestion data exists)</a:t>
             </a:r>
           </a:p>
         </p:txBody>
@@ -8991,7 +11804,6 @@
                 <a:solidFill>
                   <a:srgbClr val="FFFFFF"/>
                 </a:solidFill>
-                <a:latin typeface="Calibri"/>
               </a:rPr>
               <a:t>Spatial Generalization Testing</a:t>
             </a:r>
@@ -9026,7 +11838,6 @@
                 <a:solidFill>
                   <a:srgbClr val="C7D2FE"/>
                 </a:solidFill>
-                <a:latin typeface="Calibri"/>
               </a:rPr>
               <a:t>Does the model work on geography it's never seen?</a:t>
             </a:r>
@@ -9084,8 +11895,8 @@
         </p:nvSpPr>
         <p:spPr>
           <a:xfrm>
-            <a:off x="548640" y="1188720"/>
-            <a:ext cx="11064240" cy="914400"/>
+            <a:off x="457200" y="1143000"/>
+            <a:ext cx="11155680" cy="548640"/>
           </a:xfrm>
           <a:prstGeom prst="rect">
             <a:avLst/>
@@ -9098,21 +11909,14 @@
           </a:bodyPr>
           <a:lstStyle/>
           <a:p>
-            <a:pPr>
-              <a:lnSpc>
-                <a:spcPct val="115000"/>
-              </a:lnSpc>
-              <a:spcAft>
-                <a:spcPts val="600"/>
-              </a:spcAft>
-              <a:defRPr sz="1500">
+            <a:pPr algn="l"/>
+            <a:r>
+              <a:rPr sz="1400" b="0">
                 <a:solidFill>
                   <a:srgbClr val="334155"/>
                 </a:solidFill>
-              </a:defRPr>
-            </a:pPr>
-            <a:r>
-              <a:t>• Methodology: split H3 cells (not rows) into train/holdout sets — 1,824 train cells, 455 holdout cells, entirely unseen during training. Compare PR-AUC on seen-cell rows (37,032) vs unseen-cell rows (7,289)</a:t>
+              </a:rPr>
+              <a:t>Methodology: split H3 cells (not rows) into 1,824 train cells / 455 holdout cells, entirely unseen during training</a:t>
             </a:r>
           </a:p>
         </p:txBody>
@@ -9125,8 +11929,8 @@
         </p:nvSpPr>
         <p:spPr>
           <a:xfrm>
-            <a:off x="548640" y="2240280"/>
-            <a:ext cx="2468880" cy="1188720"/>
+            <a:off x="457200" y="1737360"/>
+            <a:ext cx="2697480" cy="1097280"/>
           </a:xfrm>
           <a:prstGeom prst="rect">
             <a:avLst/>
@@ -9168,8 +11972,8 @@
         </p:nvSpPr>
         <p:spPr>
           <a:xfrm>
-            <a:off x="548640" y="2331720"/>
-            <a:ext cx="2468880" cy="1005840"/>
+            <a:off x="457200" y="1828800"/>
+            <a:ext cx="2697480" cy="914400"/>
           </a:xfrm>
           <a:prstGeom prst="rect">
             <a:avLst/>
@@ -9184,7 +11988,7 @@
           <a:p>
             <a:pPr algn="ctr"/>
             <a:r>
-              <a:rPr sz="2600" b="1">
+              <a:rPr sz="2400" b="1">
                 <a:solidFill>
                   <a:srgbClr val="4F46E5"/>
                 </a:solidFill>
@@ -9195,7 +11999,7 @@
           <a:p>
             <a:pPr algn="ctr"/>
             <a:r>
-              <a:rPr sz="1100">
+              <a:rPr sz="1050">
                 <a:solidFill>
                   <a:srgbClr val="334155"/>
                 </a:solidFill>
@@ -9213,8 +12017,8 @@
         </p:nvSpPr>
         <p:spPr>
           <a:xfrm>
-            <a:off x="3200400" y="2240280"/>
-            <a:ext cx="2468880" cy="1188720"/>
+            <a:off x="3291840" y="1737360"/>
+            <a:ext cx="2697480" cy="1097280"/>
           </a:xfrm>
           <a:prstGeom prst="rect">
             <a:avLst/>
@@ -9256,8 +12060,8 @@
         </p:nvSpPr>
         <p:spPr>
           <a:xfrm>
-            <a:off x="3200400" y="2331720"/>
-            <a:ext cx="2468880" cy="1005840"/>
+            <a:off x="3291840" y="1828800"/>
+            <a:ext cx="2697480" cy="914400"/>
           </a:xfrm>
           <a:prstGeom prst="rect">
             <a:avLst/>
@@ -9272,7 +12076,7 @@
           <a:p>
             <a:pPr algn="ctr"/>
             <a:r>
-              <a:rPr sz="2600" b="1">
+              <a:rPr sz="2400" b="1">
                 <a:solidFill>
                   <a:srgbClr val="4F46E5"/>
                 </a:solidFill>
@@ -9283,7 +12087,7 @@
           <a:p>
             <a:pPr algn="ctr"/>
             <a:r>
-              <a:rPr sz="1100">
+              <a:rPr sz="1050">
                 <a:solidFill>
                   <a:srgbClr val="334155"/>
                 </a:solidFill>
@@ -9301,8 +12105,8 @@
         </p:nvSpPr>
         <p:spPr>
           <a:xfrm>
-            <a:off x="5852160" y="2240280"/>
-            <a:ext cx="2468880" cy="1188720"/>
+            <a:off x="6126480" y="1737360"/>
+            <a:ext cx="2697480" cy="1097280"/>
           </a:xfrm>
           <a:prstGeom prst="rect">
             <a:avLst/>
@@ -9344,8 +12148,8 @@
         </p:nvSpPr>
         <p:spPr>
           <a:xfrm>
-            <a:off x="5852160" y="2331720"/>
-            <a:ext cx="2468880" cy="1005840"/>
+            <a:off x="6126480" y="1828800"/>
+            <a:ext cx="2697480" cy="914400"/>
           </a:xfrm>
           <a:prstGeom prst="rect">
             <a:avLst/>
@@ -9360,7 +12164,7 @@
           <a:p>
             <a:pPr algn="ctr"/>
             <a:r>
-              <a:rPr sz="2600" b="1">
+              <a:rPr sz="2400" b="1">
                 <a:solidFill>
                   <a:srgbClr val="B45309"/>
                 </a:solidFill>
@@ -9371,7 +12175,7 @@
           <a:p>
             <a:pPr algn="ctr"/>
             <a:r>
-              <a:rPr sz="1100">
+              <a:rPr sz="1050">
                 <a:solidFill>
                   <a:srgbClr val="334155"/>
                 </a:solidFill>
@@ -9389,8 +12193,8 @@
         </p:nvSpPr>
         <p:spPr>
           <a:xfrm>
-            <a:off x="8503920" y="2240280"/>
-            <a:ext cx="2834640" cy="1188720"/>
+            <a:off x="8961120" y="1737360"/>
+            <a:ext cx="2697480" cy="1097280"/>
           </a:xfrm>
           <a:prstGeom prst="rect">
             <a:avLst/>
@@ -9432,8 +12236,8 @@
         </p:nvSpPr>
         <p:spPr>
           <a:xfrm>
-            <a:off x="8503920" y="2331720"/>
-            <a:ext cx="2834640" cy="1005840"/>
+            <a:off x="8961120" y="1828800"/>
+            <a:ext cx="2697480" cy="914400"/>
           </a:xfrm>
           <a:prstGeom prst="rect">
             <a:avLst/>
@@ -9448,7 +12252,7 @@
           <a:p>
             <a:pPr algn="ctr"/>
             <a:r>
-              <a:rPr sz="2600" b="1">
+              <a:rPr sz="2400" b="1">
                 <a:solidFill>
                   <a:srgbClr val="15803D"/>
                 </a:solidFill>
@@ -9459,52 +12263,34 @@
           <a:p>
             <a:pPr algn="ctr"/>
             <a:r>
-              <a:rPr sz="1100">
+              <a:rPr sz="1050">
                 <a:solidFill>
                   <a:srgbClr val="334155"/>
                 </a:solidFill>
               </a:rPr>
-              <a:t>Accuracy retained
-on new geography</a:t>
-            </a:r>
-          </a:p>
-        </p:txBody>
-      </p:sp>
-      <p:sp>
-        <p:nvSpPr>
-          <p:cNvPr id="15" name="TextBox 14"/>
-          <p:cNvSpPr txBox="1"/>
-          <p:nvPr/>
-        </p:nvSpPr>
-        <p:spPr>
-          <a:xfrm>
-            <a:off x="548640" y="3657600"/>
-            <a:ext cx="11064240" cy="365760"/>
-          </a:xfrm>
-          <a:prstGeom prst="rect">
-            <a:avLst/>
-          </a:prstGeom>
-          <a:noFill/>
-        </p:spPr>
-        <p:txBody>
-          <a:bodyPr wrap="square">
-            <a:spAutoFit/>
-          </a:bodyPr>
-          <a:lstStyle/>
-          <a:p>
-            <a:pPr algn="l"/>
-            <a:r>
-              <a:rPr sz="1500" b="1">
-                <a:solidFill>
-                  <a:srgbClr val="0F172A"/>
-                </a:solidFill>
-                <a:latin typeface="Calibri"/>
-              </a:rPr>
-              <a:t>Progress across two rounds of measured fixes (not a single number, a trend):</a:t>
-            </a:r>
-          </a:p>
-        </p:txBody>
-      </p:sp>
+              <a:t>Accuracy retained</a:t>
+            </a:r>
+          </a:p>
+        </p:txBody>
+      </p:sp>
+      <p:graphicFrame>
+        <p:nvGraphicFramePr>
+          <p:cNvPr id="15" name="Chart 14"/>
+          <p:cNvGraphicFramePr>
+            <a:graphicFrameLocks noGrp="1"/>
+          </p:cNvGraphicFramePr>
+          <p:nvPr/>
+        </p:nvGraphicFramePr>
+        <p:xfrm>
+          <a:off x="457200" y="3017520"/>
+          <a:ext cx="5486400" cy="3291840"/>
+        </p:xfrm>
+        <a:graphic>
+          <a:graphicData uri="http://schemas.openxmlformats.org/drawingml/2006/chart">
+            <c:chart xmlns:c="http://schemas.openxmlformats.org/drawingml/2006/chart" r:id="rId2"/>
+          </a:graphicData>
+        </a:graphic>
+      </p:graphicFrame>
       <p:graphicFrame>
         <p:nvGraphicFramePr>
           <p:cNvPr id="16" name="Table 15"/>
@@ -9514,8 +12300,8 @@
           <p:nvPr/>
         </p:nvGraphicFramePr>
         <p:xfrm>
-          <a:off x="548640" y="4069080"/>
-          <a:ext cx="11064240" cy="1737360"/>
+          <a:off x="6263640" y="3017520"/>
+          <a:ext cx="5394960" cy="3108960"/>
         </p:xfrm>
         <a:graphic>
           <a:graphicData uri="http://schemas.openxmlformats.org/drawingml/2006/table">
@@ -9524,11 +12310,10 @@
                 <a:tableStyleId>{5C22544A-7EE6-4342-B048-85BDC9FD1C3A}</a:tableStyleId>
               </a:tblPr>
               <a:tblGrid>
-                <a:gridCol w="2743200"/>
-                <a:gridCol w="1645920"/>
-                <a:gridCol w="6675120"/>
+                <a:gridCol w="1371600"/>
+                <a:gridCol w="4023360"/>
               </a:tblGrid>
-              <a:tr h="434340">
+              <a:tr h="621792">
                 <a:tc>
                   <a:txBody>
                     <a:bodyPr/>
@@ -9546,7 +12331,7 @@
                       </a:r>
                     </a:p>
                   </a:txBody>
-                  <a:tcPr>
+                  <a:tcPr marT="25400" marB="25400">
                     <a:solidFill>
                       <a:srgbClr val="0F172A"/>
                     </a:solidFill>
@@ -9565,41 +12350,18 @@
                         </a:defRPr>
                       </a:pPr>
                       <a:r>
-                        <a:t>PR-AUC drop</a:t>
-                      </a:r>
-                    </a:p>
-                  </a:txBody>
-                  <a:tcPr>
+                        <a:t>Change made</a:t>
+                      </a:r>
+                    </a:p>
+                  </a:txBody>
+                  <a:tcPr marT="25400" marB="25400">
                     <a:solidFill>
                       <a:srgbClr val="0F172A"/>
                     </a:solidFill>
                   </a:tcPr>
                 </a:tc>
-                <a:tc>
-                  <a:txBody>
-                    <a:bodyPr/>
-                    <a:lstStyle/>
-                    <a:p>
-                      <a:pPr>
-                        <a:defRPr sz="1200" b="1">
-                          <a:solidFill>
-                            <a:srgbClr val="FFFFFF"/>
-                          </a:solidFill>
-                        </a:defRPr>
-                      </a:pPr>
-                      <a:r>
-                        <a:t>Change made</a:t>
-                      </a:r>
-                    </a:p>
-                  </a:txBody>
-                  <a:tcPr>
-                    <a:solidFill>
-                      <a:srgbClr val="0F172A"/>
-                    </a:solidFill>
-                  </a:tcPr>
-                </a:tc>
               </a:tr>
-              <a:tr h="434340">
+              <a:tr h="621792">
                 <a:tc>
                   <a:txBody>
                     <a:bodyPr/>
@@ -9613,11 +12375,11 @@
                         </a:defRPr>
                       </a:pPr>
                       <a:r>
-                        <a:t>Original (Phase 4 frozen model)</a:t>
-                      </a:r>
-                    </a:p>
-                  </a:txBody>
-                  <a:tcPr>
+                        <a:t>Original</a:t>
+                      </a:r>
+                    </a:p>
+                  </a:txBody>
+                  <a:tcPr marT="25400" marB="25400">
                     <a:solidFill>
                       <a:srgbClr val="FFFFFF"/>
                     </a:solidFill>
@@ -9636,16 +12398,18 @@
                         </a:defRPr>
                       </a:pPr>
                       <a:r>
-                        <a:t>7.88%</a:t>
-                      </a:r>
-                    </a:p>
-                  </a:txBody>
-                  <a:tcPr>
+                        <a:t>Raw h3_cell/geohash kept as categorical inputs</a:t>
+                      </a:r>
+                    </a:p>
+                  </a:txBody>
+                  <a:tcPr marT="25400" marB="25400">
                     <a:solidFill>
                       <a:srgbClr val="FFFFFF"/>
                     </a:solidFill>
                   </a:tcPr>
                 </a:tc>
+              </a:tr>
+              <a:tr h="621792">
                 <a:tc>
                   <a:txBody>
                     <a:bodyPr/>
@@ -9659,18 +12423,89 @@
                         </a:defRPr>
                       </a:pPr>
                       <a:r>
-                        <a:t>Raw h3_cell/geohash kept as categorical model inputs</a:t>
-                      </a:r>
-                    </a:p>
-                  </a:txBody>
-                  <a:tcPr>
+                        <a:t>ADR-022</a:t>
+                      </a:r>
+                    </a:p>
+                  </a:txBody>
+                  <a:tcPr marT="25400" marB="25400">
+                    <a:solidFill>
+                      <a:srgbClr val="F4F6FB"/>
+                    </a:solidFill>
+                  </a:tcPr>
+                </a:tc>
+                <a:tc>
+                  <a:txBody>
+                    <a:bodyPr/>
+                    <a:lstStyle/>
+                    <a:p>
+                      <a:pPr>
+                        <a:defRPr sz="1200" b="0">
+                          <a:solidFill>
+                            <a:srgbClr val="334155"/>
+                          </a:solidFill>
+                        </a:defRPr>
+                      </a:pPr>
+                      <a:r>
+                        <a:t>Dropped cell identity, added 6 neighbor-averaged density features</a:t>
+                      </a:r>
+                    </a:p>
+                  </a:txBody>
+                  <a:tcPr marT="25400" marB="25400">
+                    <a:solidFill>
+                      <a:srgbClr val="F4F6FB"/>
+                    </a:solidFill>
+                  </a:tcPr>
+                </a:tc>
+              </a:tr>
+              <a:tr h="621792">
+                <a:tc>
+                  <a:txBody>
+                    <a:bodyPr/>
+                    <a:lstStyle/>
+                    <a:p>
+                      <a:pPr>
+                        <a:defRPr sz="1200" b="0">
+                          <a:solidFill>
+                            <a:srgbClr val="334155"/>
+                          </a:solidFill>
+                        </a:defRPr>
+                      </a:pPr>
+                      <a:r>
+                        <a:t>ADR-025</a:t>
+                      </a:r>
+                    </a:p>
+                  </a:txBody>
+                  <a:tcPr marT="25400" marB="25400">
                     <a:solidFill>
                       <a:srgbClr val="FFFFFF"/>
                     </a:solidFill>
                   </a:tcPr>
                 </a:tc>
+                <a:tc>
+                  <a:txBody>
+                    <a:bodyPr/>
+                    <a:lstStyle/>
+                    <a:p>
+                      <a:pPr>
+                        <a:defRPr sz="1200" b="0">
+                          <a:solidFill>
+                            <a:srgbClr val="334155"/>
+                          </a:solidFill>
+                        </a:defRPr>
+                      </a:pPr>
+                      <a:r>
+                        <a:t>Regularization sweep: depth 6→3, l2_leaf_reg 3→25</a:t>
+                      </a:r>
+                    </a:p>
+                  </a:txBody>
+                  <a:tcPr marT="25400" marB="25400">
+                    <a:solidFill>
+                      <a:srgbClr val="FFFFFF"/>
+                    </a:solidFill>
+                  </a:tcPr>
+                </a:tc>
               </a:tr>
-              <a:tr h="434340">
+              <a:tr h="621792">
                 <a:tc>
                   <a:txBody>
                     <a:bodyPr/>
@@ -9684,11 +12519,11 @@
                         </a:defRPr>
                       </a:pPr>
                       <a:r>
-                        <a:t>ADR-022 fix</a:t>
-                      </a:r>
-                    </a:p>
-                  </a:txBody>
-                  <a:tcPr>
+                        <a:t>Net result</a:t>
+                      </a:r>
+                    </a:p>
+                  </a:txBody>
+                  <a:tcPr marT="25400" marB="25400">
                     <a:solidFill>
                       <a:srgbClr val="F4F6FB"/>
                     </a:solidFill>
@@ -9707,107 +12542,13 @@
                         </a:defRPr>
                       </a:pPr>
                       <a:r>
-                        <a:t>6.32%</a:t>
-                      </a:r>
-                    </a:p>
-                  </a:txBody>
-                  <a:tcPr>
+                        <a:t>~28% relative improvement, still above the 5% bar — disclosed honestly</a:t>
+                      </a:r>
+                    </a:p>
+                  </a:txBody>
+                  <a:tcPr marT="25400" marB="25400">
                     <a:solidFill>
                       <a:srgbClr val="F4F6FB"/>
-                    </a:solidFill>
-                  </a:tcPr>
-                </a:tc>
-                <a:tc>
-                  <a:txBody>
-                    <a:bodyPr/>
-                    <a:lstStyle/>
-                    <a:p>
-                      <a:pPr>
-                        <a:defRPr sz="1200" b="0">
-                          <a:solidFill>
-                            <a:srgbClr val="334155"/>
-                          </a:solidFill>
-                        </a:defRPr>
-                      </a:pPr>
-                      <a:r>
-                        <a:t>Dropped h3_cell/geohash, added 6 neighbor-averaged density features (ring-1, merge_asof)</a:t>
-                      </a:r>
-                    </a:p>
-                  </a:txBody>
-                  <a:tcPr>
-                    <a:solidFill>
-                      <a:srgbClr val="F4F6FB"/>
-                    </a:solidFill>
-                  </a:tcPr>
-                </a:tc>
-              </a:tr>
-              <a:tr h="434340">
-                <a:tc>
-                  <a:txBody>
-                    <a:bodyPr/>
-                    <a:lstStyle/>
-                    <a:p>
-                      <a:pPr>
-                        <a:defRPr sz="1200" b="0">
-                          <a:solidFill>
-                            <a:srgbClr val="334155"/>
-                          </a:solidFill>
-                        </a:defRPr>
-                      </a:pPr>
-                      <a:r>
-                        <a:t>ADR-025 fix</a:t>
-                      </a:r>
-                    </a:p>
-                  </a:txBody>
-                  <a:tcPr>
-                    <a:solidFill>
-                      <a:srgbClr val="FFFFFF"/>
-                    </a:solidFill>
-                  </a:tcPr>
-                </a:tc>
-                <a:tc>
-                  <a:txBody>
-                    <a:bodyPr/>
-                    <a:lstStyle/>
-                    <a:p>
-                      <a:pPr>
-                        <a:defRPr sz="1200" b="0">
-                          <a:solidFill>
-                            <a:srgbClr val="334155"/>
-                          </a:solidFill>
-                        </a:defRPr>
-                      </a:pPr>
-                      <a:r>
-                        <a:t>5.66%</a:t>
-                      </a:r>
-                    </a:p>
-                  </a:txBody>
-                  <a:tcPr>
-                    <a:solidFill>
-                      <a:srgbClr val="FFFFFF"/>
-                    </a:solidFill>
-                  </a:tcPr>
-                </a:tc>
-                <a:tc>
-                  <a:txBody>
-                    <a:bodyPr/>
-                    <a:lstStyle/>
-                    <a:p>
-                      <a:pPr>
-                        <a:defRPr sz="1200" b="0">
-                          <a:solidFill>
-                            <a:srgbClr val="334155"/>
-                          </a:solidFill>
-                        </a:defRPr>
-                      </a:pPr>
-                      <a:r>
-                        <a:t>Classifier regularization sweep: depth 6→3, l2_leaf_reg 3→25 (15+ configs tested)</a:t>
-                      </a:r>
-                    </a:p>
-                  </a:txBody>
-                  <a:tcPr>
-                    <a:solidFill>
-                      <a:srgbClr val="FFFFFF"/>
                     </a:solidFill>
                   </a:tcPr>
                 </a:tc>
@@ -9816,41 +12557,6 @@
           </a:graphicData>
         </a:graphic>
       </p:graphicFrame>
-      <p:sp>
-        <p:nvSpPr>
-          <p:cNvPr id="17" name="TextBox 16"/>
-          <p:cNvSpPr txBox="1"/>
-          <p:nvPr/>
-        </p:nvSpPr>
-        <p:spPr>
-          <a:xfrm>
-            <a:off x="548640" y="5943600"/>
-            <a:ext cx="11064240" cy="548640"/>
-          </a:xfrm>
-          <a:prstGeom prst="rect">
-            <a:avLst/>
-          </a:prstGeom>
-          <a:noFill/>
-        </p:spPr>
-        <p:txBody>
-          <a:bodyPr wrap="square">
-            <a:spAutoFit/>
-          </a:bodyPr>
-          <a:lstStyle/>
-          <a:p>
-            <a:pPr algn="l"/>
-            <a:r>
-              <a:rPr sz="1250" b="0">
-                <a:solidFill>
-                  <a:srgbClr val="334155"/>
-                </a:solidFill>
-                <a:latin typeface="Calibri"/>
-              </a:rPr>
-              <a:t>Net result: ~28% relative improvement (7.88% → 5.66%). Still above the project's own 5% bar — honestly reported, not rounded up. Widening the neighbor ring (k=2/3) and further regularization (depth=2/1) were tried; both hit diminishing returns or cost real accuracy.</a:t>
-            </a:r>
-          </a:p>
-        </p:txBody>
-      </p:sp>
     </p:spTree>
   </p:cSld>
   <p:clrMapOvr>
@@ -9940,7 +12646,6 @@
                 <a:solidFill>
                   <a:srgbClr val="FFFFFF"/>
                 </a:solidFill>
-                <a:latin typeface="Calibri"/>
               </a:rPr>
               <a:t>Hyperparameter Sweep (ADR-025)</a:t>
             </a:r>
@@ -9975,9 +12680,8 @@
                 <a:solidFill>
                   <a:srgbClr val="C7D2FE"/>
                 </a:solidFill>
-                <a:latin typeface="Calibri"/>
               </a:rPr>
-              <a:t>Was the gap a feature problem or an overfitting problem?</a:t>
+              <a:t>Overfitting problem, not a feature problem</a:t>
             </a:r>
           </a:p>
         </p:txBody>
@@ -10033,8 +12737,8 @@
         </p:nvSpPr>
         <p:spPr>
           <a:xfrm>
-            <a:off x="548640" y="1188720"/>
-            <a:ext cx="11064240" cy="731520"/>
+            <a:off x="457200" y="1143000"/>
+            <a:ext cx="11155680" cy="457200"/>
           </a:xfrm>
           <a:prstGeom prst="rect">
             <a:avLst/>
@@ -10047,36 +12751,47 @@
           </a:bodyPr>
           <a:lstStyle/>
           <a:p>
-            <a:pPr>
-              <a:lnSpc>
-                <a:spcPct val="115000"/>
-              </a:lnSpc>
-              <a:spcAft>
-                <a:spcPts val="600"/>
-              </a:spcAft>
-              <a:defRPr sz="1500">
+            <a:pPr algn="l"/>
+            <a:r>
+              <a:rPr sz="1350" b="0">
                 <a:solidFill>
                   <a:srgbClr val="334155"/>
                 </a:solidFill>
-              </a:defRPr>
-            </a:pPr>
-            <a:r>
-              <a:t>• Swept CatBoost depth, l2_leaf_reg, learning_rate, iterations, rsm, bagging_temperature, random_strength — ~15 configurations — against the same spatial holdout test</a:t>
+              </a:rPr>
+              <a:t>~15 configs swept (depth, l2_leaf_reg, learning_rate, iterations, rsm, bagging, random_strength) against the same spatial holdout test</a:t>
             </a:r>
           </a:p>
         </p:txBody>
       </p:sp>
       <p:graphicFrame>
         <p:nvGraphicFramePr>
-          <p:cNvPr id="7" name="Table 6"/>
+          <p:cNvPr id="7" name="Chart 6"/>
           <p:cNvGraphicFramePr>
             <a:graphicFrameLocks noGrp="1"/>
           </p:cNvGraphicFramePr>
           <p:nvPr/>
         </p:nvGraphicFramePr>
         <p:xfrm>
-          <a:off x="548640" y="2103120"/>
-          <a:ext cx="11064240" cy="2103120"/>
+          <a:off x="457200" y="1691640"/>
+          <a:ext cx="5760720" cy="3291840"/>
+        </p:xfrm>
+        <a:graphic>
+          <a:graphicData uri="http://schemas.openxmlformats.org/drawingml/2006/chart">
+            <c:chart xmlns:c="http://schemas.openxmlformats.org/drawingml/2006/chart" r:id="rId2"/>
+          </a:graphicData>
+        </a:graphic>
+      </p:graphicFrame>
+      <p:graphicFrame>
+        <p:nvGraphicFramePr>
+          <p:cNvPr id="8" name="Table 7"/>
+          <p:cNvGraphicFramePr>
+            <a:graphicFrameLocks noGrp="1"/>
+          </p:cNvGraphicFramePr>
+          <p:nvPr/>
+        </p:nvGraphicFramePr>
+        <p:xfrm>
+          <a:off x="6400800" y="1691640"/>
+          <a:ext cx="5257800" cy="3291840"/>
         </p:xfrm>
         <a:graphic>
           <a:graphicData uri="http://schemas.openxmlformats.org/drawingml/2006/table">
@@ -10085,13 +12800,12 @@
                 <a:tableStyleId>{5C22544A-7EE6-4342-B048-85BDC9FD1C3A}</a:tableStyleId>
               </a:tblPr>
               <a:tblGrid>
-                <a:gridCol w="3108960"/>
-                <a:gridCol w="1554480"/>
-                <a:gridCol w="1737360"/>
+                <a:gridCol w="1920240"/>
                 <a:gridCol w="1097280"/>
-                <a:gridCol w="3566160"/>
+                <a:gridCol w="1143000"/>
+                <a:gridCol w="1097280"/>
               </a:tblGrid>
-              <a:tr h="420624">
+              <a:tr h="658368">
                 <a:tc>
                   <a:txBody>
                     <a:bodyPr/>
@@ -10109,7 +12823,7 @@
                       </a:r>
                     </a:p>
                   </a:txBody>
-                  <a:tcPr>
+                  <a:tcPr marT="25400" marB="25400">
                     <a:solidFill>
                       <a:srgbClr val="0F172A"/>
                     </a:solidFill>
@@ -10128,11 +12842,11 @@
                         </a:defRPr>
                       </a:pPr>
                       <a:r>
-                        <a:t>Seen PR-AUC</a:t>
-                      </a:r>
-                    </a:p>
-                  </a:txBody>
-                  <a:tcPr>
+                        <a:t>Seen</a:t>
+                      </a:r>
+                    </a:p>
+                  </a:txBody>
+                  <a:tcPr marT="25400" marB="25400">
                     <a:solidFill>
                       <a:srgbClr val="0F172A"/>
                     </a:solidFill>
@@ -10151,11 +12865,11 @@
                         </a:defRPr>
                       </a:pPr>
                       <a:r>
-                        <a:t>Unseen PR-AUC</a:t>
-                      </a:r>
-                    </a:p>
-                  </a:txBody>
-                  <a:tcPr>
+                        <a:t>Unseen</a:t>
+                      </a:r>
+                    </a:p>
+                  </a:txBody>
+                  <a:tcPr marT="25400" marB="25400">
                     <a:solidFill>
                       <a:srgbClr val="0F172A"/>
                     </a:solidFill>
@@ -10174,41 +12888,18 @@
                         </a:defRPr>
                       </a:pPr>
                       <a:r>
-                        <a:t>Drop</a:t>
-                      </a:r>
-                    </a:p>
-                  </a:txBody>
-                  <a:tcPr>
+                        <a:t>Cost?</a:t>
+                      </a:r>
+                    </a:p>
+                  </a:txBody>
+                  <a:tcPr marT="25400" marB="25400">
                     <a:solidFill>
                       <a:srgbClr val="0F172A"/>
                     </a:solidFill>
                   </a:tcPr>
                 </a:tc>
-                <a:tc>
-                  <a:txBody>
-                    <a:bodyPr/>
-                    <a:lstStyle/>
-                    <a:p>
-                      <a:pPr>
-                        <a:defRPr sz="1150" b="1">
-                          <a:solidFill>
-                            <a:srgbClr val="FFFFFF"/>
-                          </a:solidFill>
-                        </a:defRPr>
-                      </a:pPr>
-                      <a:r>
-                        <a:t>Verdict</a:t>
-                      </a:r>
-                    </a:p>
-                  </a:txBody>
-                  <a:tcPr>
-                    <a:solidFill>
-                      <a:srgbClr val="0F172A"/>
-                    </a:solidFill>
-                  </a:tcPr>
-                </a:tc>
               </a:tr>
-              <a:tr h="420624">
+              <a:tr h="658368">
                 <a:tc>
                   <a:txBody>
                     <a:bodyPr/>
@@ -10222,11 +12913,11 @@
                         </a:defRPr>
                       </a:pPr>
                       <a:r>
-                        <a:t>depth=6, l2=3 (original default)</a:t>
-                      </a:r>
-                    </a:p>
-                  </a:txBody>
-                  <a:tcPr>
+                        <a:t>depth=6, l2=3</a:t>
+                      </a:r>
+                    </a:p>
+                  </a:txBody>
+                  <a:tcPr marT="25400" marB="25400">
                     <a:solidFill>
                       <a:srgbClr val="FFFFFF"/>
                     </a:solidFill>
@@ -10249,7 +12940,7 @@
                       </a:r>
                     </a:p>
                   </a:txBody>
-                  <a:tcPr>
+                  <a:tcPr marT="25400" marB="25400">
                     <a:solidFill>
                       <a:srgbClr val="FFFFFF"/>
                     </a:solidFill>
@@ -10272,7 +12963,7 @@
                       </a:r>
                     </a:p>
                   </a:txBody>
-                  <a:tcPr>
+                  <a:tcPr marT="25400" marB="25400">
                     <a:solidFill>
                       <a:srgbClr val="FFFFFF"/>
                     </a:solidFill>
@@ -10291,16 +12982,18 @@
                         </a:defRPr>
                       </a:pPr>
                       <a:r>
-                        <a:t>6.32%</a:t>
-                      </a:r>
-                    </a:p>
-                  </a:txBody>
-                  <a:tcPr>
+                        <a:t>Baseline</a:t>
+                      </a:r>
+                    </a:p>
+                  </a:txBody>
+                  <a:tcPr marT="25400" marB="25400">
                     <a:solidFill>
                       <a:srgbClr val="FFFFFF"/>
                     </a:solidFill>
                   </a:tcPr>
                 </a:tc>
+              </a:tr>
+              <a:tr h="658368">
                 <a:tc>
                   <a:txBody>
                     <a:bodyPr/>
@@ -10314,135 +13007,181 @@
                         </a:defRPr>
                       </a:pPr>
                       <a:r>
-                        <a:t>Baseline</a:t>
-                      </a:r>
-                    </a:p>
-                  </a:txBody>
-                  <a:tcPr>
+                        <a:t>depth=3, l2=25 ✓</a:t>
+                      </a:r>
+                    </a:p>
+                  </a:txBody>
+                  <a:tcPr marT="25400" marB="25400">
+                    <a:solidFill>
+                      <a:srgbClr val="F4F6FB"/>
+                    </a:solidFill>
+                  </a:tcPr>
+                </a:tc>
+                <a:tc>
+                  <a:txBody>
+                    <a:bodyPr/>
+                    <a:lstStyle/>
+                    <a:p>
+                      <a:pPr>
+                        <a:defRPr sz="1150" b="0">
+                          <a:solidFill>
+                            <a:srgbClr val="334155"/>
+                          </a:solidFill>
+                        </a:defRPr>
+                      </a:pPr>
+                      <a:r>
+                        <a:t>0.8796</a:t>
+                      </a:r>
+                    </a:p>
+                  </a:txBody>
+                  <a:tcPr marT="25400" marB="25400">
+                    <a:solidFill>
+                      <a:srgbClr val="F4F6FB"/>
+                    </a:solidFill>
+                  </a:tcPr>
+                </a:tc>
+                <a:tc>
+                  <a:txBody>
+                    <a:bodyPr/>
+                    <a:lstStyle/>
+                    <a:p>
+                      <a:pPr>
+                        <a:defRPr sz="1150" b="0">
+                          <a:solidFill>
+                            <a:srgbClr val="334155"/>
+                          </a:solidFill>
+                        </a:defRPr>
+                      </a:pPr>
+                      <a:r>
+                        <a:t>0.8298</a:t>
+                      </a:r>
+                    </a:p>
+                  </a:txBody>
+                  <a:tcPr marT="25400" marB="25400">
+                    <a:solidFill>
+                      <a:srgbClr val="F4F6FB"/>
+                    </a:solidFill>
+                  </a:tcPr>
+                </a:tc>
+                <a:tc>
+                  <a:txBody>
+                    <a:bodyPr/>
+                    <a:lstStyle/>
+                    <a:p>
+                      <a:pPr>
+                        <a:defRPr sz="1150" b="0">
+                          <a:solidFill>
+                            <a:srgbClr val="334155"/>
+                          </a:solidFill>
+                        </a:defRPr>
+                      </a:pPr>
+                      <a:r>
+                        <a:t>None — wins both</a:t>
+                      </a:r>
+                    </a:p>
+                  </a:txBody>
+                  <a:tcPr marT="25400" marB="25400">
+                    <a:solidFill>
+                      <a:srgbClr val="F4F6FB"/>
+                    </a:solidFill>
+                  </a:tcPr>
+                </a:tc>
+              </a:tr>
+              <a:tr h="658368">
+                <a:tc>
+                  <a:txBody>
+                    <a:bodyPr/>
+                    <a:lstStyle/>
+                    <a:p>
+                      <a:pPr>
+                        <a:defRPr sz="1150" b="0">
+                          <a:solidFill>
+                            <a:srgbClr val="334155"/>
+                          </a:solidFill>
+                        </a:defRPr>
+                      </a:pPr>
+                      <a:r>
+                        <a:t>depth=2, l2=40</a:t>
+                      </a:r>
+                    </a:p>
+                  </a:txBody>
+                  <a:tcPr marT="25400" marB="25400">
                     <a:solidFill>
                       <a:srgbClr val="FFFFFF"/>
                     </a:solidFill>
                   </a:tcPr>
                 </a:tc>
+                <a:tc>
+                  <a:txBody>
+                    <a:bodyPr/>
+                    <a:lstStyle/>
+                    <a:p>
+                      <a:pPr>
+                        <a:defRPr sz="1150" b="0">
+                          <a:solidFill>
+                            <a:srgbClr val="334155"/>
+                          </a:solidFill>
+                        </a:defRPr>
+                      </a:pPr>
+                      <a:r>
+                        <a:t>0.8765</a:t>
+                      </a:r>
+                    </a:p>
+                  </a:txBody>
+                  <a:tcPr marT="25400" marB="25400">
+                    <a:solidFill>
+                      <a:srgbClr val="FFFFFF"/>
+                    </a:solidFill>
+                  </a:tcPr>
+                </a:tc>
+                <a:tc>
+                  <a:txBody>
+                    <a:bodyPr/>
+                    <a:lstStyle/>
+                    <a:p>
+                      <a:pPr>
+                        <a:defRPr sz="1150" b="0">
+                          <a:solidFill>
+                            <a:srgbClr val="334155"/>
+                          </a:solidFill>
+                        </a:defRPr>
+                      </a:pPr>
+                      <a:r>
+                        <a:t>0.8280</a:t>
+                      </a:r>
+                    </a:p>
+                  </a:txBody>
+                  <a:tcPr marT="25400" marB="25400">
+                    <a:solidFill>
+                      <a:srgbClr val="FFFFFF"/>
+                    </a:solidFill>
+                  </a:tcPr>
+                </a:tc>
+                <a:tc>
+                  <a:txBody>
+                    <a:bodyPr/>
+                    <a:lstStyle/>
+                    <a:p>
+                      <a:pPr>
+                        <a:defRPr sz="1150" b="0">
+                          <a:solidFill>
+                            <a:srgbClr val="334155"/>
+                          </a:solidFill>
+                        </a:defRPr>
+                      </a:pPr>
+                      <a:r>
+                        <a:t>Small accuracy loss</a:t>
+                      </a:r>
+                    </a:p>
+                  </a:txBody>
+                  <a:tcPr marT="25400" marB="25400">
+                    <a:solidFill>
+                      <a:srgbClr val="FFFFFF"/>
+                    </a:solidFill>
+                  </a:tcPr>
+                </a:tc>
               </a:tr>
-              <a:tr h="420624">
-                <a:tc>
-                  <a:txBody>
-                    <a:bodyPr/>
-                    <a:lstStyle/>
-                    <a:p>
-                      <a:pPr>
-                        <a:defRPr sz="1150" b="1">
-                          <a:solidFill>
-                            <a:srgbClr val="15803D"/>
-                          </a:solidFill>
-                        </a:defRPr>
-                      </a:pPr>
-                      <a:r>
-                        <a:t>depth=3, l2=25  ← ADOPTED</a:t>
-                      </a:r>
-                    </a:p>
-                  </a:txBody>
-                  <a:tcPr>
-                    <a:solidFill>
-                      <a:srgbClr val="ECFDF5"/>
-                    </a:solidFill>
-                  </a:tcPr>
-                </a:tc>
-                <a:tc>
-                  <a:txBody>
-                    <a:bodyPr/>
-                    <a:lstStyle/>
-                    <a:p>
-                      <a:pPr>
-                        <a:defRPr sz="1150" b="1">
-                          <a:solidFill>
-                            <a:srgbClr val="15803D"/>
-                          </a:solidFill>
-                        </a:defRPr>
-                      </a:pPr>
-                      <a:r>
-                        <a:t>0.8796</a:t>
-                      </a:r>
-                    </a:p>
-                  </a:txBody>
-                  <a:tcPr>
-                    <a:solidFill>
-                      <a:srgbClr val="ECFDF5"/>
-                    </a:solidFill>
-                  </a:tcPr>
-                </a:tc>
-                <a:tc>
-                  <a:txBody>
-                    <a:bodyPr/>
-                    <a:lstStyle/>
-                    <a:p>
-                      <a:pPr>
-                        <a:defRPr sz="1150" b="1">
-                          <a:solidFill>
-                            <a:srgbClr val="15803D"/>
-                          </a:solidFill>
-                        </a:defRPr>
-                      </a:pPr>
-                      <a:r>
-                        <a:t>0.8298</a:t>
-                      </a:r>
-                    </a:p>
-                  </a:txBody>
-                  <a:tcPr>
-                    <a:solidFill>
-                      <a:srgbClr val="ECFDF5"/>
-                    </a:solidFill>
-                  </a:tcPr>
-                </a:tc>
-                <a:tc>
-                  <a:txBody>
-                    <a:bodyPr/>
-                    <a:lstStyle/>
-                    <a:p>
-                      <a:pPr>
-                        <a:defRPr sz="1150" b="1">
-                          <a:solidFill>
-                            <a:srgbClr val="15803D"/>
-                          </a:solidFill>
-                        </a:defRPr>
-                      </a:pPr>
-                      <a:r>
-                        <a:t>5.66%</a:t>
-                      </a:r>
-                    </a:p>
-                  </a:txBody>
-                  <a:tcPr>
-                    <a:solidFill>
-                      <a:srgbClr val="ECFDF5"/>
-                    </a:solidFill>
-                  </a:tcPr>
-                </a:tc>
-                <a:tc>
-                  <a:txBody>
-                    <a:bodyPr/>
-                    <a:lstStyle/>
-                    <a:p>
-                      <a:pPr>
-                        <a:defRPr sz="1150" b="1">
-                          <a:solidFill>
-                            <a:srgbClr val="15803D"/>
-                          </a:solidFill>
-                        </a:defRPr>
-                      </a:pPr>
-                      <a:r>
-                        <a:t>Strict win — both numbers improve</a:t>
-                      </a:r>
-                    </a:p>
-                  </a:txBody>
-                  <a:tcPr>
-                    <a:solidFill>
-                      <a:srgbClr val="ECFDF5"/>
-                    </a:solidFill>
-                  </a:tcPr>
-                </a:tc>
-              </a:tr>
-              <a:tr h="420624">
+              <a:tr h="658368">
                 <a:tc>
                   <a:txBody>
                     <a:bodyPr/>
@@ -10456,13 +13195,13 @@
                         </a:defRPr>
                       </a:pPr>
                       <a:r>
-                        <a:t>depth=2, l2=40, lr=0.05</a:t>
-                      </a:r>
-                    </a:p>
-                  </a:txBody>
-                  <a:tcPr>
-                    <a:solidFill>
-                      <a:srgbClr val="FFFFFF"/>
+                        <a:t>depth=1, l2=25</a:t>
+                      </a:r>
+                    </a:p>
+                  </a:txBody>
+                  <a:tcPr marT="25400" marB="25400">
+                    <a:solidFill>
+                      <a:srgbClr val="F4F6FB"/>
                     </a:solidFill>
                   </a:tcPr>
                 </a:tc>
@@ -10479,13 +13218,13 @@
                         </a:defRPr>
                       </a:pPr>
                       <a:r>
-                        <a:t>0.8765</a:t>
-                      </a:r>
-                    </a:p>
-                  </a:txBody>
-                  <a:tcPr>
-                    <a:solidFill>
-                      <a:srgbClr val="FFFFFF"/>
+                        <a:t>0.8727</a:t>
+                      </a:r>
+                    </a:p>
+                  </a:txBody>
+                  <a:tcPr marT="25400" marB="25400">
+                    <a:solidFill>
+                      <a:srgbClr val="F4F6FB"/>
                     </a:solidFill>
                   </a:tcPr>
                 </a:tc>
@@ -10502,13 +13241,13 @@
                         </a:defRPr>
                       </a:pPr>
                       <a:r>
-                        <a:t>0.8280</a:t>
-                      </a:r>
-                    </a:p>
-                  </a:txBody>
-                  <a:tcPr>
-                    <a:solidFill>
-                      <a:srgbClr val="FFFFFF"/>
+                        <a:t>0.8268</a:t>
+                      </a:r>
+                    </a:p>
+                  </a:txBody>
+                  <a:tcPr marT="25400" marB="25400">
+                    <a:solidFill>
+                      <a:srgbClr val="F4F6FB"/>
                     </a:solidFill>
                   </a:tcPr>
                 </a:tc>
@@ -10525,151 +13264,11 @@
                         </a:defRPr>
                       </a:pPr>
                       <a:r>
-                        <a:t>5.54%</a:t>
-                      </a:r>
-                    </a:p>
-                  </a:txBody>
-                  <a:tcPr>
-                    <a:solidFill>
-                      <a:srgbClr val="FFFFFF"/>
-                    </a:solidFill>
-                  </a:tcPr>
-                </a:tc>
-                <a:tc>
-                  <a:txBody>
-                    <a:bodyPr/>
-                    <a:lstStyle/>
-                    <a:p>
-                      <a:pPr>
-                        <a:defRPr sz="1150" b="0">
-                          <a:solidFill>
-                            <a:srgbClr val="334155"/>
-                          </a:solidFill>
-                        </a:defRPr>
-                      </a:pPr>
-                      <a:r>
-                        <a:t>Slightly better drop, costs accuracy</a:t>
-                      </a:r>
-                    </a:p>
-                  </a:txBody>
-                  <a:tcPr>
-                    <a:solidFill>
-                      <a:srgbClr val="FFFFFF"/>
-                    </a:solidFill>
-                  </a:tcPr>
-                </a:tc>
-              </a:tr>
-              <a:tr h="420624">
-                <a:tc>
-                  <a:txBody>
-                    <a:bodyPr/>
-                    <a:lstStyle/>
-                    <a:p>
-                      <a:pPr>
-                        <a:defRPr sz="1150" b="0">
-                          <a:solidFill>
-                            <a:srgbClr val="334155"/>
-                          </a:solidFill>
-                        </a:defRPr>
-                      </a:pPr>
-                      <a:r>
-                        <a:t>depth=1, l2=25, lr=0.05</a:t>
-                      </a:r>
-                    </a:p>
-                  </a:txBody>
-                  <a:tcPr>
-                    <a:solidFill>
-                      <a:srgbClr val="F4F6FB"/>
-                    </a:solidFill>
-                  </a:tcPr>
-                </a:tc>
-                <a:tc>
-                  <a:txBody>
-                    <a:bodyPr/>
-                    <a:lstStyle/>
-                    <a:p>
-                      <a:pPr>
-                        <a:defRPr sz="1150" b="0">
-                          <a:solidFill>
-                            <a:srgbClr val="334155"/>
-                          </a:solidFill>
-                        </a:defRPr>
-                      </a:pPr>
-                      <a:r>
-                        <a:t>0.8727</a:t>
-                      </a:r>
-                    </a:p>
-                  </a:txBody>
-                  <a:tcPr>
-                    <a:solidFill>
-                      <a:srgbClr val="F4F6FB"/>
-                    </a:solidFill>
-                  </a:tcPr>
-                </a:tc>
-                <a:tc>
-                  <a:txBody>
-                    <a:bodyPr/>
-                    <a:lstStyle/>
-                    <a:p>
-                      <a:pPr>
-                        <a:defRPr sz="1150" b="0">
-                          <a:solidFill>
-                            <a:srgbClr val="334155"/>
-                          </a:solidFill>
-                        </a:defRPr>
-                      </a:pPr>
-                      <a:r>
-                        <a:t>0.8268</a:t>
-                      </a:r>
-                    </a:p>
-                  </a:txBody>
-                  <a:tcPr>
-                    <a:solidFill>
-                      <a:srgbClr val="F4F6FB"/>
-                    </a:solidFill>
-                  </a:tcPr>
-                </a:tc>
-                <a:tc>
-                  <a:txBody>
-                    <a:bodyPr/>
-                    <a:lstStyle/>
-                    <a:p>
-                      <a:pPr>
-                        <a:defRPr sz="1150" b="0">
-                          <a:solidFill>
-                            <a:srgbClr val="334155"/>
-                          </a:solidFill>
-                        </a:defRPr>
-                      </a:pPr>
-                      <a:r>
-                        <a:t>5.27%</a:t>
-                      </a:r>
-                    </a:p>
-                  </a:txBody>
-                  <a:tcPr>
-                    <a:solidFill>
-                      <a:srgbClr val="F4F6FB"/>
-                    </a:solidFill>
-                  </a:tcPr>
-                </a:tc>
-                <a:tc>
-                  <a:txBody>
-                    <a:bodyPr/>
-                    <a:lstStyle/>
-                    <a:p>
-                      <a:pPr>
-                        <a:defRPr sz="1150" b="0">
-                          <a:solidFill>
-                            <a:srgbClr val="334155"/>
-                          </a:solidFill>
-                        </a:defRPr>
-                      </a:pPr>
-                      <a:r>
-                        <a:t>Real accuracy cost, diminishing returns</a:t>
-                      </a:r>
-                    </a:p>
-                  </a:txBody>
-                  <a:tcPr>
+                        <a:t>Real accuracy loss</a:t>
+                      </a:r>
+                    </a:p>
+                  </a:txBody>
+                  <a:tcPr marT="25400" marB="25400">
                     <a:solidFill>
                       <a:srgbClr val="F4F6FB"/>
                     </a:solidFill>
@@ -10682,14 +13281,14 @@
       </p:graphicFrame>
       <p:sp>
         <p:nvSpPr>
-          <p:cNvPr id="8" name="TextBox 7"/>
+          <p:cNvPr id="9" name="TextBox 8"/>
           <p:cNvSpPr txBox="1"/>
           <p:nvPr/>
         </p:nvSpPr>
         <p:spPr>
           <a:xfrm>
-            <a:off x="548640" y="4480560"/>
-            <a:ext cx="11064240" cy="2011680"/>
+            <a:off x="457200" y="5257800"/>
+            <a:ext cx="11155680" cy="1188720"/>
           </a:xfrm>
           <a:prstGeom prst="rect">
             <a:avLst/>
@@ -10707,16 +13306,16 @@
                 <a:spcPct val="115000"/>
               </a:lnSpc>
               <a:spcAft>
-                <a:spcPts val="600"/>
+                <a:spcPts val="500"/>
               </a:spcAft>
-              <a:defRPr sz="1500">
+              <a:defRPr sz="1400">
                 <a:solidFill>
                   <a:srgbClr val="334155"/>
                 </a:solidFill>
               </a:defRPr>
             </a:pPr>
             <a:r>
-              <a:t>• Conclusion: the model was genuinely overfitting to cell-specific noise at depth=6 — shallower, more-regularized trees improve BOTH seen and unseen accuracy simultaneously (not a tradeoff)</a:t>
+              <a:t>• depth=3/l2=25 improves BOTH seen and unseen accuracy at once — a strict win, not a tradeoff</a:t>
             </a:r>
           </a:p>
           <a:p>
@@ -10725,34 +13324,16 @@
                 <a:spcPct val="115000"/>
               </a:lnSpc>
               <a:spcAft>
-                <a:spcPts val="600"/>
+                <a:spcPts val="500"/>
               </a:spcAft>
-              <a:defRPr sz="1500">
+              <a:defRPr sz="1400">
                 <a:solidFill>
                   <a:srgbClr val="334155"/>
                 </a:solidFill>
               </a:defRPr>
             </a:pPr>
             <a:r>
-              <a:t>• Adopted depth=3 / l2_leaf_reg=25 as the last "free" point on the curve; pushing further trades real seen-cell accuracy for diminishing spatial gains, with no config crossing the 5% bar</a:t>
-            </a:r>
-          </a:p>
-          <a:p>
-            <a:pPr>
-              <a:lnSpc>
-                <a:spcPct val="115000"/>
-              </a:lnSpc>
-              <a:spcAft>
-                <a:spcPts val="600"/>
-              </a:spcAft>
-              <a:defRPr sz="1500">
-                <a:solidFill>
-                  <a:srgbClr val="334155"/>
-                </a:solidFill>
-              </a:defRPr>
-            </a:pPr>
-            <a:r>
-              <a:t>• Honest conclusion: the remaining gap looks like a genuine floor given what's derivable from this dataset alone (no external geographic enrichment permitted), not a missed hyperparameter</a:t>
+              <a:t>• Pushing shallower trades real accuracy for diminishing spatial gains — none crossed the 5% bar</a:t>
             </a:r>
           </a:p>
         </p:txBody>
@@ -10846,7 +13427,6 @@
                 <a:solidFill>
                   <a:srgbClr val="FFFFFF"/>
                 </a:solidFill>
-                <a:latin typeface="Calibri"/>
               </a:rPr>
               <a:t>Retraining Pipeline &amp; Review Workflow</a:t>
             </a:r>
@@ -10881,7 +13461,6 @@
                 <a:solidFill>
                   <a:srgbClr val="C7D2FE"/>
                 </a:solidFill>
-                <a:latin typeface="Calibri"/>
               </a:rPr>
               <a:t>Closing the "frozen model" gap (ADR-024)</a:t>
             </a:r>
@@ -10940,7 +13519,7 @@
         <p:spPr>
           <a:xfrm>
             <a:off x="320040" y="1371600"/>
-            <a:ext cx="1554480" cy="1371600"/>
+            <a:ext cx="1554480" cy="1280160"/>
           </a:xfrm>
           <a:prstGeom prst="rect">
             <a:avLst/>
@@ -10983,7 +13562,7 @@
         <p:spPr>
           <a:xfrm>
             <a:off x="356616" y="1481328"/>
-            <a:ext cx="1481328" cy="1188720"/>
+            <a:ext cx="1481328" cy="1097280"/>
           </a:xfrm>
           <a:prstGeom prst="rect">
             <a:avLst/>
@@ -11003,8 +13582,8 @@
                   <a:srgbClr val="FFFFFF"/>
                 </a:solidFill>
               </a:rPr>
-              <a:t>Police upload
-CSV</a:t>
+              <a:t>Police
+upload CSV</a:t>
             </a:r>
           </a:p>
         </p:txBody>
@@ -11018,7 +13597,7 @@
         <p:spPr>
           <a:xfrm>
             <a:off x="1965960" y="1371600"/>
-            <a:ext cx="1554480" cy="1371600"/>
+            <a:ext cx="1554480" cy="1280160"/>
           </a:xfrm>
           <a:prstGeom prst="rect">
             <a:avLst/>
@@ -11061,7 +13640,7 @@
         <p:spPr>
           <a:xfrm>
             <a:off x="2002536" y="1481328"/>
-            <a:ext cx="1481328" cy="1188720"/>
+            <a:ext cx="1481328" cy="1097280"/>
           </a:xfrm>
           <a:prstGeom prst="rect">
             <a:avLst/>
@@ -11081,9 +13660,8 @@
                   <a:srgbClr val="FFFFFF"/>
                 </a:solidFill>
               </a:rPr>
-              <a:t>Lands as
-PENDING
-(staged, isolated)</a:t>
+              <a:t>PENDING
+staging</a:t>
             </a:r>
           </a:p>
         </p:txBody>
@@ -11097,7 +13675,7 @@
         <p:spPr>
           <a:xfrm>
             <a:off x="3611880" y="1371600"/>
-            <a:ext cx="1554480" cy="1371600"/>
+            <a:ext cx="1554480" cy="1280160"/>
           </a:xfrm>
           <a:prstGeom prst="rect">
             <a:avLst/>
@@ -11140,7 +13718,7 @@
         <p:spPr>
           <a:xfrm>
             <a:off x="3648456" y="1481328"/>
-            <a:ext cx="1481328" cy="1188720"/>
+            <a:ext cx="1481328" cy="1097280"/>
           </a:xfrm>
           <a:prstGeom prst="rect">
             <a:avLst/>
@@ -11161,8 +13739,7 @@
                 </a:solidFill>
               </a:rPr>
               <a:t>Reviewer
-approves /
-rejects</a:t>
+approve/reject</a:t>
             </a:r>
           </a:p>
         </p:txBody>
@@ -11176,7 +13753,7 @@
         <p:spPr>
           <a:xfrm>
             <a:off x="5257800" y="1371600"/>
-            <a:ext cx="1554480" cy="1371600"/>
+            <a:ext cx="1554480" cy="1280160"/>
           </a:xfrm>
           <a:prstGeom prst="rect">
             <a:avLst/>
@@ -11219,7 +13796,7 @@
         <p:spPr>
           <a:xfrm>
             <a:off x="5294376" y="1481328"/>
-            <a:ext cx="1481328" cy="1188720"/>
+            <a:ext cx="1481328" cy="1097280"/>
           </a:xfrm>
           <a:prstGeom prst="rect">
             <a:avLst/>
@@ -11239,8 +13816,7 @@
                   <a:srgbClr val="FFFFFF"/>
                 </a:solidFill>
               </a:rPr>
-              <a:t>Approved rows
-merge into
+              <a:t>Merge into
 master dataset</a:t>
             </a:r>
           </a:p>
@@ -11255,7 +13831,7 @@
         <p:spPr>
           <a:xfrm>
             <a:off x="6903720" y="1371600"/>
-            <a:ext cx="1554480" cy="1371600"/>
+            <a:ext cx="1554480" cy="1280160"/>
           </a:xfrm>
           <a:prstGeom prst="rect">
             <a:avLst/>
@@ -11298,7 +13874,7 @@
         <p:spPr>
           <a:xfrm>
             <a:off x="6940296" y="1481328"/>
-            <a:ext cx="1481328" cy="1188720"/>
+            <a:ext cx="1481328" cy="1097280"/>
           </a:xfrm>
           <a:prstGeom prst="rect">
             <a:avLst/>
@@ -11319,8 +13895,7 @@
                 </a:solidFill>
               </a:rPr>
               <a:t>Explicit
-Retrain
-trigger</a:t>
+Retrain</a:t>
             </a:r>
           </a:p>
         </p:txBody>
@@ -11334,7 +13909,7 @@
         <p:spPr>
           <a:xfrm>
             <a:off x="8549640" y="1371600"/>
-            <a:ext cx="1554480" cy="1371600"/>
+            <a:ext cx="1554480" cy="1280160"/>
           </a:xfrm>
           <a:prstGeom prst="rect">
             <a:avLst/>
@@ -11377,7 +13952,7 @@
         <p:spPr>
           <a:xfrm>
             <a:off x="8586216" y="1481328"/>
-            <a:ext cx="1481328" cy="1188720"/>
+            <a:ext cx="1481328" cy="1097280"/>
           </a:xfrm>
           <a:prstGeom prst="rect">
             <a:avLst/>
@@ -11397,9 +13972,8 @@
                   <a:srgbClr val="FFFFFF"/>
                 </a:solidFill>
               </a:rPr>
-              <a:t>Full pipeline
-re-runs
-(background)</a:t>
+              <a:t>Pipeline
+re-runs</a:t>
             </a:r>
           </a:p>
         </p:txBody>
@@ -11413,7 +13987,7 @@
         <p:spPr>
           <a:xfrm>
             <a:off x="10195560" y="1371600"/>
-            <a:ext cx="1554480" cy="1371600"/>
+            <a:ext cx="1554480" cy="1280160"/>
           </a:xfrm>
           <a:prstGeom prst="rect">
             <a:avLst/>
@@ -11456,7 +14030,7 @@
         <p:spPr>
           <a:xfrm>
             <a:off x="10232136" y="1481328"/>
-            <a:ext cx="1481328" cy="1188720"/>
+            <a:ext cx="1481328" cy="1097280"/>
           </a:xfrm>
           <a:prstGeom prst="rect">
             <a:avLst/>
@@ -11476,144 +14050,326 @@
                   <a:srgbClr val="FFFFFF"/>
                 </a:solidFill>
               </a:rPr>
-              <a:t>Serving layer
-hot-reloads
+              <a:t>Hot-reload
 (zero downtime)</a:t>
             </a:r>
           </a:p>
         </p:txBody>
       </p:sp>
-      <p:sp>
-        <p:nvSpPr>
-          <p:cNvPr id="20" name="TextBox 19"/>
-          <p:cNvSpPr txBox="1"/>
-          <p:nvPr/>
-        </p:nvSpPr>
-        <p:spPr>
-          <a:xfrm>
-            <a:off x="548640" y="3063240"/>
-            <a:ext cx="11064240" cy="3383280"/>
-          </a:xfrm>
-          <a:prstGeom prst="rect">
-            <a:avLst/>
-          </a:prstGeom>
-          <a:noFill/>
-        </p:spPr>
-        <p:txBody>
-          <a:bodyPr wrap="square">
-            <a:spAutoFit/>
-          </a:bodyPr>
-          <a:lstStyle/>
-          <a:p>
-            <a:pPr>
-              <a:lnSpc>
-                <a:spcPct val="115000"/>
-              </a:lnSpc>
-              <a:spcAft>
-                <a:spcPts val="600"/>
-              </a:spcAft>
-              <a:defRPr sz="1450">
-                <a:solidFill>
-                  <a:srgbClr val="334155"/>
-                </a:solidFill>
-              </a:defRPr>
-            </a:pPr>
-            <a:r>
-              <a:t>• Why a staging area, not direct merge: mirrors a real moderation workflow — an uploaded file doesn't silently become part of the model; a professional reviews row counts, schema validity, and null counts before approving</a:t>
-            </a:r>
-          </a:p>
-          <a:p>
-            <a:pPr>
-              <a:lnSpc>
-                <a:spcPct val="115000"/>
-              </a:lnSpc>
-              <a:spcAft>
-                <a:spcPts val="600"/>
-              </a:spcAft>
-              <a:defRPr sz="1450">
-                <a:solidFill>
-                  <a:srgbClr val="334155"/>
-                </a:solidFill>
-              </a:defRPr>
-            </a:pPr>
-            <a:r>
-              <a:t>• raw_store.py owns the master CSV (dedupe by id, schema validation, append); staging_store.py owns the PENDING → APPROVED/REJECTED lifecycle, reusing raw_store's merge logic rather than duplicating it</a:t>
-            </a:r>
-          </a:p>
-          <a:p>
-            <a:pPr>
-              <a:lnSpc>
-                <a:spcPct val="115000"/>
-              </a:lnSpc>
-              <a:spcAft>
-                <a:spcPts val="600"/>
-              </a:spcAft>
-              <a:defRPr sz="1450">
-                <a:solidFill>
-                  <a:srgbClr val="334155"/>
-                </a:solidFill>
-              </a:defRPr>
-            </a:pPr>
-            <a:r>
-              <a:t>• Retrain is a SEPARATE, explicit action from approval — multiple approved uploads can batch up before paying the ~6-minute retrain cost</a:t>
-            </a:r>
-          </a:p>
-          <a:p>
-            <a:pPr>
-              <a:lnSpc>
-                <a:spcPct val="115000"/>
-              </a:lnSpc>
-              <a:spcAft>
-                <a:spcPts val="600"/>
-              </a:spcAft>
-              <a:defRPr sz="1450">
-                <a:solidFill>
-                  <a:srgbClr val="334155"/>
-                </a:solidFill>
-              </a:defRPr>
-            </a:pPr>
-            <a:r>
-              <a:t>• On successful retrain: archives the prior ml/models/ directory by timestamp, then runs features → train → risk-weight fit → spatial holdout re-check → alert generation, end to end</a:t>
-            </a:r>
-          </a:p>
-          <a:p>
-            <a:pPr>
-              <a:lnSpc>
-                <a:spcPct val="115000"/>
-              </a:lnSpc>
-              <a:spcAft>
-                <a:spcPts val="600"/>
-              </a:spcAft>
-              <a:defRPr sz="1450">
-                <a:solidFill>
-                  <a:srgbClr val="334155"/>
-                </a:solidFill>
-              </a:defRPr>
-            </a:pPr>
-            <a:r>
-              <a:t>• Admin dashboard tab: token field (localStorage), CSV upload, staging review table with Approve/Reject, Retrain Now button with live job-status polling</a:t>
-            </a:r>
-          </a:p>
-          <a:p>
-            <a:pPr>
-              <a:lnSpc>
-                <a:spcPct val="115000"/>
-              </a:lnSpc>
-              <a:spcAft>
-                <a:spcPts val="600"/>
-              </a:spcAft>
-              <a:defRPr sz="1450">
-                <a:solidFill>
-                  <a:srgbClr val="334155"/>
-                </a:solidFill>
-              </a:defRPr>
-            </a:pPr>
-            <a:r>
-              <a:t>• Disclosed limitation: on ephemeral-filesystem hosts (free-tier HF Space/Render) without a persistent volume, uploaded data and retrained artifacts don't survive a redeploy — a deployment-infrastructure decision, not a code gap</a:t>
-            </a:r>
-          </a:p>
-        </p:txBody>
-      </p:sp>
+      <p:graphicFrame>
+        <p:nvGraphicFramePr>
+          <p:cNvPr id="20" name="Table 19"/>
+          <p:cNvGraphicFramePr>
+            <a:graphicFrameLocks noGrp="1"/>
+          </p:cNvGraphicFramePr>
+          <p:nvPr/>
+        </p:nvGraphicFramePr>
+        <p:xfrm>
+          <a:off x="457200" y="2926080"/>
+          <a:ext cx="11155680" cy="2743200"/>
+        </p:xfrm>
+        <a:graphic>
+          <a:graphicData uri="http://schemas.openxmlformats.org/drawingml/2006/table">
+            <a:tbl>
+              <a:tblPr firstRow="1" bandRow="1">
+                <a:tableStyleId>{5C22544A-7EE6-4342-B048-85BDC9FD1C3A}</a:tableStyleId>
+              </a:tblPr>
+              <a:tblGrid>
+                <a:gridCol w="2377440"/>
+                <a:gridCol w="8778240"/>
+              </a:tblGrid>
+              <a:tr h="457200">
+                <a:tc>
+                  <a:txBody>
+                    <a:bodyPr/>
+                    <a:lstStyle/>
+                    <a:p>
+                      <a:pPr>
+                        <a:defRPr sz="1300" b="1">
+                          <a:solidFill>
+                            <a:srgbClr val="FFFFFF"/>
+                          </a:solidFill>
+                        </a:defRPr>
+                      </a:pPr>
+                      <a:r>
+                        <a:t>Component</a:t>
+                      </a:r>
+                    </a:p>
+                  </a:txBody>
+                  <a:tcPr marT="25400" marB="25400">
+                    <a:solidFill>
+                      <a:srgbClr val="0F172A"/>
+                    </a:solidFill>
+                  </a:tcPr>
+                </a:tc>
+                <a:tc>
+                  <a:txBody>
+                    <a:bodyPr/>
+                    <a:lstStyle/>
+                    <a:p>
+                      <a:pPr>
+                        <a:defRPr sz="1300" b="1">
+                          <a:solidFill>
+                            <a:srgbClr val="FFFFFF"/>
+                          </a:solidFill>
+                        </a:defRPr>
+                      </a:pPr>
+                      <a:r>
+                        <a:t>Responsibility</a:t>
+                      </a:r>
+                    </a:p>
+                  </a:txBody>
+                  <a:tcPr marT="25400" marB="25400">
+                    <a:solidFill>
+                      <a:srgbClr val="0F172A"/>
+                    </a:solidFill>
+                  </a:tcPr>
+                </a:tc>
+              </a:tr>
+              <a:tr h="457200">
+                <a:tc>
+                  <a:txBody>
+                    <a:bodyPr/>
+                    <a:lstStyle/>
+                    <a:p>
+                      <a:pPr>
+                        <a:defRPr sz="1300" b="0">
+                          <a:solidFill>
+                            <a:srgbClr val="334155"/>
+                          </a:solidFill>
+                        </a:defRPr>
+                      </a:pPr>
+                      <a:r>
+                        <a:t>staging_store.py</a:t>
+                      </a:r>
+                    </a:p>
+                  </a:txBody>
+                  <a:tcPr marT="25400" marB="25400">
+                    <a:solidFill>
+                      <a:srgbClr val="FFFFFF"/>
+                    </a:solidFill>
+                  </a:tcPr>
+                </a:tc>
+                <a:tc>
+                  <a:txBody>
+                    <a:bodyPr/>
+                    <a:lstStyle/>
+                    <a:p>
+                      <a:pPr>
+                        <a:defRPr sz="1300" b="0">
+                          <a:solidFill>
+                            <a:srgbClr val="334155"/>
+                          </a:solidFill>
+                        </a:defRPr>
+                      </a:pPr>
+                      <a:r>
+                        <a:t>Owns PENDING → APPROVED/REJECTED lifecycle; reuses raw_store's merge logic</a:t>
+                      </a:r>
+                    </a:p>
+                  </a:txBody>
+                  <a:tcPr marT="25400" marB="25400">
+                    <a:solidFill>
+                      <a:srgbClr val="FFFFFF"/>
+                    </a:solidFill>
+                  </a:tcPr>
+                </a:tc>
+              </a:tr>
+              <a:tr h="457200">
+                <a:tc>
+                  <a:txBody>
+                    <a:bodyPr/>
+                    <a:lstStyle/>
+                    <a:p>
+                      <a:pPr>
+                        <a:defRPr sz="1300" b="0">
+                          <a:solidFill>
+                            <a:srgbClr val="334155"/>
+                          </a:solidFill>
+                        </a:defRPr>
+                      </a:pPr>
+                      <a:r>
+                        <a:t>raw_store.py</a:t>
+                      </a:r>
+                    </a:p>
+                  </a:txBody>
+                  <a:tcPr marT="25400" marB="25400">
+                    <a:solidFill>
+                      <a:srgbClr val="F4F6FB"/>
+                    </a:solidFill>
+                  </a:tcPr>
+                </a:tc>
+                <a:tc>
+                  <a:txBody>
+                    <a:bodyPr/>
+                    <a:lstStyle/>
+                    <a:p>
+                      <a:pPr>
+                        <a:defRPr sz="1300" b="0">
+                          <a:solidFill>
+                            <a:srgbClr val="334155"/>
+                          </a:solidFill>
+                        </a:defRPr>
+                      </a:pPr>
+                      <a:r>
+                        <a:t>Owns the master CSV — schema validation, dedupe by id, append</a:t>
+                      </a:r>
+                    </a:p>
+                  </a:txBody>
+                  <a:tcPr marT="25400" marB="25400">
+                    <a:solidFill>
+                      <a:srgbClr val="F4F6FB"/>
+                    </a:solidFill>
+                  </a:tcPr>
+                </a:tc>
+              </a:tr>
+              <a:tr h="457200">
+                <a:tc>
+                  <a:txBody>
+                    <a:bodyPr/>
+                    <a:lstStyle/>
+                    <a:p>
+                      <a:pPr>
+                        <a:defRPr sz="1300" b="0">
+                          <a:solidFill>
+                            <a:srgbClr val="334155"/>
+                          </a:solidFill>
+                        </a:defRPr>
+                      </a:pPr>
+                      <a:r>
+                        <a:t>retrain.py</a:t>
+                      </a:r>
+                    </a:p>
+                  </a:txBody>
+                  <a:tcPr marT="25400" marB="25400">
+                    <a:solidFill>
+                      <a:srgbClr val="FFFFFF"/>
+                    </a:solidFill>
+                  </a:tcPr>
+                </a:tc>
+                <a:tc>
+                  <a:txBody>
+                    <a:bodyPr/>
+                    <a:lstStyle/>
+                    <a:p>
+                      <a:pPr>
+                        <a:defRPr sz="1300" b="0">
+                          <a:solidFill>
+                            <a:srgbClr val="334155"/>
+                          </a:solidFill>
+                        </a:defRPr>
+                      </a:pPr>
+                      <a:r>
+                        <a:t>Archives prior ml/models/ by timestamp, then runs features → train → risk-weight fit → spatial holdout → alerts</a:t>
+                      </a:r>
+                    </a:p>
+                  </a:txBody>
+                  <a:tcPr marT="25400" marB="25400">
+                    <a:solidFill>
+                      <a:srgbClr val="FFFFFF"/>
+                    </a:solidFill>
+                  </a:tcPr>
+                </a:tc>
+              </a:tr>
+              <a:tr h="457200">
+                <a:tc>
+                  <a:txBody>
+                    <a:bodyPr/>
+                    <a:lstStyle/>
+                    <a:p>
+                      <a:pPr>
+                        <a:defRPr sz="1300" b="0">
+                          <a:solidFill>
+                            <a:srgbClr val="334155"/>
+                          </a:solidFill>
+                        </a:defRPr>
+                      </a:pPr>
+                      <a:r>
+                        <a:t>Admin dashboard tab</a:t>
+                      </a:r>
+                    </a:p>
+                  </a:txBody>
+                  <a:tcPr marT="25400" marB="25400">
+                    <a:solidFill>
+                      <a:srgbClr val="F4F6FB"/>
+                    </a:solidFill>
+                  </a:tcPr>
+                </a:tc>
+                <a:tc>
+                  <a:txBody>
+                    <a:bodyPr/>
+                    <a:lstStyle/>
+                    <a:p>
+                      <a:pPr>
+                        <a:defRPr sz="1300" b="0">
+                          <a:solidFill>
+                            <a:srgbClr val="334155"/>
+                          </a:solidFill>
+                        </a:defRPr>
+                      </a:pPr>
+                      <a:r>
+                        <a:t>Token field, CSV upload, staging review table, Retrain Now button with live job polling</a:t>
+                      </a:r>
+                    </a:p>
+                  </a:txBody>
+                  <a:tcPr marT="25400" marB="25400">
+                    <a:solidFill>
+                      <a:srgbClr val="F4F6FB"/>
+                    </a:solidFill>
+                  </a:tcPr>
+                </a:tc>
+              </a:tr>
+              <a:tr h="457200">
+                <a:tc>
+                  <a:txBody>
+                    <a:bodyPr/>
+                    <a:lstStyle/>
+                    <a:p>
+                      <a:pPr>
+                        <a:defRPr sz="1300" b="0">
+                          <a:solidFill>
+                            <a:srgbClr val="334155"/>
+                          </a:solidFill>
+                        </a:defRPr>
+                      </a:pPr>
+                      <a:r>
+                        <a:t>Disclosed limitation</a:t>
+                      </a:r>
+                    </a:p>
+                  </a:txBody>
+                  <a:tcPr marT="25400" marB="25400">
+                    <a:solidFill>
+                      <a:srgbClr val="FFFFFF"/>
+                    </a:solidFill>
+                  </a:tcPr>
+                </a:tc>
+                <a:tc>
+                  <a:txBody>
+                    <a:bodyPr/>
+                    <a:lstStyle/>
+                    <a:p>
+                      <a:pPr>
+                        <a:defRPr sz="1300" b="0">
+                          <a:solidFill>
+                            <a:srgbClr val="334155"/>
+                          </a:solidFill>
+                        </a:defRPr>
+                      </a:pPr>
+                      <a:r>
+                        <a:t>Ephemeral-filesystem hosts without a persistent volume lose data on redeploy — infra decision, not a code gap</a:t>
+                      </a:r>
+                    </a:p>
+                  </a:txBody>
+                  <a:tcPr marT="25400" marB="25400">
+                    <a:solidFill>
+                      <a:srgbClr val="FFFFFF"/>
+                    </a:solidFill>
+                  </a:tcPr>
+                </a:tc>
+              </a:tr>
+            </a:tbl>
+          </a:graphicData>
+        </a:graphic>
+      </p:graphicFrame>
     </p:spTree>
   </p:cSld>
   <p:clrMapOvr>
